--- a/outputs/manual-20260611-qbs/presentations/quality-based-video-streaming/output/AI-Driven-Adaptive-DASH-Streaming-QoS.pptx
+++ b/outputs/manual-20260611-qbs/presentations/quality-based-video-streaming/output/AI-Driven-Adaptive-DASH-Streaming-QoS.pptx
@@ -2,21 +2,22 @@
 <file path=ppt/presentation.xml><?xml version="1.0" encoding="utf-8"?>
 <p:presentation xmlns:p="http://schemas.openxmlformats.org/presentationml/2006/main">
   <p:sldMasterIdLst>
-    <p:sldMasterId xmlns:r="http://schemas.openxmlformats.org/officeDocument/2006/relationships" id="2147483648" r:id="R57c58a622de4496c"/>
+    <p:sldMasterId xmlns:r="http://schemas.openxmlformats.org/officeDocument/2006/relationships" id="2147483648" r:id="R7ca0ba43fc41442f"/>
   </p:sldMasterIdLst>
   <p:notesMasterIdLst>
-    <p:notesMasterId xmlns:r="http://schemas.openxmlformats.org/officeDocument/2006/relationships" r:id="R7e07edef04834301"/>
+    <p:notesMasterId xmlns:r="http://schemas.openxmlformats.org/officeDocument/2006/relationships" r:id="R7b068754c6784c47"/>
   </p:notesMasterIdLst>
   <p:sldIdLst>
-    <p:sldId xmlns:r="http://schemas.openxmlformats.org/officeDocument/2006/relationships" id="256" r:id="R5c8bb3ed4eb14068"/>
-    <p:sldId xmlns:r="http://schemas.openxmlformats.org/officeDocument/2006/relationships" id="257" r:id="Rb48496ee6933470a"/>
-    <p:sldId xmlns:r="http://schemas.openxmlformats.org/officeDocument/2006/relationships" id="258" r:id="Rde21577aaafd4edd"/>
-    <p:sldId xmlns:r="http://schemas.openxmlformats.org/officeDocument/2006/relationships" id="259" r:id="R51b6f52ff3b94cf3"/>
-    <p:sldId xmlns:r="http://schemas.openxmlformats.org/officeDocument/2006/relationships" id="260" r:id="Rf788a35447554fcf"/>
-    <p:sldId xmlns:r="http://schemas.openxmlformats.org/officeDocument/2006/relationships" id="261" r:id="R9eea77ac805a4791"/>
-    <p:sldId xmlns:r="http://schemas.openxmlformats.org/officeDocument/2006/relationships" id="262" r:id="R6a7143e3cde64af5"/>
-    <p:sldId xmlns:r="http://schemas.openxmlformats.org/officeDocument/2006/relationships" id="263" r:id="R6364181bc3f64823"/>
-    <p:sldId xmlns:r="http://schemas.openxmlformats.org/officeDocument/2006/relationships" id="264" r:id="R3cea3553e1b246ef"/>
+    <p:sldId xmlns:r="http://schemas.openxmlformats.org/officeDocument/2006/relationships" id="256" r:id="R781f40bd7acf4c37"/>
+    <p:sldId xmlns:r="http://schemas.openxmlformats.org/officeDocument/2006/relationships" id="257" r:id="Rbb04584482334c11"/>
+    <p:sldId xmlns:r="http://schemas.openxmlformats.org/officeDocument/2006/relationships" id="258" r:id="R722cd9aba5284a2a"/>
+    <p:sldId xmlns:r="http://schemas.openxmlformats.org/officeDocument/2006/relationships" id="259" r:id="R607e1464c02b448e"/>
+    <p:sldId xmlns:r="http://schemas.openxmlformats.org/officeDocument/2006/relationships" id="260" r:id="Rcf32b95061104a53"/>
+    <p:sldId xmlns:r="http://schemas.openxmlformats.org/officeDocument/2006/relationships" id="261" r:id="R718213424aa84723"/>
+    <p:sldId xmlns:r="http://schemas.openxmlformats.org/officeDocument/2006/relationships" id="262" r:id="Rd0d88276d3a84941"/>
+    <p:sldId xmlns:r="http://schemas.openxmlformats.org/officeDocument/2006/relationships" id="263" r:id="R48363dd963c843ad"/>
+    <p:sldId xmlns:r="http://schemas.openxmlformats.org/officeDocument/2006/relationships" id="264" r:id="Rebc0274f5786424e"/>
+    <p:sldId xmlns:r="http://schemas.openxmlformats.org/officeDocument/2006/relationships" id="265" r:id="Re939394f98224ebd"/>
   </p:sldIdLst>
   <p:sldSz cx="12192000" cy="6858000"/>
   <p:notesSz cx="6858000" cy="9144000"/>
@@ -525,6 +526,72 @@
 </p:notes>
 </file>
 
+<file path=ppt/notesSlides/notesSlide10.xml><?xml version="1.0" encoding="utf-8"?>
+<p:notes xmlns:p="http://schemas.openxmlformats.org/presentationml/2006/main">
+  <p:cSld>
+    <p:spTree>
+      <p:nvGrpSpPr>
+        <p:cNvPr id="1" name=""/>
+        <p:cNvGrpSpPr/>
+        <p:nvPr/>
+      </p:nvGrpSpPr>
+      <p:grpSpPr>
+        <a:xfrm xmlns:a="http://schemas.openxmlformats.org/drawingml/2006/main"/>
+      </p:grpSpPr>
+      <p:sp>
+        <p:nvSpPr>
+          <p:cNvPr id="2" name="Slide Image Placeholder 1"/>
+          <p:cNvSpPr>
+            <a:spLocks xmlns:a="http://schemas.openxmlformats.org/drawingml/2006/main" noGrp="1"/>
+          </p:cNvSpPr>
+          <p:nvPr>
+            <p:ph type="sldImg" idx="0"/>
+          </p:nvPr>
+        </p:nvSpPr>
+        <p:spPr/>
+      </p:sp>
+      <p:sp>
+        <p:nvSpPr>
+          <p:cNvPr id="3" name="Notes Placeholder 2"/>
+          <p:cNvSpPr>
+            <a:spLocks xmlns:a="http://schemas.openxmlformats.org/drawingml/2006/main" noGrp="1"/>
+          </p:cNvSpPr>
+          <p:nvPr>
+            <p:ph type="body" idx="1"/>
+          </p:nvPr>
+        </p:nvSpPr>
+        <p:spPr/>
+        <p:txBody>
+          <a:bodyPr xmlns:a="http://schemas.openxmlformats.org/drawingml/2006/main"/>
+          <a:lstStyle xmlns:a="http://schemas.openxmlformats.org/drawingml/2006/main"/>
+          <a:p xmlns:a="http://schemas.openxmlformats.org/drawingml/2006/main"/>
+        </p:txBody>
+      </p:sp>
+      <p:sp>
+        <p:nvSpPr>
+          <p:cNvPr id="4" name="Slide Number Placeholder 3"/>
+          <p:cNvSpPr>
+            <a:spLocks xmlns:a="http://schemas.openxmlformats.org/drawingml/2006/main" noGrp="1"/>
+          </p:cNvSpPr>
+          <p:nvPr>
+            <p:ph type="sldNum" idx="5"/>
+          </p:nvPr>
+        </p:nvSpPr>
+        <p:spPr/>
+        <p:txBody>
+          <a:bodyPr xmlns:a="http://schemas.openxmlformats.org/drawingml/2006/main"/>
+          <a:lstStyle xmlns:a="http://schemas.openxmlformats.org/drawingml/2006/main"/>
+          <a:p xmlns:a="http://schemas.openxmlformats.org/drawingml/2006/main"/>
+        </p:txBody>
+      </p:sp>
+    </p:spTree>
+  </p:cSld>
+  <p:clrMapOvr>
+    <a:masterClrMapping xmlns:a="http://schemas.openxmlformats.org/drawingml/2006/main"/>
+  </p:clrMapOvr>
+</p:notes>
+</file>
+
 <file path=ppt/notesSlides/notesSlide2.xml><?xml version="1.0" encoding="utf-8"?>
 <p:notes xmlns:p="http://schemas.openxmlformats.org/presentationml/2006/main">
   <p:cSld>
@@ -1091,7 +1158,7 @@
   </p:cSld>
   <p:clrMap bg1="lt1" tx1="dk1" bg2="lt2" tx2="dk2" accent1="accent1" accent2="accent2" accent3="accent3" accent4="accent4" accent5="accent5" accent6="accent6" hlink="hlink" folHlink="folHlink"/>
   <p:sldLayoutIdLst>
-    <p:sldLayoutId xmlns:r="http://schemas.openxmlformats.org/officeDocument/2006/relationships" id="2147483649" r:id="Rb887b6fb2b7a4e9f"/>
+    <p:sldLayoutId xmlns:r="http://schemas.openxmlformats.org/officeDocument/2006/relationships" id="2147483649" r:id="Rceee316b14884f07"/>
   </p:sldLayoutIdLst>
   <p:txStyles>
     <p:titleStyle>
@@ -1390,7 +1457,7 @@
           <p:cNvPr id="1" name="">
             <a:extLst xmlns:a="http://schemas.openxmlformats.org/drawingml/2006/main">
               <a:ext uri="{FF2B5EF4-FFF2-40B4-BE49-F238E27FC236}">
-                <a16:creationId xmlns:a16="http://schemas.microsoft.com/office/drawing/2014/main" id="{77E8B4DC-EFF4-49BC-B2BB-F34DD6FB5689}"/>
+                <a16:creationId xmlns:a16="http://schemas.microsoft.com/office/drawing/2014/main" id="{02497E79-76EF-4A90-809A-F58D985FE520}"/>
               </a:ext>
             </a:extLst>
           </p:cNvPr>
@@ -1425,7 +1492,7 @@
           <p:cNvPr id="2" name="kicker-marker">
             <a:extLst xmlns:a="http://schemas.openxmlformats.org/drawingml/2006/main">
               <a:ext uri="{FF2B5EF4-FFF2-40B4-BE49-F238E27FC236}">
-                <a16:creationId xmlns:a16="http://schemas.microsoft.com/office/drawing/2014/main" id="{C6F47432-7CC2-471D-B107-DF76248EBBB8}"/>
+                <a16:creationId xmlns:a16="http://schemas.microsoft.com/office/drawing/2014/main" id="{56336BC2-226A-44B8-B434-01442B7072A6}"/>
               </a:ext>
             </a:extLst>
           </p:cNvPr>
@@ -1460,7 +1527,7 @@
           <p:cNvPr id="3" name="kicker-label">
             <a:extLst xmlns:a="http://schemas.openxmlformats.org/drawingml/2006/main">
               <a:ext uri="{FF2B5EF4-FFF2-40B4-BE49-F238E27FC236}">
-                <a16:creationId xmlns:a16="http://schemas.microsoft.com/office/drawing/2014/main" id="{9EE1B6E6-40F1-4BF3-BA92-F1BF4604FEAB}"/>
+                <a16:creationId xmlns:a16="http://schemas.microsoft.com/office/drawing/2014/main" id="{8C7EDF29-0E13-44EB-AC5C-AEB79674231B}"/>
               </a:ext>
             </a:extLst>
           </p:cNvPr>
@@ -1524,7 +1591,7 @@
           <p:cNvPr id="4" name="">
             <a:extLst xmlns:a="http://schemas.openxmlformats.org/drawingml/2006/main">
               <a:ext uri="{FF2B5EF4-FFF2-40B4-BE49-F238E27FC236}">
-                <a16:creationId xmlns:a16="http://schemas.microsoft.com/office/drawing/2014/main" id="{427505BB-13EC-4338-99FE-B53F7CBA432E}"/>
+                <a16:creationId xmlns:a16="http://schemas.microsoft.com/office/drawing/2014/main" id="{8248D233-84FE-4195-AA52-20FF89734EBE}"/>
               </a:ext>
             </a:extLst>
           </p:cNvPr>
@@ -1588,7 +1655,7 @@
           <p:cNvPr id="5" name="">
             <a:extLst xmlns:a="http://schemas.openxmlformats.org/drawingml/2006/main">
               <a:ext uri="{FF2B5EF4-FFF2-40B4-BE49-F238E27FC236}">
-                <a16:creationId xmlns:a16="http://schemas.microsoft.com/office/drawing/2014/main" id="{700BD8C6-6143-46BE-9AEE-C438CC89D324}"/>
+                <a16:creationId xmlns:a16="http://schemas.microsoft.com/office/drawing/2014/main" id="{941A807A-A5BE-4D7A-8187-88F1118C3C99}"/>
               </a:ext>
             </a:extLst>
           </p:cNvPr>
@@ -1652,7 +1719,7 @@
           <p:cNvPr id="6" name="">
             <a:extLst xmlns:a="http://schemas.openxmlformats.org/drawingml/2006/main">
               <a:ext uri="{FF2B5EF4-FFF2-40B4-BE49-F238E27FC236}">
-                <a16:creationId xmlns:a16="http://schemas.microsoft.com/office/drawing/2014/main" id="{2056272D-BA20-4F90-9A4F-C4606F71D0DB}"/>
+                <a16:creationId xmlns:a16="http://schemas.microsoft.com/office/drawing/2014/main" id="{0849F03A-0B80-4C5B-A515-241E51C7A090}"/>
               </a:ext>
             </a:extLst>
           </p:cNvPr>
@@ -1685,7 +1752,7 @@
           <p:cNvPr id="7" name="">
             <a:extLst xmlns:a="http://schemas.openxmlformats.org/drawingml/2006/main">
               <a:ext uri="{FF2B5EF4-FFF2-40B4-BE49-F238E27FC236}">
-                <a16:creationId xmlns:a16="http://schemas.microsoft.com/office/drawing/2014/main" id="{1EB562A1-354C-496B-BBEB-F67C28F64AEB}"/>
+                <a16:creationId xmlns:a16="http://schemas.microsoft.com/office/drawing/2014/main" id="{0E3DD4BA-2386-4778-A381-FFA4BF299C2E}"/>
               </a:ext>
             </a:extLst>
           </p:cNvPr>
@@ -1749,7 +1816,7 @@
           <p:cNvPr id="8" name="">
             <a:extLst xmlns:a="http://schemas.openxmlformats.org/drawingml/2006/main">
               <a:ext uri="{FF2B5EF4-FFF2-40B4-BE49-F238E27FC236}">
-                <a16:creationId xmlns:a16="http://schemas.microsoft.com/office/drawing/2014/main" id="{1A3CFE06-FFDE-488F-B279-56848EABB0ED}"/>
+                <a16:creationId xmlns:a16="http://schemas.microsoft.com/office/drawing/2014/main" id="{5B697E4D-1583-46D9-BFCB-AD0796D04C67}"/>
               </a:ext>
             </a:extLst>
           </p:cNvPr>
@@ -1813,7 +1880,7 @@
           <p:cNvPr id="9" name="">
             <a:extLst xmlns:a="http://schemas.openxmlformats.org/drawingml/2006/main">
               <a:ext uri="{FF2B5EF4-FFF2-40B4-BE49-F238E27FC236}">
-                <a16:creationId xmlns:a16="http://schemas.microsoft.com/office/drawing/2014/main" id="{20AE2F8A-1181-4847-951A-E728A9A27DB8}"/>
+                <a16:creationId xmlns:a16="http://schemas.microsoft.com/office/drawing/2014/main" id="{56C4DED9-18FC-4BF2-B38B-1680019A7774}"/>
               </a:ext>
             </a:extLst>
           </p:cNvPr>
@@ -1846,7 +1913,7 @@
           <p:cNvPr id="10" name="">
             <a:extLst xmlns:a="http://schemas.openxmlformats.org/drawingml/2006/main">
               <a:ext uri="{FF2B5EF4-FFF2-40B4-BE49-F238E27FC236}">
-                <a16:creationId xmlns:a16="http://schemas.microsoft.com/office/drawing/2014/main" id="{3D51D8C9-40DC-4CE1-B08A-1DEB15FFF90B}"/>
+                <a16:creationId xmlns:a16="http://schemas.microsoft.com/office/drawing/2014/main" id="{ED57F8E1-A897-4A6C-A8CD-8594105D2F6A}"/>
               </a:ext>
             </a:extLst>
           </p:cNvPr>
@@ -1910,7 +1977,7 @@
           <p:cNvPr id="11" name="">
             <a:extLst xmlns:a="http://schemas.openxmlformats.org/drawingml/2006/main">
               <a:ext uri="{FF2B5EF4-FFF2-40B4-BE49-F238E27FC236}">
-                <a16:creationId xmlns:a16="http://schemas.microsoft.com/office/drawing/2014/main" id="{59097223-9DF9-4872-9F0A-7596A08AC783}"/>
+                <a16:creationId xmlns:a16="http://schemas.microsoft.com/office/drawing/2014/main" id="{87D3B7C8-4569-4657-98D8-6B8817DA0345}"/>
               </a:ext>
             </a:extLst>
           </p:cNvPr>
@@ -1974,7 +2041,7 @@
           <p:cNvPr id="12" name="">
             <a:extLst xmlns:a="http://schemas.openxmlformats.org/drawingml/2006/main">
               <a:ext uri="{FF2B5EF4-FFF2-40B4-BE49-F238E27FC236}">
-                <a16:creationId xmlns:a16="http://schemas.microsoft.com/office/drawing/2014/main" id="{4E10ADD4-167B-42EF-8D98-ECEE01ED4AD5}"/>
+                <a16:creationId xmlns:a16="http://schemas.microsoft.com/office/drawing/2014/main" id="{BAD8ABCE-EEF1-42DE-9B68-06C72E09D6E0}"/>
               </a:ext>
             </a:extLst>
           </p:cNvPr>
@@ -2007,7 +2074,7 @@
           <p:cNvPr id="13" name="">
             <a:extLst xmlns:a="http://schemas.openxmlformats.org/drawingml/2006/main">
               <a:ext uri="{FF2B5EF4-FFF2-40B4-BE49-F238E27FC236}">
-                <a16:creationId xmlns:a16="http://schemas.microsoft.com/office/drawing/2014/main" id="{9EB11CEE-D842-4463-B427-8D22F808E098}"/>
+                <a16:creationId xmlns:a16="http://schemas.microsoft.com/office/drawing/2014/main" id="{1B6A8ECD-F1C2-4CDB-8A67-1D8CA631B1DE}"/>
               </a:ext>
             </a:extLst>
           </p:cNvPr>
@@ -2071,7 +2138,7 @@
           <p:cNvPr id="14" name="">
             <a:extLst xmlns:a="http://schemas.openxmlformats.org/drawingml/2006/main">
               <a:ext uri="{FF2B5EF4-FFF2-40B4-BE49-F238E27FC236}">
-                <a16:creationId xmlns:a16="http://schemas.microsoft.com/office/drawing/2014/main" id="{5437ECC4-FB5F-436F-93A2-6CFA664F81FB}"/>
+                <a16:creationId xmlns:a16="http://schemas.microsoft.com/office/drawing/2014/main" id="{F5107EB5-AE0F-433E-9EFF-89CB8AA129BD}"/>
               </a:ext>
             </a:extLst>
           </p:cNvPr>
@@ -2135,7 +2202,7 @@
           <p:cNvPr id="15" name="">
             <a:extLst xmlns:a="http://schemas.openxmlformats.org/drawingml/2006/main">
               <a:ext uri="{FF2B5EF4-FFF2-40B4-BE49-F238E27FC236}">
-                <a16:creationId xmlns:a16="http://schemas.microsoft.com/office/drawing/2014/main" id="{3E7478E8-D45E-4ABA-B4CF-CA0301078359}"/>
+                <a16:creationId xmlns:a16="http://schemas.microsoft.com/office/drawing/2014/main" id="{6055F403-C4D6-4DCD-863C-00601C6824A3}"/>
               </a:ext>
             </a:extLst>
           </p:cNvPr>
@@ -2168,7 +2235,7 @@
           <p:cNvPr id="16" name="">
             <a:extLst xmlns:a="http://schemas.openxmlformats.org/drawingml/2006/main">
               <a:ext uri="{FF2B5EF4-FFF2-40B4-BE49-F238E27FC236}">
-                <a16:creationId xmlns:a16="http://schemas.microsoft.com/office/drawing/2014/main" id="{75B0269B-8920-47CA-AA98-05EFD25876AA}"/>
+                <a16:creationId xmlns:a16="http://schemas.microsoft.com/office/drawing/2014/main" id="{ECB41216-A962-4247-A0E9-30105AFD7901}"/>
               </a:ext>
             </a:extLst>
           </p:cNvPr>
@@ -2201,7 +2268,7 @@
           <p:cNvPr id="17" name="">
             <a:extLst xmlns:a="http://schemas.openxmlformats.org/drawingml/2006/main">
               <a:ext uri="{FF2B5EF4-FFF2-40B4-BE49-F238E27FC236}">
-                <a16:creationId xmlns:a16="http://schemas.microsoft.com/office/drawing/2014/main" id="{A5EB3AD2-AC21-4F2B-9906-8E0EF9A90A15}"/>
+                <a16:creationId xmlns:a16="http://schemas.microsoft.com/office/drawing/2014/main" id="{C83F2B9E-15A8-4855-87F6-09DF6B1DDAA0}"/>
               </a:ext>
             </a:extLst>
           </p:cNvPr>
@@ -2265,7 +2332,7 @@
           <p:cNvPr id="18" name="">
             <a:extLst xmlns:a="http://schemas.openxmlformats.org/drawingml/2006/main">
               <a:ext uri="{FF2B5EF4-FFF2-40B4-BE49-F238E27FC236}">
-                <a16:creationId xmlns:a16="http://schemas.microsoft.com/office/drawing/2014/main" id="{EB815D48-4FAD-42D4-A686-67149939FD88}"/>
+                <a16:creationId xmlns:a16="http://schemas.microsoft.com/office/drawing/2014/main" id="{7CE340F5-2347-47F8-BA17-D62B5D7C7350}"/>
               </a:ext>
             </a:extLst>
           </p:cNvPr>
@@ -2298,7 +2365,7 @@
           <p:cNvPr id="19" name="">
             <a:extLst xmlns:a="http://schemas.openxmlformats.org/drawingml/2006/main">
               <a:ext uri="{FF2B5EF4-FFF2-40B4-BE49-F238E27FC236}">
-                <a16:creationId xmlns:a16="http://schemas.microsoft.com/office/drawing/2014/main" id="{B3135342-9B91-4A99-8C3D-3F2A200A8974}"/>
+                <a16:creationId xmlns:a16="http://schemas.microsoft.com/office/drawing/2014/main" id="{4A4F8303-7F2A-4185-A415-F270C17EC61B}"/>
               </a:ext>
             </a:extLst>
           </p:cNvPr>
@@ -2362,7 +2429,7 @@
           <p:cNvPr id="20" name="">
             <a:extLst xmlns:a="http://schemas.openxmlformats.org/drawingml/2006/main">
               <a:ext uri="{FF2B5EF4-FFF2-40B4-BE49-F238E27FC236}">
-                <a16:creationId xmlns:a16="http://schemas.microsoft.com/office/drawing/2014/main" id="{E284069C-F17A-41CF-AF2C-DE8A85752132}"/>
+                <a16:creationId xmlns:a16="http://schemas.microsoft.com/office/drawing/2014/main" id="{5F8965A6-6583-4331-A11E-F7CBB2667A4D}"/>
               </a:ext>
             </a:extLst>
           </p:cNvPr>
@@ -2395,7 +2462,7 @@
           <p:cNvPr id="21" name="">
             <a:extLst xmlns:a="http://schemas.openxmlformats.org/drawingml/2006/main">
               <a:ext uri="{FF2B5EF4-FFF2-40B4-BE49-F238E27FC236}">
-                <a16:creationId xmlns:a16="http://schemas.microsoft.com/office/drawing/2014/main" id="{568A5DFB-2036-49DA-949C-91B88A160863}"/>
+                <a16:creationId xmlns:a16="http://schemas.microsoft.com/office/drawing/2014/main" id="{C5D68436-1A3E-455A-8628-BF3717E69AA5}"/>
               </a:ext>
             </a:extLst>
           </p:cNvPr>
@@ -2459,7 +2526,7 @@
           <p:cNvPr id="22" name="">
             <a:extLst xmlns:a="http://schemas.openxmlformats.org/drawingml/2006/main">
               <a:ext uri="{FF2B5EF4-FFF2-40B4-BE49-F238E27FC236}">
-                <a16:creationId xmlns:a16="http://schemas.microsoft.com/office/drawing/2014/main" id="{3F751281-882C-483D-8D4B-B253A9636806}"/>
+                <a16:creationId xmlns:a16="http://schemas.microsoft.com/office/drawing/2014/main" id="{7B0FAC74-1B18-4324-AA9A-04266A2BB075}"/>
               </a:ext>
             </a:extLst>
           </p:cNvPr>
@@ -2492,7 +2559,7 @@
           <p:cNvPr id="23" name="">
             <a:extLst xmlns:a="http://schemas.openxmlformats.org/drawingml/2006/main">
               <a:ext uri="{FF2B5EF4-FFF2-40B4-BE49-F238E27FC236}">
-                <a16:creationId xmlns:a16="http://schemas.microsoft.com/office/drawing/2014/main" id="{699CB35C-193B-48F5-802C-BD343E163684}"/>
+                <a16:creationId xmlns:a16="http://schemas.microsoft.com/office/drawing/2014/main" id="{86EEEF52-622C-411B-A10D-E0A2CA2B39F5}"/>
               </a:ext>
             </a:extLst>
           </p:cNvPr>
@@ -2556,7 +2623,7 @@
           <p:cNvPr id="24" name="">
             <a:extLst xmlns:a="http://schemas.openxmlformats.org/drawingml/2006/main">
               <a:ext uri="{FF2B5EF4-FFF2-40B4-BE49-F238E27FC236}">
-                <a16:creationId xmlns:a16="http://schemas.microsoft.com/office/drawing/2014/main" id="{1F550BB2-E7DA-475F-B8C4-497F2F938BB3}"/>
+                <a16:creationId xmlns:a16="http://schemas.microsoft.com/office/drawing/2014/main" id="{E5F8A1A5-FB90-4F34-80AB-98D65C4B2DF6}"/>
               </a:ext>
             </a:extLst>
           </p:cNvPr>
@@ -2589,7 +2656,7 @@
           <p:cNvPr id="25" name="">
             <a:extLst xmlns:a="http://schemas.openxmlformats.org/drawingml/2006/main">
               <a:ext uri="{FF2B5EF4-FFF2-40B4-BE49-F238E27FC236}">
-                <a16:creationId xmlns:a16="http://schemas.microsoft.com/office/drawing/2014/main" id="{0898AD54-8246-41D6-8589-D54942CAE3C6}"/>
+                <a16:creationId xmlns:a16="http://schemas.microsoft.com/office/drawing/2014/main" id="{14076E31-C4C9-4030-B26C-7E68F418795E}"/>
               </a:ext>
             </a:extLst>
           </p:cNvPr>
@@ -2653,7 +2720,7 @@
           <p:cNvPr id="26" name="">
             <a:extLst xmlns:a="http://schemas.openxmlformats.org/drawingml/2006/main">
               <a:ext uri="{FF2B5EF4-FFF2-40B4-BE49-F238E27FC236}">
-                <a16:creationId xmlns:a16="http://schemas.microsoft.com/office/drawing/2014/main" id="{FEB9CEBB-514E-454C-A218-F60AD08DBB83}"/>
+                <a16:creationId xmlns:a16="http://schemas.microsoft.com/office/drawing/2014/main" id="{57C0E26E-3B36-43DB-9C99-4A97D10E740E}"/>
               </a:ext>
             </a:extLst>
           </p:cNvPr>
@@ -2717,7 +2784,7 @@
           <p:cNvPr id="27" name="">
             <a:extLst xmlns:a="http://schemas.openxmlformats.org/drawingml/2006/main">
               <a:ext uri="{FF2B5EF4-FFF2-40B4-BE49-F238E27FC236}">
-                <a16:creationId xmlns:a16="http://schemas.microsoft.com/office/drawing/2014/main" id="{2FD6A9A8-3701-4BF7-9E2F-F9EFD70E629F}"/>
+                <a16:creationId xmlns:a16="http://schemas.microsoft.com/office/drawing/2014/main" id="{FEA36892-E6CF-421D-993A-3E34F4222B93}"/>
               </a:ext>
             </a:extLst>
           </p:cNvPr>
@@ -2781,7 +2848,7 @@
           <p:cNvPr id="28" name="">
             <a:extLst xmlns:a="http://schemas.openxmlformats.org/drawingml/2006/main">
               <a:ext uri="{FF2B5EF4-FFF2-40B4-BE49-F238E27FC236}">
-                <a16:creationId xmlns:a16="http://schemas.microsoft.com/office/drawing/2014/main" id="{2ECFB89C-F655-4DF1-AB07-225916160E8C}"/>
+                <a16:creationId xmlns:a16="http://schemas.microsoft.com/office/drawing/2014/main" id="{DF4EEBD4-AFF0-4110-9865-396460205742}"/>
               </a:ext>
             </a:extLst>
           </p:cNvPr>
@@ -2843,7 +2910,2456 @@
     </p:spTree>
     <p:extLst>
       <p:ext uri="{BB962C8B-B14F-4D97-AF65-F5344CB8AC3E}">
-        <p14:creationId xmlns:p14="http://schemas.microsoft.com/office/powerpoint/2010/main" val="698228377"/>
+        <p14:creationId xmlns:p14="http://schemas.microsoft.com/office/powerpoint/2010/main" val="970333821"/>
+      </p:ext>
+    </p:extLst>
+  </p:cSld>
+</p:sld>
+</file>
+
+<file path=ppt/slides/slide10.xml><?xml version="1.0" encoding="utf-8"?>
+<p:sld xmlns:p="http://schemas.openxmlformats.org/presentationml/2006/main">
+  <p:cSld>
+    <p:spTree>
+      <p:nvGrpSpPr>
+        <p:cNvPr id="1" name=""/>
+        <p:cNvGrpSpPr/>
+        <p:nvPr/>
+      </p:nvGrpSpPr>
+      <p:grpSpPr>
+        <a:xfrm xmlns:a="http://schemas.openxmlformats.org/drawingml/2006/main"/>
+      </p:grpSpPr>
+      <p:sp>
+        <p:nvSpPr>
+          <p:cNvPr id="1" name="">
+            <a:extLst xmlns:a="http://schemas.openxmlformats.org/drawingml/2006/main">
+              <a:ext uri="{FF2B5EF4-FFF2-40B4-BE49-F238E27FC236}">
+                <a16:creationId xmlns:a16="http://schemas.microsoft.com/office/drawing/2014/main" id="{2BB386AC-618F-4D35-815B-05FD6C0F7093}"/>
+              </a:ext>
+            </a:extLst>
+          </p:cNvPr>
+          <p:cNvSpPr>
+            <a:spLocks xmlns:a="http://schemas.openxmlformats.org/drawingml/2006/main" noGrp="1"/>
+          </p:cNvSpPr>
+          <p:nvPr/>
+        </p:nvSpPr>
+        <p:spPr>
+          <a:xfrm xmlns:a="http://schemas.openxmlformats.org/drawingml/2006/main">
+            <a:off x="0" y="0"/>
+            <a:ext cx="12192000" cy="6858000"/>
+          </a:xfrm>
+          <a:prstGeom xmlns:a="http://schemas.openxmlformats.org/drawingml/2006/main" prst="rect">
+            <a:avLst/>
+          </a:prstGeom>
+          <a:solidFill xmlns:a="http://schemas.openxmlformats.org/drawingml/2006/main">
+            <a:srgbClr val="F6F2EA"/>
+          </a:solidFill>
+          <a:ln xmlns:a="http://schemas.openxmlformats.org/drawingml/2006/main" w="0">
+            <a:solidFill>
+              <a:srgbClr val="000000">
+                <a:alpha val="0"/>
+              </a:srgbClr>
+            </a:solidFill>
+            <a:prstDash val="solid"/>
+          </a:ln>
+        </p:spPr>
+      </p:sp>
+      <p:sp>
+        <p:nvSpPr>
+          <p:cNvPr id="2" name="kicker-marker">
+            <a:extLst xmlns:a="http://schemas.openxmlformats.org/drawingml/2006/main">
+              <a:ext uri="{FF2B5EF4-FFF2-40B4-BE49-F238E27FC236}">
+                <a16:creationId xmlns:a16="http://schemas.microsoft.com/office/drawing/2014/main" id="{C4B66067-42A0-4B13-A03E-60FE6A235C1D}"/>
+              </a:ext>
+            </a:extLst>
+          </p:cNvPr>
+          <p:cNvSpPr>
+            <a:spLocks xmlns:a="http://schemas.openxmlformats.org/drawingml/2006/main" noGrp="1"/>
+          </p:cNvSpPr>
+          <p:nvPr/>
+        </p:nvSpPr>
+        <p:spPr>
+          <a:xfrm xmlns:a="http://schemas.openxmlformats.org/drawingml/2006/main">
+            <a:off x="533400" y="400050"/>
+            <a:ext cx="95250" cy="95250"/>
+          </a:xfrm>
+          <a:prstGeom xmlns:a="http://schemas.openxmlformats.org/drawingml/2006/main" prst="rect">
+            <a:avLst/>
+          </a:prstGeom>
+          <a:solidFill xmlns:a="http://schemas.openxmlformats.org/drawingml/2006/main">
+            <a:srgbClr val="FF6B5F"/>
+          </a:solidFill>
+          <a:ln xmlns:a="http://schemas.openxmlformats.org/drawingml/2006/main" w="0">
+            <a:solidFill>
+              <a:srgbClr val="000000">
+                <a:alpha val="0"/>
+              </a:srgbClr>
+            </a:solidFill>
+            <a:prstDash val="solid"/>
+          </a:ln>
+        </p:spPr>
+      </p:sp>
+      <p:sp>
+        <p:nvSpPr>
+          <p:cNvPr id="3" name="kicker-label">
+            <a:extLst xmlns:a="http://schemas.openxmlformats.org/drawingml/2006/main">
+              <a:ext uri="{FF2B5EF4-FFF2-40B4-BE49-F238E27FC236}">
+                <a16:creationId xmlns:a16="http://schemas.microsoft.com/office/drawing/2014/main" id="{79F216AB-7DEB-4591-B9DA-E7715191A2E8}"/>
+              </a:ext>
+            </a:extLst>
+          </p:cNvPr>
+          <p:cNvSpPr>
+            <a:spLocks xmlns:a="http://schemas.openxmlformats.org/drawingml/2006/main" noGrp="1"/>
+          </p:cNvSpPr>
+          <p:nvPr/>
+        </p:nvSpPr>
+        <p:spPr>
+          <a:xfrm xmlns:a="http://schemas.openxmlformats.org/drawingml/2006/main">
+            <a:off x="723900" y="333375"/>
+            <a:ext cx="3048000" cy="228600"/>
+          </a:xfrm>
+          <a:prstGeom xmlns:a="http://schemas.openxmlformats.org/drawingml/2006/main" prst="rect">
+            <a:avLst/>
+          </a:prstGeom>
+          <a:solidFill xmlns:a="http://schemas.openxmlformats.org/drawingml/2006/main">
+            <a:srgbClr val="000000">
+              <a:alpha val="0"/>
+            </a:srgbClr>
+          </a:solidFill>
+          <a:ln xmlns:a="http://schemas.openxmlformats.org/drawingml/2006/main" w="0">
+            <a:solidFill>
+              <a:srgbClr val="000000">
+                <a:alpha val="0"/>
+              </a:srgbClr>
+            </a:solidFill>
+            <a:prstDash val="solid"/>
+          </a:ln>
+        </p:spPr>
+        <p:txBody>
+          <a:bodyPr xmlns:a="http://schemas.openxmlformats.org/drawingml/2006/main" lIns="0" tIns="0" rIns="0" bIns="0" anchor="ctr"/>
+          <a:lstStyle xmlns:a="http://schemas.openxmlformats.org/drawingml/2006/main"/>
+          <a:p xmlns:a="http://schemas.openxmlformats.org/drawingml/2006/main">
+            <a:pPr algn="l">
+              <a:defRPr sz="900" b="1">
+                <a:solidFill>
+                  <a:srgbClr val="FF6B5F"/>
+                </a:solidFill>
+                <a:latin typeface="Aptos"/>
+                <a:ea typeface="Aptos"/>
+                <a:cs typeface="Aptos"/>
+              </a:defRPr>
+            </a:pPr>
+            <a:r>
+              <a:rPr sz="900" b="1">
+                <a:solidFill>
+                  <a:srgbClr val="FF6B5F"/>
+                </a:solidFill>
+                <a:latin typeface="Aptos"/>
+                <a:ea typeface="Aptos"/>
+                <a:cs typeface="Aptos"/>
+              </a:rPr>
+              <a:t>NOVELTY</a:t>
+            </a:r>
+          </a:p>
+        </p:txBody>
+      </p:sp>
+      <p:sp>
+        <p:nvSpPr>
+          <p:cNvPr id="4" name="">
+            <a:extLst xmlns:a="http://schemas.openxmlformats.org/drawingml/2006/main">
+              <a:ext uri="{FF2B5EF4-FFF2-40B4-BE49-F238E27FC236}">
+                <a16:creationId xmlns:a16="http://schemas.microsoft.com/office/drawing/2014/main" id="{0080BC7D-5710-49D7-8F78-1D2B593FBB41}"/>
+              </a:ext>
+            </a:extLst>
+          </p:cNvPr>
+          <p:cNvSpPr>
+            <a:spLocks xmlns:a="http://schemas.openxmlformats.org/drawingml/2006/main" noGrp="1"/>
+          </p:cNvSpPr>
+          <p:nvPr/>
+        </p:nvSpPr>
+        <p:spPr>
+          <a:xfrm xmlns:a="http://schemas.openxmlformats.org/drawingml/2006/main">
+            <a:off x="514350" y="723900"/>
+            <a:ext cx="7810500" cy="1104900"/>
+          </a:xfrm>
+          <a:prstGeom xmlns:a="http://schemas.openxmlformats.org/drawingml/2006/main" prst="rect">
+            <a:avLst/>
+          </a:prstGeom>
+          <a:solidFill xmlns:a="http://schemas.openxmlformats.org/drawingml/2006/main">
+            <a:srgbClr val="000000">
+              <a:alpha val="0"/>
+            </a:srgbClr>
+          </a:solidFill>
+          <a:ln xmlns:a="http://schemas.openxmlformats.org/drawingml/2006/main" w="0">
+            <a:solidFill>
+              <a:srgbClr val="000000">
+                <a:alpha val="0"/>
+              </a:srgbClr>
+            </a:solidFill>
+            <a:prstDash val="solid"/>
+          </a:ln>
+        </p:spPr>
+        <p:txBody>
+          <a:bodyPr xmlns:a="http://schemas.openxmlformats.org/drawingml/2006/main" lIns="0" tIns="0" rIns="0" bIns="0" anchor="t"/>
+          <a:lstStyle xmlns:a="http://schemas.openxmlformats.org/drawingml/2006/main"/>
+          <a:p xmlns:a="http://schemas.openxmlformats.org/drawingml/2006/main">
+            <a:pPr algn="l">
+              <a:defRPr sz="3150" b="1">
+                <a:solidFill>
+                  <a:srgbClr val="08111F"/>
+                </a:solidFill>
+                <a:latin typeface="Aptos Display"/>
+                <a:ea typeface="Aptos Display"/>
+                <a:cs typeface="Aptos Display"/>
+              </a:defRPr>
+            </a:pPr>
+            <a:r>
+              <a:rPr sz="3150" b="1">
+                <a:solidFill>
+                  <a:srgbClr val="08111F"/>
+                </a:solidFill>
+                <a:latin typeface="Aptos Display"/>
+                <a:ea typeface="Aptos Display"/>
+                <a:cs typeface="Aptos Display"/>
+              </a:rPr>
+              <a:t>Our new contribution is a hybrid ML + QoS-risk guard, not just another bitrate switch.</a:t>
+            </a:r>
+          </a:p>
+        </p:txBody>
+      </p:sp>
+      <p:sp>
+        <p:nvSpPr>
+          <p:cNvPr id="5" name="">
+            <a:extLst xmlns:a="http://schemas.openxmlformats.org/drawingml/2006/main">
+              <a:ext uri="{FF2B5EF4-FFF2-40B4-BE49-F238E27FC236}">
+                <a16:creationId xmlns:a16="http://schemas.microsoft.com/office/drawing/2014/main" id="{D9259DCE-720C-435E-9025-FA324EE474FA}"/>
+              </a:ext>
+            </a:extLst>
+          </p:cNvPr>
+          <p:cNvSpPr>
+            <a:spLocks xmlns:a="http://schemas.openxmlformats.org/drawingml/2006/main" noGrp="1"/>
+          </p:cNvSpPr>
+          <p:nvPr/>
+        </p:nvSpPr>
+        <p:spPr>
+          <a:xfrm xmlns:a="http://schemas.openxmlformats.org/drawingml/2006/main">
+            <a:off x="590550" y="2133600"/>
+            <a:ext cx="2095500" cy="419100"/>
+          </a:xfrm>
+          <a:prstGeom xmlns:a="http://schemas.openxmlformats.org/drawingml/2006/main" prst="rect">
+            <a:avLst/>
+          </a:prstGeom>
+          <a:solidFill xmlns:a="http://schemas.openxmlformats.org/drawingml/2006/main">
+            <a:srgbClr val="08111F"/>
+          </a:solidFill>
+          <a:ln xmlns:a="http://schemas.openxmlformats.org/drawingml/2006/main" w="9525">
+            <a:solidFill>
+              <a:srgbClr val="08111F"/>
+            </a:solidFill>
+            <a:prstDash val="solid"/>
+          </a:ln>
+        </p:spPr>
+      </p:sp>
+      <p:sp>
+        <p:nvSpPr>
+          <p:cNvPr id="6" name="">
+            <a:extLst xmlns:a="http://schemas.openxmlformats.org/drawingml/2006/main">
+              <a:ext uri="{FF2B5EF4-FFF2-40B4-BE49-F238E27FC236}">
+                <a16:creationId xmlns:a16="http://schemas.microsoft.com/office/drawing/2014/main" id="{C02E7B75-A927-453D-B8FC-B30ED884FB3D}"/>
+              </a:ext>
+            </a:extLst>
+          </p:cNvPr>
+          <p:cNvSpPr>
+            <a:spLocks xmlns:a="http://schemas.openxmlformats.org/drawingml/2006/main" noGrp="1"/>
+          </p:cNvSpPr>
+          <p:nvPr/>
+        </p:nvSpPr>
+        <p:spPr>
+          <a:xfrm xmlns:a="http://schemas.openxmlformats.org/drawingml/2006/main">
+            <a:off x="704850" y="2247900"/>
+            <a:ext cx="1866900" cy="171450"/>
+          </a:xfrm>
+          <a:prstGeom xmlns:a="http://schemas.openxmlformats.org/drawingml/2006/main" prst="rect">
+            <a:avLst/>
+          </a:prstGeom>
+          <a:solidFill xmlns:a="http://schemas.openxmlformats.org/drawingml/2006/main">
+            <a:srgbClr val="000000">
+              <a:alpha val="0"/>
+            </a:srgbClr>
+          </a:solidFill>
+          <a:ln xmlns:a="http://schemas.openxmlformats.org/drawingml/2006/main" w="0">
+            <a:solidFill>
+              <a:srgbClr val="000000">
+                <a:alpha val="0"/>
+              </a:srgbClr>
+            </a:solidFill>
+            <a:prstDash val="solid"/>
+          </a:ln>
+        </p:spPr>
+        <p:txBody>
+          <a:bodyPr xmlns:a="http://schemas.openxmlformats.org/drawingml/2006/main" lIns="0" tIns="0" rIns="0" bIns="0" anchor="t"/>
+          <a:lstStyle xmlns:a="http://schemas.openxmlformats.org/drawingml/2006/main"/>
+          <a:p xmlns:a="http://schemas.openxmlformats.org/drawingml/2006/main">
+            <a:pPr algn="l">
+              <a:defRPr sz="1050" b="1">
+                <a:solidFill>
+                  <a:srgbClr val="F6F2EA"/>
+                </a:solidFill>
+                <a:latin typeface="Aptos"/>
+                <a:ea typeface="Aptos"/>
+                <a:cs typeface="Aptos"/>
+              </a:defRPr>
+            </a:pPr>
+            <a:r>
+              <a:rPr sz="1050" b="1">
+                <a:solidFill>
+                  <a:srgbClr val="F6F2EA"/>
+                </a:solidFill>
+                <a:latin typeface="Aptos"/>
+                <a:ea typeface="Aptos"/>
+                <a:cs typeface="Aptos"/>
+              </a:rPr>
+              <a:t>Existing method</a:t>
+            </a:r>
+          </a:p>
+        </p:txBody>
+      </p:sp>
+      <p:sp>
+        <p:nvSpPr>
+          <p:cNvPr id="7" name="">
+            <a:extLst xmlns:a="http://schemas.openxmlformats.org/drawingml/2006/main">
+              <a:ext uri="{FF2B5EF4-FFF2-40B4-BE49-F238E27FC236}">
+                <a16:creationId xmlns:a16="http://schemas.microsoft.com/office/drawing/2014/main" id="{E1C5A1AC-E2F4-44A4-8620-A9E47CF5A520}"/>
+              </a:ext>
+            </a:extLst>
+          </p:cNvPr>
+          <p:cNvSpPr>
+            <a:spLocks xmlns:a="http://schemas.openxmlformats.org/drawingml/2006/main" noGrp="1"/>
+          </p:cNvSpPr>
+          <p:nvPr/>
+        </p:nvSpPr>
+        <p:spPr>
+          <a:xfrm xmlns:a="http://schemas.openxmlformats.org/drawingml/2006/main">
+            <a:off x="2686050" y="2133600"/>
+            <a:ext cx="2476500" cy="419100"/>
+          </a:xfrm>
+          <a:prstGeom xmlns:a="http://schemas.openxmlformats.org/drawingml/2006/main" prst="rect">
+            <a:avLst/>
+          </a:prstGeom>
+          <a:solidFill xmlns:a="http://schemas.openxmlformats.org/drawingml/2006/main">
+            <a:srgbClr val="08111F"/>
+          </a:solidFill>
+          <a:ln xmlns:a="http://schemas.openxmlformats.org/drawingml/2006/main" w="9525">
+            <a:solidFill>
+              <a:srgbClr val="08111F"/>
+            </a:solidFill>
+            <a:prstDash val="solid"/>
+          </a:ln>
+        </p:spPr>
+      </p:sp>
+      <p:sp>
+        <p:nvSpPr>
+          <p:cNvPr id="8" name="">
+            <a:extLst xmlns:a="http://schemas.openxmlformats.org/drawingml/2006/main">
+              <a:ext uri="{FF2B5EF4-FFF2-40B4-BE49-F238E27FC236}">
+                <a16:creationId xmlns:a16="http://schemas.microsoft.com/office/drawing/2014/main" id="{3B5E35EE-6238-4DF5-9E8F-BC14D16D2AD8}"/>
+              </a:ext>
+            </a:extLst>
+          </p:cNvPr>
+          <p:cNvSpPr>
+            <a:spLocks xmlns:a="http://schemas.openxmlformats.org/drawingml/2006/main" noGrp="1"/>
+          </p:cNvSpPr>
+          <p:nvPr/>
+        </p:nvSpPr>
+        <p:spPr>
+          <a:xfrm xmlns:a="http://schemas.openxmlformats.org/drawingml/2006/main">
+            <a:off x="2800350" y="2247900"/>
+            <a:ext cx="2247900" cy="171450"/>
+          </a:xfrm>
+          <a:prstGeom xmlns:a="http://schemas.openxmlformats.org/drawingml/2006/main" prst="rect">
+            <a:avLst/>
+          </a:prstGeom>
+          <a:solidFill xmlns:a="http://schemas.openxmlformats.org/drawingml/2006/main">
+            <a:srgbClr val="000000">
+              <a:alpha val="0"/>
+            </a:srgbClr>
+          </a:solidFill>
+          <a:ln xmlns:a="http://schemas.openxmlformats.org/drawingml/2006/main" w="0">
+            <a:solidFill>
+              <a:srgbClr val="000000">
+                <a:alpha val="0"/>
+              </a:srgbClr>
+            </a:solidFill>
+            <a:prstDash val="solid"/>
+          </a:ln>
+        </p:spPr>
+        <p:txBody>
+          <a:bodyPr xmlns:a="http://schemas.openxmlformats.org/drawingml/2006/main" lIns="0" tIns="0" rIns="0" bIns="0" anchor="t"/>
+          <a:lstStyle xmlns:a="http://schemas.openxmlformats.org/drawingml/2006/main"/>
+          <a:p xmlns:a="http://schemas.openxmlformats.org/drawingml/2006/main">
+            <a:pPr algn="l">
+              <a:defRPr sz="1050" b="1">
+                <a:solidFill>
+                  <a:srgbClr val="F6F2EA"/>
+                </a:solidFill>
+                <a:latin typeface="Aptos"/>
+                <a:ea typeface="Aptos"/>
+                <a:cs typeface="Aptos"/>
+              </a:defRPr>
+            </a:pPr>
+            <a:r>
+              <a:rPr sz="1050" b="1">
+                <a:solidFill>
+                  <a:srgbClr val="F6F2EA"/>
+                </a:solidFill>
+                <a:latin typeface="Aptos"/>
+                <a:ea typeface="Aptos"/>
+                <a:cs typeface="Aptos"/>
+              </a:rPr>
+              <a:t>Decision basis</a:t>
+            </a:r>
+          </a:p>
+        </p:txBody>
+      </p:sp>
+      <p:sp>
+        <p:nvSpPr>
+          <p:cNvPr id="9" name="">
+            <a:extLst xmlns:a="http://schemas.openxmlformats.org/drawingml/2006/main">
+              <a:ext uri="{FF2B5EF4-FFF2-40B4-BE49-F238E27FC236}">
+                <a16:creationId xmlns:a16="http://schemas.microsoft.com/office/drawing/2014/main" id="{22DF660F-C8CC-4372-81DC-4CF47E3DF2A7}"/>
+              </a:ext>
+            </a:extLst>
+          </p:cNvPr>
+          <p:cNvSpPr>
+            <a:spLocks xmlns:a="http://schemas.openxmlformats.org/drawingml/2006/main" noGrp="1"/>
+          </p:cNvSpPr>
+          <p:nvPr/>
+        </p:nvSpPr>
+        <p:spPr>
+          <a:xfrm xmlns:a="http://schemas.openxmlformats.org/drawingml/2006/main">
+            <a:off x="5162550" y="2133600"/>
+            <a:ext cx="2714625" cy="419100"/>
+          </a:xfrm>
+          <a:prstGeom xmlns:a="http://schemas.openxmlformats.org/drawingml/2006/main" prst="rect">
+            <a:avLst/>
+          </a:prstGeom>
+          <a:solidFill xmlns:a="http://schemas.openxmlformats.org/drawingml/2006/main">
+            <a:srgbClr val="08111F"/>
+          </a:solidFill>
+          <a:ln xmlns:a="http://schemas.openxmlformats.org/drawingml/2006/main" w="9525">
+            <a:solidFill>
+              <a:srgbClr val="08111F"/>
+            </a:solidFill>
+            <a:prstDash val="solid"/>
+          </a:ln>
+        </p:spPr>
+      </p:sp>
+      <p:sp>
+        <p:nvSpPr>
+          <p:cNvPr id="10" name="">
+            <a:extLst xmlns:a="http://schemas.openxmlformats.org/drawingml/2006/main">
+              <a:ext uri="{FF2B5EF4-FFF2-40B4-BE49-F238E27FC236}">
+                <a16:creationId xmlns:a16="http://schemas.microsoft.com/office/drawing/2014/main" id="{6EF6665E-911F-4710-B3F6-50DDCC6AD250}"/>
+              </a:ext>
+            </a:extLst>
+          </p:cNvPr>
+          <p:cNvSpPr>
+            <a:spLocks xmlns:a="http://schemas.openxmlformats.org/drawingml/2006/main" noGrp="1"/>
+          </p:cNvSpPr>
+          <p:nvPr/>
+        </p:nvSpPr>
+        <p:spPr>
+          <a:xfrm xmlns:a="http://schemas.openxmlformats.org/drawingml/2006/main">
+            <a:off x="5276850" y="2247900"/>
+            <a:ext cx="2486025" cy="171450"/>
+          </a:xfrm>
+          <a:prstGeom xmlns:a="http://schemas.openxmlformats.org/drawingml/2006/main" prst="rect">
+            <a:avLst/>
+          </a:prstGeom>
+          <a:solidFill xmlns:a="http://schemas.openxmlformats.org/drawingml/2006/main">
+            <a:srgbClr val="000000">
+              <a:alpha val="0"/>
+            </a:srgbClr>
+          </a:solidFill>
+          <a:ln xmlns:a="http://schemas.openxmlformats.org/drawingml/2006/main" w="0">
+            <a:solidFill>
+              <a:srgbClr val="000000">
+                <a:alpha val="0"/>
+              </a:srgbClr>
+            </a:solidFill>
+            <a:prstDash val="solid"/>
+          </a:ln>
+        </p:spPr>
+        <p:txBody>
+          <a:bodyPr xmlns:a="http://schemas.openxmlformats.org/drawingml/2006/main" lIns="0" tIns="0" rIns="0" bIns="0" anchor="t"/>
+          <a:lstStyle xmlns:a="http://schemas.openxmlformats.org/drawingml/2006/main"/>
+          <a:p xmlns:a="http://schemas.openxmlformats.org/drawingml/2006/main">
+            <a:pPr algn="l">
+              <a:defRPr sz="1050" b="1">
+                <a:solidFill>
+                  <a:srgbClr val="F6F2EA"/>
+                </a:solidFill>
+                <a:latin typeface="Aptos"/>
+                <a:ea typeface="Aptos"/>
+                <a:cs typeface="Aptos"/>
+              </a:defRPr>
+            </a:pPr>
+            <a:r>
+              <a:rPr sz="1050" b="1">
+                <a:solidFill>
+                  <a:srgbClr val="F6F2EA"/>
+                </a:solidFill>
+                <a:latin typeface="Aptos"/>
+                <a:ea typeface="Aptos"/>
+                <a:cs typeface="Aptos"/>
+              </a:rPr>
+              <a:t>Weakness</a:t>
+            </a:r>
+          </a:p>
+        </p:txBody>
+      </p:sp>
+      <p:sp>
+        <p:nvSpPr>
+          <p:cNvPr id="11" name="">
+            <a:extLst xmlns:a="http://schemas.openxmlformats.org/drawingml/2006/main">
+              <a:ext uri="{FF2B5EF4-FFF2-40B4-BE49-F238E27FC236}">
+                <a16:creationId xmlns:a16="http://schemas.microsoft.com/office/drawing/2014/main" id="{F4E38F1C-9137-4174-81C9-D83CF7978FAA}"/>
+              </a:ext>
+            </a:extLst>
+          </p:cNvPr>
+          <p:cNvSpPr>
+            <a:spLocks xmlns:a="http://schemas.openxmlformats.org/drawingml/2006/main" noGrp="1"/>
+          </p:cNvSpPr>
+          <p:nvPr/>
+        </p:nvSpPr>
+        <p:spPr>
+          <a:xfrm xmlns:a="http://schemas.openxmlformats.org/drawingml/2006/main">
+            <a:off x="7877175" y="2133600"/>
+            <a:ext cx="3143250" cy="419100"/>
+          </a:xfrm>
+          <a:prstGeom xmlns:a="http://schemas.openxmlformats.org/drawingml/2006/main" prst="rect">
+            <a:avLst/>
+          </a:prstGeom>
+          <a:solidFill xmlns:a="http://schemas.openxmlformats.org/drawingml/2006/main">
+            <a:srgbClr val="08111F"/>
+          </a:solidFill>
+          <a:ln xmlns:a="http://schemas.openxmlformats.org/drawingml/2006/main" w="9525">
+            <a:solidFill>
+              <a:srgbClr val="08111F"/>
+            </a:solidFill>
+            <a:prstDash val="solid"/>
+          </a:ln>
+        </p:spPr>
+      </p:sp>
+      <p:sp>
+        <p:nvSpPr>
+          <p:cNvPr id="12" name="">
+            <a:extLst xmlns:a="http://schemas.openxmlformats.org/drawingml/2006/main">
+              <a:ext uri="{FF2B5EF4-FFF2-40B4-BE49-F238E27FC236}">
+                <a16:creationId xmlns:a16="http://schemas.microsoft.com/office/drawing/2014/main" id="{4845B887-2E2F-4ED3-B0FB-98F581189CA2}"/>
+              </a:ext>
+            </a:extLst>
+          </p:cNvPr>
+          <p:cNvSpPr>
+            <a:spLocks xmlns:a="http://schemas.openxmlformats.org/drawingml/2006/main" noGrp="1"/>
+          </p:cNvSpPr>
+          <p:nvPr/>
+        </p:nvSpPr>
+        <p:spPr>
+          <a:xfrm xmlns:a="http://schemas.openxmlformats.org/drawingml/2006/main">
+            <a:off x="7991475" y="2247900"/>
+            <a:ext cx="2914650" cy="171450"/>
+          </a:xfrm>
+          <a:prstGeom xmlns:a="http://schemas.openxmlformats.org/drawingml/2006/main" prst="rect">
+            <a:avLst/>
+          </a:prstGeom>
+          <a:solidFill xmlns:a="http://schemas.openxmlformats.org/drawingml/2006/main">
+            <a:srgbClr val="000000">
+              <a:alpha val="0"/>
+            </a:srgbClr>
+          </a:solidFill>
+          <a:ln xmlns:a="http://schemas.openxmlformats.org/drawingml/2006/main" w="0">
+            <a:solidFill>
+              <a:srgbClr val="000000">
+                <a:alpha val="0"/>
+              </a:srgbClr>
+            </a:solidFill>
+            <a:prstDash val="solid"/>
+          </a:ln>
+        </p:spPr>
+        <p:txBody>
+          <a:bodyPr xmlns:a="http://schemas.openxmlformats.org/drawingml/2006/main" lIns="0" tIns="0" rIns="0" bIns="0" anchor="t"/>
+          <a:lstStyle xmlns:a="http://schemas.openxmlformats.org/drawingml/2006/main"/>
+          <a:p xmlns:a="http://schemas.openxmlformats.org/drawingml/2006/main">
+            <a:pPr algn="l">
+              <a:defRPr sz="1050" b="1">
+                <a:solidFill>
+                  <a:srgbClr val="F6F2EA"/>
+                </a:solidFill>
+                <a:latin typeface="Aptos"/>
+                <a:ea typeface="Aptos"/>
+                <a:cs typeface="Aptos"/>
+              </a:defRPr>
+            </a:pPr>
+            <a:r>
+              <a:rPr sz="1050" b="1">
+                <a:solidFill>
+                  <a:srgbClr val="F6F2EA"/>
+                </a:solidFill>
+                <a:latin typeface="Aptos"/>
+                <a:ea typeface="Aptos"/>
+                <a:cs typeface="Aptos"/>
+              </a:rPr>
+              <a:t>What we added</a:t>
+            </a:r>
+          </a:p>
+        </p:txBody>
+      </p:sp>
+      <p:sp>
+        <p:nvSpPr>
+          <p:cNvPr id="13" name="">
+            <a:extLst xmlns:a="http://schemas.openxmlformats.org/drawingml/2006/main">
+              <a:ext uri="{FF2B5EF4-FFF2-40B4-BE49-F238E27FC236}">
+                <a16:creationId xmlns:a16="http://schemas.microsoft.com/office/drawing/2014/main" id="{4DB9F313-8857-477D-8FE5-DEDFAE9C7AE0}"/>
+              </a:ext>
+            </a:extLst>
+          </p:cNvPr>
+          <p:cNvSpPr>
+            <a:spLocks xmlns:a="http://schemas.openxmlformats.org/drawingml/2006/main" noGrp="1"/>
+          </p:cNvSpPr>
+          <p:nvPr/>
+        </p:nvSpPr>
+        <p:spPr>
+          <a:xfrm xmlns:a="http://schemas.openxmlformats.org/drawingml/2006/main">
+            <a:off x="590550" y="2552700"/>
+            <a:ext cx="2095500" cy="590550"/>
+          </a:xfrm>
+          <a:prstGeom xmlns:a="http://schemas.openxmlformats.org/drawingml/2006/main" prst="rect">
+            <a:avLst/>
+          </a:prstGeom>
+          <a:solidFill xmlns:a="http://schemas.openxmlformats.org/drawingml/2006/main">
+            <a:srgbClr val="FFFFFF"/>
+          </a:solidFill>
+          <a:ln xmlns:a="http://schemas.openxmlformats.org/drawingml/2006/main" w="9525">
+            <a:solidFill>
+              <a:srgbClr val="D2D8DE"/>
+            </a:solidFill>
+            <a:prstDash val="solid"/>
+          </a:ln>
+        </p:spPr>
+      </p:sp>
+      <p:sp>
+        <p:nvSpPr>
+          <p:cNvPr id="14" name="">
+            <a:extLst xmlns:a="http://schemas.openxmlformats.org/drawingml/2006/main">
+              <a:ext uri="{FF2B5EF4-FFF2-40B4-BE49-F238E27FC236}">
+                <a16:creationId xmlns:a16="http://schemas.microsoft.com/office/drawing/2014/main" id="{812A7A64-2EFD-4252-BF2F-EECBCAC12EF7}"/>
+              </a:ext>
+            </a:extLst>
+          </p:cNvPr>
+          <p:cNvSpPr>
+            <a:spLocks xmlns:a="http://schemas.openxmlformats.org/drawingml/2006/main" noGrp="1"/>
+          </p:cNvSpPr>
+          <p:nvPr/>
+        </p:nvSpPr>
+        <p:spPr>
+          <a:xfrm xmlns:a="http://schemas.openxmlformats.org/drawingml/2006/main">
+            <a:off x="704850" y="2686050"/>
+            <a:ext cx="1866900" cy="323850"/>
+          </a:xfrm>
+          <a:prstGeom xmlns:a="http://schemas.openxmlformats.org/drawingml/2006/main" prst="rect">
+            <a:avLst/>
+          </a:prstGeom>
+          <a:solidFill xmlns:a="http://schemas.openxmlformats.org/drawingml/2006/main">
+            <a:srgbClr val="000000">
+              <a:alpha val="0"/>
+            </a:srgbClr>
+          </a:solidFill>
+          <a:ln xmlns:a="http://schemas.openxmlformats.org/drawingml/2006/main" w="0">
+            <a:solidFill>
+              <a:srgbClr val="000000">
+                <a:alpha val="0"/>
+              </a:srgbClr>
+            </a:solidFill>
+            <a:prstDash val="solid"/>
+          </a:ln>
+        </p:spPr>
+        <p:txBody>
+          <a:bodyPr xmlns:a="http://schemas.openxmlformats.org/drawingml/2006/main" lIns="0" tIns="0" rIns="0" bIns="0" anchor="t"/>
+          <a:lstStyle xmlns:a="http://schemas.openxmlformats.org/drawingml/2006/main"/>
+          <a:p xmlns:a="http://schemas.openxmlformats.org/drawingml/2006/main">
+            <a:pPr algn="l">
+              <a:defRPr sz="1125" b="1">
+                <a:solidFill>
+                  <a:srgbClr val="08111F"/>
+                </a:solidFill>
+                <a:latin typeface="Aptos"/>
+                <a:ea typeface="Aptos"/>
+                <a:cs typeface="Aptos"/>
+              </a:defRPr>
+            </a:pPr>
+            <a:r>
+              <a:rPr sz="1125" b="1">
+                <a:solidFill>
+                  <a:srgbClr val="08111F"/>
+                </a:solidFill>
+                <a:latin typeface="Aptos"/>
+                <a:ea typeface="Aptos"/>
+                <a:cs typeface="Aptos"/>
+              </a:rPr>
+              <a:t>Throughput ABR</a:t>
+            </a:r>
+          </a:p>
+        </p:txBody>
+      </p:sp>
+      <p:sp>
+        <p:nvSpPr>
+          <p:cNvPr id="15" name="">
+            <a:extLst xmlns:a="http://schemas.openxmlformats.org/drawingml/2006/main">
+              <a:ext uri="{FF2B5EF4-FFF2-40B4-BE49-F238E27FC236}">
+                <a16:creationId xmlns:a16="http://schemas.microsoft.com/office/drawing/2014/main" id="{76E23BBA-8191-4AC7-99F5-0853CFE1BDBE}"/>
+              </a:ext>
+            </a:extLst>
+          </p:cNvPr>
+          <p:cNvSpPr>
+            <a:spLocks xmlns:a="http://schemas.openxmlformats.org/drawingml/2006/main" noGrp="1"/>
+          </p:cNvSpPr>
+          <p:nvPr/>
+        </p:nvSpPr>
+        <p:spPr>
+          <a:xfrm xmlns:a="http://schemas.openxmlformats.org/drawingml/2006/main">
+            <a:off x="2686050" y="2552700"/>
+            <a:ext cx="2476500" cy="590550"/>
+          </a:xfrm>
+          <a:prstGeom xmlns:a="http://schemas.openxmlformats.org/drawingml/2006/main" prst="rect">
+            <a:avLst/>
+          </a:prstGeom>
+          <a:solidFill xmlns:a="http://schemas.openxmlformats.org/drawingml/2006/main">
+            <a:srgbClr val="FFFFFF"/>
+          </a:solidFill>
+          <a:ln xmlns:a="http://schemas.openxmlformats.org/drawingml/2006/main" w="9525">
+            <a:solidFill>
+              <a:srgbClr val="D2D8DE"/>
+            </a:solidFill>
+            <a:prstDash val="solid"/>
+          </a:ln>
+        </p:spPr>
+      </p:sp>
+      <p:sp>
+        <p:nvSpPr>
+          <p:cNvPr id="16" name="">
+            <a:extLst xmlns:a="http://schemas.openxmlformats.org/drawingml/2006/main">
+              <a:ext uri="{FF2B5EF4-FFF2-40B4-BE49-F238E27FC236}">
+                <a16:creationId xmlns:a16="http://schemas.microsoft.com/office/drawing/2014/main" id="{4C3670C0-75D6-467C-AF19-9E1FABF2343C}"/>
+              </a:ext>
+            </a:extLst>
+          </p:cNvPr>
+          <p:cNvSpPr>
+            <a:spLocks xmlns:a="http://schemas.openxmlformats.org/drawingml/2006/main" noGrp="1"/>
+          </p:cNvSpPr>
+          <p:nvPr/>
+        </p:nvSpPr>
+        <p:spPr>
+          <a:xfrm xmlns:a="http://schemas.openxmlformats.org/drawingml/2006/main">
+            <a:off x="2800350" y="2686050"/>
+            <a:ext cx="2247900" cy="323850"/>
+          </a:xfrm>
+          <a:prstGeom xmlns:a="http://schemas.openxmlformats.org/drawingml/2006/main" prst="rect">
+            <a:avLst/>
+          </a:prstGeom>
+          <a:solidFill xmlns:a="http://schemas.openxmlformats.org/drawingml/2006/main">
+            <a:srgbClr val="000000">
+              <a:alpha val="0"/>
+            </a:srgbClr>
+          </a:solidFill>
+          <a:ln xmlns:a="http://schemas.openxmlformats.org/drawingml/2006/main" w="0">
+            <a:solidFill>
+              <a:srgbClr val="000000">
+                <a:alpha val="0"/>
+              </a:srgbClr>
+            </a:solidFill>
+            <a:prstDash val="solid"/>
+          </a:ln>
+        </p:spPr>
+        <p:txBody>
+          <a:bodyPr xmlns:a="http://schemas.openxmlformats.org/drawingml/2006/main" lIns="0" tIns="0" rIns="0" bIns="0" anchor="t"/>
+          <a:lstStyle xmlns:a="http://schemas.openxmlformats.org/drawingml/2006/main"/>
+          <a:p xmlns:a="http://schemas.openxmlformats.org/drawingml/2006/main">
+            <a:pPr algn="l">
+              <a:defRPr sz="975" b="0">
+                <a:solidFill>
+                  <a:srgbClr val="08111F"/>
+                </a:solidFill>
+                <a:latin typeface="Aptos"/>
+                <a:ea typeface="Aptos"/>
+                <a:cs typeface="Aptos"/>
+              </a:defRPr>
+            </a:pPr>
+            <a:r>
+              <a:rPr sz="975" b="0">
+                <a:solidFill>
+                  <a:srgbClr val="08111F"/>
+                </a:solidFill>
+                <a:latin typeface="Aptos"/>
+                <a:ea typeface="Aptos"/>
+                <a:cs typeface="Aptos"/>
+              </a:rPr>
+              <a:t>recent bandwidth estimate</a:t>
+            </a:r>
+          </a:p>
+        </p:txBody>
+      </p:sp>
+      <p:sp>
+        <p:nvSpPr>
+          <p:cNvPr id="17" name="">
+            <a:extLst xmlns:a="http://schemas.openxmlformats.org/drawingml/2006/main">
+              <a:ext uri="{FF2B5EF4-FFF2-40B4-BE49-F238E27FC236}">
+                <a16:creationId xmlns:a16="http://schemas.microsoft.com/office/drawing/2014/main" id="{20B61B4F-D71B-4666-8140-52450CBCB31C}"/>
+              </a:ext>
+            </a:extLst>
+          </p:cNvPr>
+          <p:cNvSpPr>
+            <a:spLocks xmlns:a="http://schemas.openxmlformats.org/drawingml/2006/main" noGrp="1"/>
+          </p:cNvSpPr>
+          <p:nvPr/>
+        </p:nvSpPr>
+        <p:spPr>
+          <a:xfrm xmlns:a="http://schemas.openxmlformats.org/drawingml/2006/main">
+            <a:off x="5162550" y="2552700"/>
+            <a:ext cx="2714625" cy="590550"/>
+          </a:xfrm>
+          <a:prstGeom xmlns:a="http://schemas.openxmlformats.org/drawingml/2006/main" prst="rect">
+            <a:avLst/>
+          </a:prstGeom>
+          <a:solidFill xmlns:a="http://schemas.openxmlformats.org/drawingml/2006/main">
+            <a:srgbClr val="FFFFFF"/>
+          </a:solidFill>
+          <a:ln xmlns:a="http://schemas.openxmlformats.org/drawingml/2006/main" w="9525">
+            <a:solidFill>
+              <a:srgbClr val="D2D8DE"/>
+            </a:solidFill>
+            <a:prstDash val="solid"/>
+          </a:ln>
+        </p:spPr>
+      </p:sp>
+      <p:sp>
+        <p:nvSpPr>
+          <p:cNvPr id="18" name="">
+            <a:extLst xmlns:a="http://schemas.openxmlformats.org/drawingml/2006/main">
+              <a:ext uri="{FF2B5EF4-FFF2-40B4-BE49-F238E27FC236}">
+                <a16:creationId xmlns:a16="http://schemas.microsoft.com/office/drawing/2014/main" id="{8D3CDEAA-6D51-4B41-8701-A636B55C03D7}"/>
+              </a:ext>
+            </a:extLst>
+          </p:cNvPr>
+          <p:cNvSpPr>
+            <a:spLocks xmlns:a="http://schemas.openxmlformats.org/drawingml/2006/main" noGrp="1"/>
+          </p:cNvSpPr>
+          <p:nvPr/>
+        </p:nvSpPr>
+        <p:spPr>
+          <a:xfrm xmlns:a="http://schemas.openxmlformats.org/drawingml/2006/main">
+            <a:off x="5276850" y="2686050"/>
+            <a:ext cx="2486025" cy="323850"/>
+          </a:xfrm>
+          <a:prstGeom xmlns:a="http://schemas.openxmlformats.org/drawingml/2006/main" prst="rect">
+            <a:avLst/>
+          </a:prstGeom>
+          <a:solidFill xmlns:a="http://schemas.openxmlformats.org/drawingml/2006/main">
+            <a:srgbClr val="000000">
+              <a:alpha val="0"/>
+            </a:srgbClr>
+          </a:solidFill>
+          <a:ln xmlns:a="http://schemas.openxmlformats.org/drawingml/2006/main" w="0">
+            <a:solidFill>
+              <a:srgbClr val="000000">
+                <a:alpha val="0"/>
+              </a:srgbClr>
+            </a:solidFill>
+            <a:prstDash val="solid"/>
+          </a:ln>
+        </p:spPr>
+        <p:txBody>
+          <a:bodyPr xmlns:a="http://schemas.openxmlformats.org/drawingml/2006/main" lIns="0" tIns="0" rIns="0" bIns="0" anchor="t"/>
+          <a:lstStyle xmlns:a="http://schemas.openxmlformats.org/drawingml/2006/main"/>
+          <a:p xmlns:a="http://schemas.openxmlformats.org/drawingml/2006/main">
+            <a:pPr algn="l">
+              <a:defRPr sz="975" b="0">
+                <a:solidFill>
+                  <a:srgbClr val="08111F"/>
+                </a:solidFill>
+                <a:latin typeface="Aptos"/>
+                <a:ea typeface="Aptos"/>
+                <a:cs typeface="Aptos"/>
+              </a:defRPr>
+            </a:pPr>
+            <a:r>
+              <a:rPr sz="975" b="0">
+                <a:solidFill>
+                  <a:srgbClr val="08111F"/>
+                </a:solidFill>
+                <a:latin typeface="Aptos"/>
+                <a:ea typeface="Aptos"/>
+                <a:cs typeface="Aptos"/>
+              </a:rPr>
+              <a:t>reactive; can over-upgrade during drops</a:t>
+            </a:r>
+          </a:p>
+        </p:txBody>
+      </p:sp>
+      <p:sp>
+        <p:nvSpPr>
+          <p:cNvPr id="19" name="">
+            <a:extLst xmlns:a="http://schemas.openxmlformats.org/drawingml/2006/main">
+              <a:ext uri="{FF2B5EF4-FFF2-40B4-BE49-F238E27FC236}">
+                <a16:creationId xmlns:a16="http://schemas.microsoft.com/office/drawing/2014/main" id="{1347814A-7A8F-4794-990D-0F18A93E59EC}"/>
+              </a:ext>
+            </a:extLst>
+          </p:cNvPr>
+          <p:cNvSpPr>
+            <a:spLocks xmlns:a="http://schemas.openxmlformats.org/drawingml/2006/main" noGrp="1"/>
+          </p:cNvSpPr>
+          <p:nvPr/>
+        </p:nvSpPr>
+        <p:spPr>
+          <a:xfrm xmlns:a="http://schemas.openxmlformats.org/drawingml/2006/main">
+            <a:off x="7877175" y="2552700"/>
+            <a:ext cx="3143250" cy="590550"/>
+          </a:xfrm>
+          <a:prstGeom xmlns:a="http://schemas.openxmlformats.org/drawingml/2006/main" prst="rect">
+            <a:avLst/>
+          </a:prstGeom>
+          <a:solidFill xmlns:a="http://schemas.openxmlformats.org/drawingml/2006/main">
+            <a:srgbClr val="DDF8EA"/>
+          </a:solidFill>
+          <a:ln xmlns:a="http://schemas.openxmlformats.org/drawingml/2006/main" w="9525">
+            <a:solidFill>
+              <a:srgbClr val="B7F16A"/>
+            </a:solidFill>
+            <a:prstDash val="solid"/>
+          </a:ln>
+        </p:spPr>
+      </p:sp>
+      <p:sp>
+        <p:nvSpPr>
+          <p:cNvPr id="20" name="">
+            <a:extLst xmlns:a="http://schemas.openxmlformats.org/drawingml/2006/main">
+              <a:ext uri="{FF2B5EF4-FFF2-40B4-BE49-F238E27FC236}">
+                <a16:creationId xmlns:a16="http://schemas.microsoft.com/office/drawing/2014/main" id="{C5874825-FD66-422D-BD99-450DC9B76011}"/>
+              </a:ext>
+            </a:extLst>
+          </p:cNvPr>
+          <p:cNvSpPr>
+            <a:spLocks xmlns:a="http://schemas.openxmlformats.org/drawingml/2006/main" noGrp="1"/>
+          </p:cNvSpPr>
+          <p:nvPr/>
+        </p:nvSpPr>
+        <p:spPr>
+          <a:xfrm xmlns:a="http://schemas.openxmlformats.org/drawingml/2006/main">
+            <a:off x="7991475" y="2686050"/>
+            <a:ext cx="2914650" cy="323850"/>
+          </a:xfrm>
+          <a:prstGeom xmlns:a="http://schemas.openxmlformats.org/drawingml/2006/main" prst="rect">
+            <a:avLst/>
+          </a:prstGeom>
+          <a:solidFill xmlns:a="http://schemas.openxmlformats.org/drawingml/2006/main">
+            <a:srgbClr val="000000">
+              <a:alpha val="0"/>
+            </a:srgbClr>
+          </a:solidFill>
+          <a:ln xmlns:a="http://schemas.openxmlformats.org/drawingml/2006/main" w="0">
+            <a:solidFill>
+              <a:srgbClr val="000000">
+                <a:alpha val="0"/>
+              </a:srgbClr>
+            </a:solidFill>
+            <a:prstDash val="solid"/>
+          </a:ln>
+        </p:spPr>
+        <p:txBody>
+          <a:bodyPr xmlns:a="http://schemas.openxmlformats.org/drawingml/2006/main" lIns="0" tIns="0" rIns="0" bIns="0" anchor="t"/>
+          <a:lstStyle xmlns:a="http://schemas.openxmlformats.org/drawingml/2006/main"/>
+          <a:p xmlns:a="http://schemas.openxmlformats.org/drawingml/2006/main">
+            <a:pPr algn="l">
+              <a:defRPr sz="975" b="0">
+                <a:solidFill>
+                  <a:srgbClr val="08111F"/>
+                </a:solidFill>
+                <a:latin typeface="Aptos"/>
+                <a:ea typeface="Aptos"/>
+                <a:cs typeface="Aptos"/>
+              </a:defRPr>
+            </a:pPr>
+            <a:r>
+              <a:rPr sz="975" b="0">
+                <a:solidFill>
+                  <a:srgbClr val="08111F"/>
+                </a:solidFill>
+                <a:latin typeface="Aptos"/>
+                <a:ea typeface="Aptos"/>
+                <a:cs typeface="Aptos"/>
+              </a:rPr>
+              <a:t>uses throughput trend plus risk cap</a:t>
+            </a:r>
+          </a:p>
+        </p:txBody>
+      </p:sp>
+      <p:sp>
+        <p:nvSpPr>
+          <p:cNvPr id="21" name="">
+            <a:extLst xmlns:a="http://schemas.openxmlformats.org/drawingml/2006/main">
+              <a:ext uri="{FF2B5EF4-FFF2-40B4-BE49-F238E27FC236}">
+                <a16:creationId xmlns:a16="http://schemas.microsoft.com/office/drawing/2014/main" id="{B04A36B0-C7B3-413C-8B32-3AE11DFC0F0B}"/>
+              </a:ext>
+            </a:extLst>
+          </p:cNvPr>
+          <p:cNvSpPr>
+            <a:spLocks xmlns:a="http://schemas.openxmlformats.org/drawingml/2006/main" noGrp="1"/>
+          </p:cNvSpPr>
+          <p:nvPr/>
+        </p:nvSpPr>
+        <p:spPr>
+          <a:xfrm xmlns:a="http://schemas.openxmlformats.org/drawingml/2006/main">
+            <a:off x="590550" y="3143250"/>
+            <a:ext cx="2095500" cy="590550"/>
+          </a:xfrm>
+          <a:prstGeom xmlns:a="http://schemas.openxmlformats.org/drawingml/2006/main" prst="rect">
+            <a:avLst/>
+          </a:prstGeom>
+          <a:solidFill xmlns:a="http://schemas.openxmlformats.org/drawingml/2006/main">
+            <a:srgbClr val="FFFFFF"/>
+          </a:solidFill>
+          <a:ln xmlns:a="http://schemas.openxmlformats.org/drawingml/2006/main" w="9525">
+            <a:solidFill>
+              <a:srgbClr val="D2D8DE"/>
+            </a:solidFill>
+            <a:prstDash val="solid"/>
+          </a:ln>
+        </p:spPr>
+      </p:sp>
+      <p:sp>
+        <p:nvSpPr>
+          <p:cNvPr id="22" name="">
+            <a:extLst xmlns:a="http://schemas.openxmlformats.org/drawingml/2006/main">
+              <a:ext uri="{FF2B5EF4-FFF2-40B4-BE49-F238E27FC236}">
+                <a16:creationId xmlns:a16="http://schemas.microsoft.com/office/drawing/2014/main" id="{BA46CF75-E175-4B69-852C-A29DBAE08496}"/>
+              </a:ext>
+            </a:extLst>
+          </p:cNvPr>
+          <p:cNvSpPr>
+            <a:spLocks xmlns:a="http://schemas.openxmlformats.org/drawingml/2006/main" noGrp="1"/>
+          </p:cNvSpPr>
+          <p:nvPr/>
+        </p:nvSpPr>
+        <p:spPr>
+          <a:xfrm xmlns:a="http://schemas.openxmlformats.org/drawingml/2006/main">
+            <a:off x="704850" y="3276600"/>
+            <a:ext cx="1866900" cy="323850"/>
+          </a:xfrm>
+          <a:prstGeom xmlns:a="http://schemas.openxmlformats.org/drawingml/2006/main" prst="rect">
+            <a:avLst/>
+          </a:prstGeom>
+          <a:solidFill xmlns:a="http://schemas.openxmlformats.org/drawingml/2006/main">
+            <a:srgbClr val="000000">
+              <a:alpha val="0"/>
+            </a:srgbClr>
+          </a:solidFill>
+          <a:ln xmlns:a="http://schemas.openxmlformats.org/drawingml/2006/main" w="0">
+            <a:solidFill>
+              <a:srgbClr val="000000">
+                <a:alpha val="0"/>
+              </a:srgbClr>
+            </a:solidFill>
+            <a:prstDash val="solid"/>
+          </a:ln>
+        </p:spPr>
+        <p:txBody>
+          <a:bodyPr xmlns:a="http://schemas.openxmlformats.org/drawingml/2006/main" lIns="0" tIns="0" rIns="0" bIns="0" anchor="t"/>
+          <a:lstStyle xmlns:a="http://schemas.openxmlformats.org/drawingml/2006/main"/>
+          <a:p xmlns:a="http://schemas.openxmlformats.org/drawingml/2006/main">
+            <a:pPr algn="l">
+              <a:defRPr sz="1125" b="1">
+                <a:solidFill>
+                  <a:srgbClr val="08111F"/>
+                </a:solidFill>
+                <a:latin typeface="Aptos"/>
+                <a:ea typeface="Aptos"/>
+                <a:cs typeface="Aptos"/>
+              </a:defRPr>
+            </a:pPr>
+            <a:r>
+              <a:rPr sz="1125" b="1">
+                <a:solidFill>
+                  <a:srgbClr val="08111F"/>
+                </a:solidFill>
+                <a:latin typeface="Aptos"/>
+                <a:ea typeface="Aptos"/>
+                <a:cs typeface="Aptos"/>
+              </a:rPr>
+              <a:t>Buffer ABR</a:t>
+            </a:r>
+          </a:p>
+        </p:txBody>
+      </p:sp>
+      <p:sp>
+        <p:nvSpPr>
+          <p:cNvPr id="23" name="">
+            <a:extLst xmlns:a="http://schemas.openxmlformats.org/drawingml/2006/main">
+              <a:ext uri="{FF2B5EF4-FFF2-40B4-BE49-F238E27FC236}">
+                <a16:creationId xmlns:a16="http://schemas.microsoft.com/office/drawing/2014/main" id="{EEECA8E0-58F6-411A-B1CC-6ED336116683}"/>
+              </a:ext>
+            </a:extLst>
+          </p:cNvPr>
+          <p:cNvSpPr>
+            <a:spLocks xmlns:a="http://schemas.openxmlformats.org/drawingml/2006/main" noGrp="1"/>
+          </p:cNvSpPr>
+          <p:nvPr/>
+        </p:nvSpPr>
+        <p:spPr>
+          <a:xfrm xmlns:a="http://schemas.openxmlformats.org/drawingml/2006/main">
+            <a:off x="2686050" y="3143250"/>
+            <a:ext cx="2476500" cy="590550"/>
+          </a:xfrm>
+          <a:prstGeom xmlns:a="http://schemas.openxmlformats.org/drawingml/2006/main" prst="rect">
+            <a:avLst/>
+          </a:prstGeom>
+          <a:solidFill xmlns:a="http://schemas.openxmlformats.org/drawingml/2006/main">
+            <a:srgbClr val="FFFFFF"/>
+          </a:solidFill>
+          <a:ln xmlns:a="http://schemas.openxmlformats.org/drawingml/2006/main" w="9525">
+            <a:solidFill>
+              <a:srgbClr val="D2D8DE"/>
+            </a:solidFill>
+            <a:prstDash val="solid"/>
+          </a:ln>
+        </p:spPr>
+      </p:sp>
+      <p:sp>
+        <p:nvSpPr>
+          <p:cNvPr id="24" name="">
+            <a:extLst xmlns:a="http://schemas.openxmlformats.org/drawingml/2006/main">
+              <a:ext uri="{FF2B5EF4-FFF2-40B4-BE49-F238E27FC236}">
+                <a16:creationId xmlns:a16="http://schemas.microsoft.com/office/drawing/2014/main" id="{6F553C9E-4AA4-456C-9A2D-2687F01E7875}"/>
+              </a:ext>
+            </a:extLst>
+          </p:cNvPr>
+          <p:cNvSpPr>
+            <a:spLocks xmlns:a="http://schemas.openxmlformats.org/drawingml/2006/main" noGrp="1"/>
+          </p:cNvSpPr>
+          <p:nvPr/>
+        </p:nvSpPr>
+        <p:spPr>
+          <a:xfrm xmlns:a="http://schemas.openxmlformats.org/drawingml/2006/main">
+            <a:off x="2800350" y="3276600"/>
+            <a:ext cx="2247900" cy="323850"/>
+          </a:xfrm>
+          <a:prstGeom xmlns:a="http://schemas.openxmlformats.org/drawingml/2006/main" prst="rect">
+            <a:avLst/>
+          </a:prstGeom>
+          <a:solidFill xmlns:a="http://schemas.openxmlformats.org/drawingml/2006/main">
+            <a:srgbClr val="000000">
+              <a:alpha val="0"/>
+            </a:srgbClr>
+          </a:solidFill>
+          <a:ln xmlns:a="http://schemas.openxmlformats.org/drawingml/2006/main" w="0">
+            <a:solidFill>
+              <a:srgbClr val="000000">
+                <a:alpha val="0"/>
+              </a:srgbClr>
+            </a:solidFill>
+            <a:prstDash val="solid"/>
+          </a:ln>
+        </p:spPr>
+        <p:txBody>
+          <a:bodyPr xmlns:a="http://schemas.openxmlformats.org/drawingml/2006/main" lIns="0" tIns="0" rIns="0" bIns="0" anchor="t"/>
+          <a:lstStyle xmlns:a="http://schemas.openxmlformats.org/drawingml/2006/main"/>
+          <a:p xmlns:a="http://schemas.openxmlformats.org/drawingml/2006/main">
+            <a:pPr algn="l">
+              <a:defRPr sz="975" b="0">
+                <a:solidFill>
+                  <a:srgbClr val="08111F"/>
+                </a:solidFill>
+                <a:latin typeface="Aptos"/>
+                <a:ea typeface="Aptos"/>
+                <a:cs typeface="Aptos"/>
+              </a:defRPr>
+            </a:pPr>
+            <a:r>
+              <a:rPr sz="975" b="0">
+                <a:solidFill>
+                  <a:srgbClr val="08111F"/>
+                </a:solidFill>
+                <a:latin typeface="Aptos"/>
+                <a:ea typeface="Aptos"/>
+                <a:cs typeface="Aptos"/>
+              </a:rPr>
+              <a:t>buffer occupancy</a:t>
+            </a:r>
+          </a:p>
+        </p:txBody>
+      </p:sp>
+      <p:sp>
+        <p:nvSpPr>
+          <p:cNvPr id="25" name="">
+            <a:extLst xmlns:a="http://schemas.openxmlformats.org/drawingml/2006/main">
+              <a:ext uri="{FF2B5EF4-FFF2-40B4-BE49-F238E27FC236}">
+                <a16:creationId xmlns:a16="http://schemas.microsoft.com/office/drawing/2014/main" id="{E04CB6A6-ED33-403E-877D-9495FEC85CC5}"/>
+              </a:ext>
+            </a:extLst>
+          </p:cNvPr>
+          <p:cNvSpPr>
+            <a:spLocks xmlns:a="http://schemas.openxmlformats.org/drawingml/2006/main" noGrp="1"/>
+          </p:cNvSpPr>
+          <p:nvPr/>
+        </p:nvSpPr>
+        <p:spPr>
+          <a:xfrm xmlns:a="http://schemas.openxmlformats.org/drawingml/2006/main">
+            <a:off x="5162550" y="3143250"/>
+            <a:ext cx="2714625" cy="590550"/>
+          </a:xfrm>
+          <a:prstGeom xmlns:a="http://schemas.openxmlformats.org/drawingml/2006/main" prst="rect">
+            <a:avLst/>
+          </a:prstGeom>
+          <a:solidFill xmlns:a="http://schemas.openxmlformats.org/drawingml/2006/main">
+            <a:srgbClr val="FFFFFF"/>
+          </a:solidFill>
+          <a:ln xmlns:a="http://schemas.openxmlformats.org/drawingml/2006/main" w="9525">
+            <a:solidFill>
+              <a:srgbClr val="D2D8DE"/>
+            </a:solidFill>
+            <a:prstDash val="solid"/>
+          </a:ln>
+        </p:spPr>
+      </p:sp>
+      <p:sp>
+        <p:nvSpPr>
+          <p:cNvPr id="26" name="">
+            <a:extLst xmlns:a="http://schemas.openxmlformats.org/drawingml/2006/main">
+              <a:ext uri="{FF2B5EF4-FFF2-40B4-BE49-F238E27FC236}">
+                <a16:creationId xmlns:a16="http://schemas.microsoft.com/office/drawing/2014/main" id="{D0B4C3BC-DA0E-4B92-AD78-C8E24FBE73BF}"/>
+              </a:ext>
+            </a:extLst>
+          </p:cNvPr>
+          <p:cNvSpPr>
+            <a:spLocks xmlns:a="http://schemas.openxmlformats.org/drawingml/2006/main" noGrp="1"/>
+          </p:cNvSpPr>
+          <p:nvPr/>
+        </p:nvSpPr>
+        <p:spPr>
+          <a:xfrm xmlns:a="http://schemas.openxmlformats.org/drawingml/2006/main">
+            <a:off x="5276850" y="3276600"/>
+            <a:ext cx="2486025" cy="323850"/>
+          </a:xfrm>
+          <a:prstGeom xmlns:a="http://schemas.openxmlformats.org/drawingml/2006/main" prst="rect">
+            <a:avLst/>
+          </a:prstGeom>
+          <a:solidFill xmlns:a="http://schemas.openxmlformats.org/drawingml/2006/main">
+            <a:srgbClr val="000000">
+              <a:alpha val="0"/>
+            </a:srgbClr>
+          </a:solidFill>
+          <a:ln xmlns:a="http://schemas.openxmlformats.org/drawingml/2006/main" w="0">
+            <a:solidFill>
+              <a:srgbClr val="000000">
+                <a:alpha val="0"/>
+              </a:srgbClr>
+            </a:solidFill>
+            <a:prstDash val="solid"/>
+          </a:ln>
+        </p:spPr>
+        <p:txBody>
+          <a:bodyPr xmlns:a="http://schemas.openxmlformats.org/drawingml/2006/main" lIns="0" tIns="0" rIns="0" bIns="0" anchor="t"/>
+          <a:lstStyle xmlns:a="http://schemas.openxmlformats.org/drawingml/2006/main"/>
+          <a:p xmlns:a="http://schemas.openxmlformats.org/drawingml/2006/main">
+            <a:pPr algn="l">
+              <a:defRPr sz="975" b="0">
+                <a:solidFill>
+                  <a:srgbClr val="08111F"/>
+                </a:solidFill>
+                <a:latin typeface="Aptos"/>
+                <a:ea typeface="Aptos"/>
+                <a:cs typeface="Aptos"/>
+              </a:defRPr>
+            </a:pPr>
+            <a:r>
+              <a:rPr sz="975" b="0">
+                <a:solidFill>
+                  <a:srgbClr val="08111F"/>
+                </a:solidFill>
+                <a:latin typeface="Aptos"/>
+                <a:ea typeface="Aptos"/>
+                <a:cs typeface="Aptos"/>
+              </a:rPr>
+              <a:t>ignores RTT, jitter, and packet loss</a:t>
+            </a:r>
+          </a:p>
+        </p:txBody>
+      </p:sp>
+      <p:sp>
+        <p:nvSpPr>
+          <p:cNvPr id="27" name="">
+            <a:extLst xmlns:a="http://schemas.openxmlformats.org/drawingml/2006/main">
+              <a:ext uri="{FF2B5EF4-FFF2-40B4-BE49-F238E27FC236}">
+                <a16:creationId xmlns:a16="http://schemas.microsoft.com/office/drawing/2014/main" id="{223C0FF7-AA40-435B-ADBA-0F2F8E4A089B}"/>
+              </a:ext>
+            </a:extLst>
+          </p:cNvPr>
+          <p:cNvSpPr>
+            <a:spLocks xmlns:a="http://schemas.openxmlformats.org/drawingml/2006/main" noGrp="1"/>
+          </p:cNvSpPr>
+          <p:nvPr/>
+        </p:nvSpPr>
+        <p:spPr>
+          <a:xfrm xmlns:a="http://schemas.openxmlformats.org/drawingml/2006/main">
+            <a:off x="7877175" y="3143250"/>
+            <a:ext cx="3143250" cy="590550"/>
+          </a:xfrm>
+          <a:prstGeom xmlns:a="http://schemas.openxmlformats.org/drawingml/2006/main" prst="rect">
+            <a:avLst/>
+          </a:prstGeom>
+          <a:solidFill xmlns:a="http://schemas.openxmlformats.org/drawingml/2006/main">
+            <a:srgbClr val="DDF8EA"/>
+          </a:solidFill>
+          <a:ln xmlns:a="http://schemas.openxmlformats.org/drawingml/2006/main" w="9525">
+            <a:solidFill>
+              <a:srgbClr val="B7F16A"/>
+            </a:solidFill>
+            <a:prstDash val="solid"/>
+          </a:ln>
+        </p:spPr>
+      </p:sp>
+      <p:sp>
+        <p:nvSpPr>
+          <p:cNvPr id="28" name="">
+            <a:extLst xmlns:a="http://schemas.openxmlformats.org/drawingml/2006/main">
+              <a:ext uri="{FF2B5EF4-FFF2-40B4-BE49-F238E27FC236}">
+                <a16:creationId xmlns:a16="http://schemas.microsoft.com/office/drawing/2014/main" id="{A65C5F75-87F7-44ED-BE26-CC09A2DCCBB9}"/>
+              </a:ext>
+            </a:extLst>
+          </p:cNvPr>
+          <p:cNvSpPr>
+            <a:spLocks xmlns:a="http://schemas.openxmlformats.org/drawingml/2006/main" noGrp="1"/>
+          </p:cNvSpPr>
+          <p:nvPr/>
+        </p:nvSpPr>
+        <p:spPr>
+          <a:xfrm xmlns:a="http://schemas.openxmlformats.org/drawingml/2006/main">
+            <a:off x="7991475" y="3276600"/>
+            <a:ext cx="2914650" cy="323850"/>
+          </a:xfrm>
+          <a:prstGeom xmlns:a="http://schemas.openxmlformats.org/drawingml/2006/main" prst="rect">
+            <a:avLst/>
+          </a:prstGeom>
+          <a:solidFill xmlns:a="http://schemas.openxmlformats.org/drawingml/2006/main">
+            <a:srgbClr val="000000">
+              <a:alpha val="0"/>
+            </a:srgbClr>
+          </a:solidFill>
+          <a:ln xmlns:a="http://schemas.openxmlformats.org/drawingml/2006/main" w="0">
+            <a:solidFill>
+              <a:srgbClr val="000000">
+                <a:alpha val="0"/>
+              </a:srgbClr>
+            </a:solidFill>
+            <a:prstDash val="solid"/>
+          </a:ln>
+        </p:spPr>
+        <p:txBody>
+          <a:bodyPr xmlns:a="http://schemas.openxmlformats.org/drawingml/2006/main" lIns="0" tIns="0" rIns="0" bIns="0" anchor="t"/>
+          <a:lstStyle xmlns:a="http://schemas.openxmlformats.org/drawingml/2006/main"/>
+          <a:p xmlns:a="http://schemas.openxmlformats.org/drawingml/2006/main">
+            <a:pPr algn="l">
+              <a:defRPr sz="975" b="0">
+                <a:solidFill>
+                  <a:srgbClr val="08111F"/>
+                </a:solidFill>
+                <a:latin typeface="Aptos"/>
+                <a:ea typeface="Aptos"/>
+                <a:cs typeface="Aptos"/>
+              </a:defRPr>
+            </a:pPr>
+            <a:r>
+              <a:rPr sz="975" b="0">
+                <a:solidFill>
+                  <a:srgbClr val="08111F"/>
+                </a:solidFill>
+                <a:latin typeface="Aptos"/>
+                <a:ea typeface="Aptos"/>
+                <a:cs typeface="Aptos"/>
+              </a:rPr>
+              <a:t>scores multi-signal QoS risk</a:t>
+            </a:r>
+          </a:p>
+        </p:txBody>
+      </p:sp>
+      <p:sp>
+        <p:nvSpPr>
+          <p:cNvPr id="29" name="">
+            <a:extLst xmlns:a="http://schemas.openxmlformats.org/drawingml/2006/main">
+              <a:ext uri="{FF2B5EF4-FFF2-40B4-BE49-F238E27FC236}">
+                <a16:creationId xmlns:a16="http://schemas.microsoft.com/office/drawing/2014/main" id="{5A2ECCC6-940E-43B2-8798-05C5B369337A}"/>
+              </a:ext>
+            </a:extLst>
+          </p:cNvPr>
+          <p:cNvSpPr>
+            <a:spLocks xmlns:a="http://schemas.openxmlformats.org/drawingml/2006/main" noGrp="1"/>
+          </p:cNvSpPr>
+          <p:nvPr/>
+        </p:nvSpPr>
+        <p:spPr>
+          <a:xfrm xmlns:a="http://schemas.openxmlformats.org/drawingml/2006/main">
+            <a:off x="590550" y="3733800"/>
+            <a:ext cx="2095500" cy="590550"/>
+          </a:xfrm>
+          <a:prstGeom xmlns:a="http://schemas.openxmlformats.org/drawingml/2006/main" prst="rect">
+            <a:avLst/>
+          </a:prstGeom>
+          <a:solidFill xmlns:a="http://schemas.openxmlformats.org/drawingml/2006/main">
+            <a:srgbClr val="FFFFFF"/>
+          </a:solidFill>
+          <a:ln xmlns:a="http://schemas.openxmlformats.org/drawingml/2006/main" w="9525">
+            <a:solidFill>
+              <a:srgbClr val="D2D8DE"/>
+            </a:solidFill>
+            <a:prstDash val="solid"/>
+          </a:ln>
+        </p:spPr>
+      </p:sp>
+      <p:sp>
+        <p:nvSpPr>
+          <p:cNvPr id="30" name="">
+            <a:extLst xmlns:a="http://schemas.openxmlformats.org/drawingml/2006/main">
+              <a:ext uri="{FF2B5EF4-FFF2-40B4-BE49-F238E27FC236}">
+                <a16:creationId xmlns:a16="http://schemas.microsoft.com/office/drawing/2014/main" id="{65CFC19A-E078-453E-92CA-CCBAA95C45DF}"/>
+              </a:ext>
+            </a:extLst>
+          </p:cNvPr>
+          <p:cNvSpPr>
+            <a:spLocks xmlns:a="http://schemas.openxmlformats.org/drawingml/2006/main" noGrp="1"/>
+          </p:cNvSpPr>
+          <p:nvPr/>
+        </p:nvSpPr>
+        <p:spPr>
+          <a:xfrm xmlns:a="http://schemas.openxmlformats.org/drawingml/2006/main">
+            <a:off x="704850" y="3867150"/>
+            <a:ext cx="1866900" cy="323850"/>
+          </a:xfrm>
+          <a:prstGeom xmlns:a="http://schemas.openxmlformats.org/drawingml/2006/main" prst="rect">
+            <a:avLst/>
+          </a:prstGeom>
+          <a:solidFill xmlns:a="http://schemas.openxmlformats.org/drawingml/2006/main">
+            <a:srgbClr val="000000">
+              <a:alpha val="0"/>
+            </a:srgbClr>
+          </a:solidFill>
+          <a:ln xmlns:a="http://schemas.openxmlformats.org/drawingml/2006/main" w="0">
+            <a:solidFill>
+              <a:srgbClr val="000000">
+                <a:alpha val="0"/>
+              </a:srgbClr>
+            </a:solidFill>
+            <a:prstDash val="solid"/>
+          </a:ln>
+        </p:spPr>
+        <p:txBody>
+          <a:bodyPr xmlns:a="http://schemas.openxmlformats.org/drawingml/2006/main" lIns="0" tIns="0" rIns="0" bIns="0" anchor="t"/>
+          <a:lstStyle xmlns:a="http://schemas.openxmlformats.org/drawingml/2006/main"/>
+          <a:p xmlns:a="http://schemas.openxmlformats.org/drawingml/2006/main">
+            <a:pPr algn="l">
+              <a:defRPr sz="1125" b="1">
+                <a:solidFill>
+                  <a:srgbClr val="08111F"/>
+                </a:solidFill>
+                <a:latin typeface="Aptos"/>
+                <a:ea typeface="Aptos"/>
+                <a:cs typeface="Aptos"/>
+              </a:defRPr>
+            </a:pPr>
+            <a:r>
+              <a:rPr sz="1125" b="1">
+                <a:solidFill>
+                  <a:srgbClr val="08111F"/>
+                </a:solidFill>
+                <a:latin typeface="Aptos"/>
+                <a:ea typeface="Aptos"/>
+                <a:cs typeface="Aptos"/>
+              </a:rPr>
+              <a:t>dash.js default ABR</a:t>
+            </a:r>
+          </a:p>
+        </p:txBody>
+      </p:sp>
+      <p:sp>
+        <p:nvSpPr>
+          <p:cNvPr id="31" name="">
+            <a:extLst xmlns:a="http://schemas.openxmlformats.org/drawingml/2006/main">
+              <a:ext uri="{FF2B5EF4-FFF2-40B4-BE49-F238E27FC236}">
+                <a16:creationId xmlns:a16="http://schemas.microsoft.com/office/drawing/2014/main" id="{E979D0A7-73C9-4D33-A37C-7A0185C74B3F}"/>
+              </a:ext>
+            </a:extLst>
+          </p:cNvPr>
+          <p:cNvSpPr>
+            <a:spLocks xmlns:a="http://schemas.openxmlformats.org/drawingml/2006/main" noGrp="1"/>
+          </p:cNvSpPr>
+          <p:nvPr/>
+        </p:nvSpPr>
+        <p:spPr>
+          <a:xfrm xmlns:a="http://schemas.openxmlformats.org/drawingml/2006/main">
+            <a:off x="2686050" y="3733800"/>
+            <a:ext cx="2476500" cy="590550"/>
+          </a:xfrm>
+          <a:prstGeom xmlns:a="http://schemas.openxmlformats.org/drawingml/2006/main" prst="rect">
+            <a:avLst/>
+          </a:prstGeom>
+          <a:solidFill xmlns:a="http://schemas.openxmlformats.org/drawingml/2006/main">
+            <a:srgbClr val="FFFFFF"/>
+          </a:solidFill>
+          <a:ln xmlns:a="http://schemas.openxmlformats.org/drawingml/2006/main" w="9525">
+            <a:solidFill>
+              <a:srgbClr val="D2D8DE"/>
+            </a:solidFill>
+            <a:prstDash val="solid"/>
+          </a:ln>
+        </p:spPr>
+      </p:sp>
+      <p:sp>
+        <p:nvSpPr>
+          <p:cNvPr id="32" name="">
+            <a:extLst xmlns:a="http://schemas.openxmlformats.org/drawingml/2006/main">
+              <a:ext uri="{FF2B5EF4-FFF2-40B4-BE49-F238E27FC236}">
+                <a16:creationId xmlns:a16="http://schemas.microsoft.com/office/drawing/2014/main" id="{DB61C19B-EB77-4545-BDDF-0DD85ED06363}"/>
+              </a:ext>
+            </a:extLst>
+          </p:cNvPr>
+          <p:cNvSpPr>
+            <a:spLocks xmlns:a="http://schemas.openxmlformats.org/drawingml/2006/main" noGrp="1"/>
+          </p:cNvSpPr>
+          <p:nvPr/>
+        </p:nvSpPr>
+        <p:spPr>
+          <a:xfrm xmlns:a="http://schemas.openxmlformats.org/drawingml/2006/main">
+            <a:off x="2800350" y="3867150"/>
+            <a:ext cx="2247900" cy="323850"/>
+          </a:xfrm>
+          <a:prstGeom xmlns:a="http://schemas.openxmlformats.org/drawingml/2006/main" prst="rect">
+            <a:avLst/>
+          </a:prstGeom>
+          <a:solidFill xmlns:a="http://schemas.openxmlformats.org/drawingml/2006/main">
+            <a:srgbClr val="000000">
+              <a:alpha val="0"/>
+            </a:srgbClr>
+          </a:solidFill>
+          <a:ln xmlns:a="http://schemas.openxmlformats.org/drawingml/2006/main" w="0">
+            <a:solidFill>
+              <a:srgbClr val="000000">
+                <a:alpha val="0"/>
+              </a:srgbClr>
+            </a:solidFill>
+            <a:prstDash val="solid"/>
+          </a:ln>
+        </p:spPr>
+        <p:txBody>
+          <a:bodyPr xmlns:a="http://schemas.openxmlformats.org/drawingml/2006/main" lIns="0" tIns="0" rIns="0" bIns="0" anchor="t"/>
+          <a:lstStyle xmlns:a="http://schemas.openxmlformats.org/drawingml/2006/main"/>
+          <a:p xmlns:a="http://schemas.openxmlformats.org/drawingml/2006/main">
+            <a:pPr algn="l">
+              <a:defRPr sz="975" b="0">
+                <a:solidFill>
+                  <a:srgbClr val="08111F"/>
+                </a:solidFill>
+                <a:latin typeface="Aptos"/>
+                <a:ea typeface="Aptos"/>
+                <a:cs typeface="Aptos"/>
+              </a:defRPr>
+            </a:pPr>
+            <a:r>
+              <a:rPr sz="975" b="0">
+                <a:solidFill>
+                  <a:srgbClr val="08111F"/>
+                </a:solidFill>
+                <a:latin typeface="Aptos"/>
+                <a:ea typeface="Aptos"/>
+                <a:cs typeface="Aptos"/>
+              </a:rPr>
+              <a:t>player-side ABR rules</a:t>
+            </a:r>
+          </a:p>
+        </p:txBody>
+      </p:sp>
+      <p:sp>
+        <p:nvSpPr>
+          <p:cNvPr id="33" name="">
+            <a:extLst xmlns:a="http://schemas.openxmlformats.org/drawingml/2006/main">
+              <a:ext uri="{FF2B5EF4-FFF2-40B4-BE49-F238E27FC236}">
+                <a16:creationId xmlns:a16="http://schemas.microsoft.com/office/drawing/2014/main" id="{A0C85F80-A315-4B92-8FAF-0C15451093C3}"/>
+              </a:ext>
+            </a:extLst>
+          </p:cNvPr>
+          <p:cNvSpPr>
+            <a:spLocks xmlns:a="http://schemas.openxmlformats.org/drawingml/2006/main" noGrp="1"/>
+          </p:cNvSpPr>
+          <p:nvPr/>
+        </p:nvSpPr>
+        <p:spPr>
+          <a:xfrm xmlns:a="http://schemas.openxmlformats.org/drawingml/2006/main">
+            <a:off x="5162550" y="3733800"/>
+            <a:ext cx="2714625" cy="590550"/>
+          </a:xfrm>
+          <a:prstGeom xmlns:a="http://schemas.openxmlformats.org/drawingml/2006/main" prst="rect">
+            <a:avLst/>
+          </a:prstGeom>
+          <a:solidFill xmlns:a="http://schemas.openxmlformats.org/drawingml/2006/main">
+            <a:srgbClr val="FFFFFF"/>
+          </a:solidFill>
+          <a:ln xmlns:a="http://schemas.openxmlformats.org/drawingml/2006/main" w="9525">
+            <a:solidFill>
+              <a:srgbClr val="D2D8DE"/>
+            </a:solidFill>
+            <a:prstDash val="solid"/>
+          </a:ln>
+        </p:spPr>
+      </p:sp>
+      <p:sp>
+        <p:nvSpPr>
+          <p:cNvPr id="34" name="">
+            <a:extLst xmlns:a="http://schemas.openxmlformats.org/drawingml/2006/main">
+              <a:ext uri="{FF2B5EF4-FFF2-40B4-BE49-F238E27FC236}">
+                <a16:creationId xmlns:a16="http://schemas.microsoft.com/office/drawing/2014/main" id="{FBE2CA28-91F7-4530-82E6-405175C4B360}"/>
+              </a:ext>
+            </a:extLst>
+          </p:cNvPr>
+          <p:cNvSpPr>
+            <a:spLocks xmlns:a="http://schemas.openxmlformats.org/drawingml/2006/main" noGrp="1"/>
+          </p:cNvSpPr>
+          <p:nvPr/>
+        </p:nvSpPr>
+        <p:spPr>
+          <a:xfrm xmlns:a="http://schemas.openxmlformats.org/drawingml/2006/main">
+            <a:off x="5276850" y="3867150"/>
+            <a:ext cx="2486025" cy="323850"/>
+          </a:xfrm>
+          <a:prstGeom xmlns:a="http://schemas.openxmlformats.org/drawingml/2006/main" prst="rect">
+            <a:avLst/>
+          </a:prstGeom>
+          <a:solidFill xmlns:a="http://schemas.openxmlformats.org/drawingml/2006/main">
+            <a:srgbClr val="000000">
+              <a:alpha val="0"/>
+            </a:srgbClr>
+          </a:solidFill>
+          <a:ln xmlns:a="http://schemas.openxmlformats.org/drawingml/2006/main" w="0">
+            <a:solidFill>
+              <a:srgbClr val="000000">
+                <a:alpha val="0"/>
+              </a:srgbClr>
+            </a:solidFill>
+            <a:prstDash val="solid"/>
+          </a:ln>
+        </p:spPr>
+        <p:txBody>
+          <a:bodyPr xmlns:a="http://schemas.openxmlformats.org/drawingml/2006/main" lIns="0" tIns="0" rIns="0" bIns="0" anchor="t"/>
+          <a:lstStyle xmlns:a="http://schemas.openxmlformats.org/drawingml/2006/main"/>
+          <a:p xmlns:a="http://schemas.openxmlformats.org/drawingml/2006/main">
+            <a:pPr algn="l">
+              <a:defRPr sz="975" b="0">
+                <a:solidFill>
+                  <a:srgbClr val="08111F"/>
+                </a:solidFill>
+                <a:latin typeface="Aptos"/>
+                <a:ea typeface="Aptos"/>
+                <a:cs typeface="Aptos"/>
+              </a:defRPr>
+            </a:pPr>
+            <a:r>
+              <a:rPr sz="975" b="0">
+                <a:solidFill>
+                  <a:srgbClr val="08111F"/>
+                </a:solidFill>
+                <a:latin typeface="Aptos"/>
+                <a:ea typeface="Aptos"/>
+                <a:cs typeface="Aptos"/>
+              </a:rPr>
+              <a:t>less explainable in our demo</a:t>
+            </a:r>
+          </a:p>
+        </p:txBody>
+      </p:sp>
+      <p:sp>
+        <p:nvSpPr>
+          <p:cNvPr id="35" name="">
+            <a:extLst xmlns:a="http://schemas.openxmlformats.org/drawingml/2006/main">
+              <a:ext uri="{FF2B5EF4-FFF2-40B4-BE49-F238E27FC236}">
+                <a16:creationId xmlns:a16="http://schemas.microsoft.com/office/drawing/2014/main" id="{C3A980FF-F993-4635-8718-9D12AEC36635}"/>
+              </a:ext>
+            </a:extLst>
+          </p:cNvPr>
+          <p:cNvSpPr>
+            <a:spLocks xmlns:a="http://schemas.openxmlformats.org/drawingml/2006/main" noGrp="1"/>
+          </p:cNvSpPr>
+          <p:nvPr/>
+        </p:nvSpPr>
+        <p:spPr>
+          <a:xfrm xmlns:a="http://schemas.openxmlformats.org/drawingml/2006/main">
+            <a:off x="7877175" y="3733800"/>
+            <a:ext cx="3143250" cy="590550"/>
+          </a:xfrm>
+          <a:prstGeom xmlns:a="http://schemas.openxmlformats.org/drawingml/2006/main" prst="rect">
+            <a:avLst/>
+          </a:prstGeom>
+          <a:solidFill xmlns:a="http://schemas.openxmlformats.org/drawingml/2006/main">
+            <a:srgbClr val="DDF8EA"/>
+          </a:solidFill>
+          <a:ln xmlns:a="http://schemas.openxmlformats.org/drawingml/2006/main" w="9525">
+            <a:solidFill>
+              <a:srgbClr val="B7F16A"/>
+            </a:solidFill>
+            <a:prstDash val="solid"/>
+          </a:ln>
+        </p:spPr>
+      </p:sp>
+      <p:sp>
+        <p:nvSpPr>
+          <p:cNvPr id="36" name="">
+            <a:extLst xmlns:a="http://schemas.openxmlformats.org/drawingml/2006/main">
+              <a:ext uri="{FF2B5EF4-FFF2-40B4-BE49-F238E27FC236}">
+                <a16:creationId xmlns:a16="http://schemas.microsoft.com/office/drawing/2014/main" id="{36E27D63-73BF-401B-AA8F-868BBAA77D57}"/>
+              </a:ext>
+            </a:extLst>
+          </p:cNvPr>
+          <p:cNvSpPr>
+            <a:spLocks xmlns:a="http://schemas.openxmlformats.org/drawingml/2006/main" noGrp="1"/>
+          </p:cNvSpPr>
+          <p:nvPr/>
+        </p:nvSpPr>
+        <p:spPr>
+          <a:xfrm xmlns:a="http://schemas.openxmlformats.org/drawingml/2006/main">
+            <a:off x="7991475" y="3867150"/>
+            <a:ext cx="2914650" cy="323850"/>
+          </a:xfrm>
+          <a:prstGeom xmlns:a="http://schemas.openxmlformats.org/drawingml/2006/main" prst="rect">
+            <a:avLst/>
+          </a:prstGeom>
+          <a:solidFill xmlns:a="http://schemas.openxmlformats.org/drawingml/2006/main">
+            <a:srgbClr val="000000">
+              <a:alpha val="0"/>
+            </a:srgbClr>
+          </a:solidFill>
+          <a:ln xmlns:a="http://schemas.openxmlformats.org/drawingml/2006/main" w="0">
+            <a:solidFill>
+              <a:srgbClr val="000000">
+                <a:alpha val="0"/>
+              </a:srgbClr>
+            </a:solidFill>
+            <a:prstDash val="solid"/>
+          </a:ln>
+        </p:spPr>
+        <p:txBody>
+          <a:bodyPr xmlns:a="http://schemas.openxmlformats.org/drawingml/2006/main" lIns="0" tIns="0" rIns="0" bIns="0" anchor="t"/>
+          <a:lstStyle xmlns:a="http://schemas.openxmlformats.org/drawingml/2006/main"/>
+          <a:p xmlns:a="http://schemas.openxmlformats.org/drawingml/2006/main">
+            <a:pPr algn="l">
+              <a:defRPr sz="975" b="0">
+                <a:solidFill>
+                  <a:srgbClr val="08111F"/>
+                </a:solidFill>
+                <a:latin typeface="Aptos"/>
+                <a:ea typeface="Aptos"/>
+                <a:cs typeface="Aptos"/>
+              </a:defRPr>
+            </a:pPr>
+            <a:r>
+              <a:rPr sz="975" b="0">
+                <a:solidFill>
+                  <a:srgbClr val="08111F"/>
+                </a:solidFill>
+                <a:latin typeface="Aptos"/>
+                <a:ea typeface="Aptos"/>
+                <a:cs typeface="Aptos"/>
+              </a:rPr>
+              <a:t>logs confidence, risk, and reason</a:t>
+            </a:r>
+          </a:p>
+        </p:txBody>
+      </p:sp>
+      <p:sp>
+        <p:nvSpPr>
+          <p:cNvPr id="37" name="">
+            <a:extLst xmlns:a="http://schemas.openxmlformats.org/drawingml/2006/main">
+              <a:ext uri="{FF2B5EF4-FFF2-40B4-BE49-F238E27FC236}">
+                <a16:creationId xmlns:a16="http://schemas.microsoft.com/office/drawing/2014/main" id="{2FC76F07-340F-43F4-A198-83972F9A36EF}"/>
+              </a:ext>
+            </a:extLst>
+          </p:cNvPr>
+          <p:cNvSpPr>
+            <a:spLocks xmlns:a="http://schemas.openxmlformats.org/drawingml/2006/main" noGrp="1"/>
+          </p:cNvSpPr>
+          <p:nvPr/>
+        </p:nvSpPr>
+        <p:spPr>
+          <a:xfrm xmlns:a="http://schemas.openxmlformats.org/drawingml/2006/main">
+            <a:off x="590550" y="4324350"/>
+            <a:ext cx="2095500" cy="590550"/>
+          </a:xfrm>
+          <a:prstGeom xmlns:a="http://schemas.openxmlformats.org/drawingml/2006/main" prst="rect">
+            <a:avLst/>
+          </a:prstGeom>
+          <a:solidFill xmlns:a="http://schemas.openxmlformats.org/drawingml/2006/main">
+            <a:srgbClr val="FFFFFF"/>
+          </a:solidFill>
+          <a:ln xmlns:a="http://schemas.openxmlformats.org/drawingml/2006/main" w="9525">
+            <a:solidFill>
+              <a:srgbClr val="D2D8DE"/>
+            </a:solidFill>
+            <a:prstDash val="solid"/>
+          </a:ln>
+        </p:spPr>
+      </p:sp>
+      <p:sp>
+        <p:nvSpPr>
+          <p:cNvPr id="38" name="">
+            <a:extLst xmlns:a="http://schemas.openxmlformats.org/drawingml/2006/main">
+              <a:ext uri="{FF2B5EF4-FFF2-40B4-BE49-F238E27FC236}">
+                <a16:creationId xmlns:a16="http://schemas.microsoft.com/office/drawing/2014/main" id="{C735B643-28B7-4F8F-964A-6AC1170049EB}"/>
+              </a:ext>
+            </a:extLst>
+          </p:cNvPr>
+          <p:cNvSpPr>
+            <a:spLocks xmlns:a="http://schemas.openxmlformats.org/drawingml/2006/main" noGrp="1"/>
+          </p:cNvSpPr>
+          <p:nvPr/>
+        </p:nvSpPr>
+        <p:spPr>
+          <a:xfrm xmlns:a="http://schemas.openxmlformats.org/drawingml/2006/main">
+            <a:off x="704850" y="4457700"/>
+            <a:ext cx="1866900" cy="323850"/>
+          </a:xfrm>
+          <a:prstGeom xmlns:a="http://schemas.openxmlformats.org/drawingml/2006/main" prst="rect">
+            <a:avLst/>
+          </a:prstGeom>
+          <a:solidFill xmlns:a="http://schemas.openxmlformats.org/drawingml/2006/main">
+            <a:srgbClr val="000000">
+              <a:alpha val="0"/>
+            </a:srgbClr>
+          </a:solidFill>
+          <a:ln xmlns:a="http://schemas.openxmlformats.org/drawingml/2006/main" w="0">
+            <a:solidFill>
+              <a:srgbClr val="000000">
+                <a:alpha val="0"/>
+              </a:srgbClr>
+            </a:solidFill>
+            <a:prstDash val="solid"/>
+          </a:ln>
+        </p:spPr>
+        <p:txBody>
+          <a:bodyPr xmlns:a="http://schemas.openxmlformats.org/drawingml/2006/main" lIns="0" tIns="0" rIns="0" bIns="0" anchor="t"/>
+          <a:lstStyle xmlns:a="http://schemas.openxmlformats.org/drawingml/2006/main"/>
+          <a:p xmlns:a="http://schemas.openxmlformats.org/drawingml/2006/main">
+            <a:pPr algn="l">
+              <a:defRPr sz="1125" b="1">
+                <a:solidFill>
+                  <a:srgbClr val="08111F"/>
+                </a:solidFill>
+                <a:latin typeface="Aptos"/>
+                <a:ea typeface="Aptos"/>
+                <a:cs typeface="Aptos"/>
+              </a:defRPr>
+            </a:pPr>
+            <a:r>
+              <a:rPr sz="1125" b="1">
+                <a:solidFill>
+                  <a:srgbClr val="08111F"/>
+                </a:solidFill>
+                <a:latin typeface="Aptos"/>
+                <a:ea typeface="Aptos"/>
+                <a:cs typeface="Aptos"/>
+              </a:rPr>
+              <a:t>Plain ML classifier</a:t>
+            </a:r>
+          </a:p>
+        </p:txBody>
+      </p:sp>
+      <p:sp>
+        <p:nvSpPr>
+          <p:cNvPr id="39" name="">
+            <a:extLst xmlns:a="http://schemas.openxmlformats.org/drawingml/2006/main">
+              <a:ext uri="{FF2B5EF4-FFF2-40B4-BE49-F238E27FC236}">
+                <a16:creationId xmlns:a16="http://schemas.microsoft.com/office/drawing/2014/main" id="{9E008C43-F712-407E-B737-67EA3C585C1A}"/>
+              </a:ext>
+            </a:extLst>
+          </p:cNvPr>
+          <p:cNvSpPr>
+            <a:spLocks xmlns:a="http://schemas.openxmlformats.org/drawingml/2006/main" noGrp="1"/>
+          </p:cNvSpPr>
+          <p:nvPr/>
+        </p:nvSpPr>
+        <p:spPr>
+          <a:xfrm xmlns:a="http://schemas.openxmlformats.org/drawingml/2006/main">
+            <a:off x="2686050" y="4324350"/>
+            <a:ext cx="2476500" cy="590550"/>
+          </a:xfrm>
+          <a:prstGeom xmlns:a="http://schemas.openxmlformats.org/drawingml/2006/main" prst="rect">
+            <a:avLst/>
+          </a:prstGeom>
+          <a:solidFill xmlns:a="http://schemas.openxmlformats.org/drawingml/2006/main">
+            <a:srgbClr val="FFFFFF"/>
+          </a:solidFill>
+          <a:ln xmlns:a="http://schemas.openxmlformats.org/drawingml/2006/main" w="9525">
+            <a:solidFill>
+              <a:srgbClr val="D2D8DE"/>
+            </a:solidFill>
+            <a:prstDash val="solid"/>
+          </a:ln>
+        </p:spPr>
+      </p:sp>
+      <p:sp>
+        <p:nvSpPr>
+          <p:cNvPr id="40" name="">
+            <a:extLst xmlns:a="http://schemas.openxmlformats.org/drawingml/2006/main">
+              <a:ext uri="{FF2B5EF4-FFF2-40B4-BE49-F238E27FC236}">
+                <a16:creationId xmlns:a16="http://schemas.microsoft.com/office/drawing/2014/main" id="{ED597B8A-86E9-44A2-97FB-5CD7B49A6339}"/>
+              </a:ext>
+            </a:extLst>
+          </p:cNvPr>
+          <p:cNvSpPr>
+            <a:spLocks xmlns:a="http://schemas.openxmlformats.org/drawingml/2006/main" noGrp="1"/>
+          </p:cNvSpPr>
+          <p:nvPr/>
+        </p:nvSpPr>
+        <p:spPr>
+          <a:xfrm xmlns:a="http://schemas.openxmlformats.org/drawingml/2006/main">
+            <a:off x="2800350" y="4457700"/>
+            <a:ext cx="2247900" cy="323850"/>
+          </a:xfrm>
+          <a:prstGeom xmlns:a="http://schemas.openxmlformats.org/drawingml/2006/main" prst="rect">
+            <a:avLst/>
+          </a:prstGeom>
+          <a:solidFill xmlns:a="http://schemas.openxmlformats.org/drawingml/2006/main">
+            <a:srgbClr val="000000">
+              <a:alpha val="0"/>
+            </a:srgbClr>
+          </a:solidFill>
+          <a:ln xmlns:a="http://schemas.openxmlformats.org/drawingml/2006/main" w="0">
+            <a:solidFill>
+              <a:srgbClr val="000000">
+                <a:alpha val="0"/>
+              </a:srgbClr>
+            </a:solidFill>
+            <a:prstDash val="solid"/>
+          </a:ln>
+        </p:spPr>
+        <p:txBody>
+          <a:bodyPr xmlns:a="http://schemas.openxmlformats.org/drawingml/2006/main" lIns="0" tIns="0" rIns="0" bIns="0" anchor="t"/>
+          <a:lstStyle xmlns:a="http://schemas.openxmlformats.org/drawingml/2006/main"/>
+          <a:p xmlns:a="http://schemas.openxmlformats.org/drawingml/2006/main">
+            <a:pPr algn="l">
+              <a:defRPr sz="975" b="0">
+                <a:solidFill>
+                  <a:srgbClr val="08111F"/>
+                </a:solidFill>
+                <a:latin typeface="Aptos"/>
+                <a:ea typeface="Aptos"/>
+                <a:cs typeface="Aptos"/>
+              </a:defRPr>
+            </a:pPr>
+            <a:r>
+              <a:rPr sz="975" b="0">
+                <a:solidFill>
+                  <a:srgbClr val="08111F"/>
+                </a:solidFill>
+                <a:latin typeface="Aptos"/>
+                <a:ea typeface="Aptos"/>
+                <a:cs typeface="Aptos"/>
+              </a:rPr>
+              <a:t>model output only</a:t>
+            </a:r>
+          </a:p>
+        </p:txBody>
+      </p:sp>
+      <p:sp>
+        <p:nvSpPr>
+          <p:cNvPr id="41" name="">
+            <a:extLst xmlns:a="http://schemas.openxmlformats.org/drawingml/2006/main">
+              <a:ext uri="{FF2B5EF4-FFF2-40B4-BE49-F238E27FC236}">
+                <a16:creationId xmlns:a16="http://schemas.microsoft.com/office/drawing/2014/main" id="{D4EEAD20-552F-4CF6-98DE-A2C3D2351888}"/>
+              </a:ext>
+            </a:extLst>
+          </p:cNvPr>
+          <p:cNvSpPr>
+            <a:spLocks xmlns:a="http://schemas.openxmlformats.org/drawingml/2006/main" noGrp="1"/>
+          </p:cNvSpPr>
+          <p:nvPr/>
+        </p:nvSpPr>
+        <p:spPr>
+          <a:xfrm xmlns:a="http://schemas.openxmlformats.org/drawingml/2006/main">
+            <a:off x="5162550" y="4324350"/>
+            <a:ext cx="2714625" cy="590550"/>
+          </a:xfrm>
+          <a:prstGeom xmlns:a="http://schemas.openxmlformats.org/drawingml/2006/main" prst="rect">
+            <a:avLst/>
+          </a:prstGeom>
+          <a:solidFill xmlns:a="http://schemas.openxmlformats.org/drawingml/2006/main">
+            <a:srgbClr val="FFFFFF"/>
+          </a:solidFill>
+          <a:ln xmlns:a="http://schemas.openxmlformats.org/drawingml/2006/main" w="9525">
+            <a:solidFill>
+              <a:srgbClr val="D2D8DE"/>
+            </a:solidFill>
+            <a:prstDash val="solid"/>
+          </a:ln>
+        </p:spPr>
+      </p:sp>
+      <p:sp>
+        <p:nvSpPr>
+          <p:cNvPr id="42" name="">
+            <a:extLst xmlns:a="http://schemas.openxmlformats.org/drawingml/2006/main">
+              <a:ext uri="{FF2B5EF4-FFF2-40B4-BE49-F238E27FC236}">
+                <a16:creationId xmlns:a16="http://schemas.microsoft.com/office/drawing/2014/main" id="{0DC78E12-FC6A-44E8-B581-B5304D482647}"/>
+              </a:ext>
+            </a:extLst>
+          </p:cNvPr>
+          <p:cNvSpPr>
+            <a:spLocks xmlns:a="http://schemas.openxmlformats.org/drawingml/2006/main" noGrp="1"/>
+          </p:cNvSpPr>
+          <p:nvPr/>
+        </p:nvSpPr>
+        <p:spPr>
+          <a:xfrm xmlns:a="http://schemas.openxmlformats.org/drawingml/2006/main">
+            <a:off x="5276850" y="4457700"/>
+            <a:ext cx="2486025" cy="323850"/>
+          </a:xfrm>
+          <a:prstGeom xmlns:a="http://schemas.openxmlformats.org/drawingml/2006/main" prst="rect">
+            <a:avLst/>
+          </a:prstGeom>
+          <a:solidFill xmlns:a="http://schemas.openxmlformats.org/drawingml/2006/main">
+            <a:srgbClr val="000000">
+              <a:alpha val="0"/>
+            </a:srgbClr>
+          </a:solidFill>
+          <a:ln xmlns:a="http://schemas.openxmlformats.org/drawingml/2006/main" w="0">
+            <a:solidFill>
+              <a:srgbClr val="000000">
+                <a:alpha val="0"/>
+              </a:srgbClr>
+            </a:solidFill>
+            <a:prstDash val="solid"/>
+          </a:ln>
+        </p:spPr>
+        <p:txBody>
+          <a:bodyPr xmlns:a="http://schemas.openxmlformats.org/drawingml/2006/main" lIns="0" tIns="0" rIns="0" bIns="0" anchor="t"/>
+          <a:lstStyle xmlns:a="http://schemas.openxmlformats.org/drawingml/2006/main"/>
+          <a:p xmlns:a="http://schemas.openxmlformats.org/drawingml/2006/main">
+            <a:pPr algn="l">
+              <a:defRPr sz="975" b="0">
+                <a:solidFill>
+                  <a:srgbClr val="08111F"/>
+                </a:solidFill>
+                <a:latin typeface="Aptos"/>
+                <a:ea typeface="Aptos"/>
+                <a:cs typeface="Aptos"/>
+              </a:defRPr>
+            </a:pPr>
+            <a:r>
+              <a:rPr sz="975" b="0">
+                <a:solidFill>
+                  <a:srgbClr val="08111F"/>
+                </a:solidFill>
+                <a:latin typeface="Aptos"/>
+                <a:ea typeface="Aptos"/>
+                <a:cs typeface="Aptos"/>
+              </a:rPr>
+              <a:t>optimistic predictions can be unsafe</a:t>
+            </a:r>
+          </a:p>
+        </p:txBody>
+      </p:sp>
+      <p:sp>
+        <p:nvSpPr>
+          <p:cNvPr id="43" name="">
+            <a:extLst xmlns:a="http://schemas.openxmlformats.org/drawingml/2006/main">
+              <a:ext uri="{FF2B5EF4-FFF2-40B4-BE49-F238E27FC236}">
+                <a16:creationId xmlns:a16="http://schemas.microsoft.com/office/drawing/2014/main" id="{6BCB5CB5-7C30-4271-99A8-27E4C0381EFB}"/>
+              </a:ext>
+            </a:extLst>
+          </p:cNvPr>
+          <p:cNvSpPr>
+            <a:spLocks xmlns:a="http://schemas.openxmlformats.org/drawingml/2006/main" noGrp="1"/>
+          </p:cNvSpPr>
+          <p:nvPr/>
+        </p:nvSpPr>
+        <p:spPr>
+          <a:xfrm xmlns:a="http://schemas.openxmlformats.org/drawingml/2006/main">
+            <a:off x="7877175" y="4324350"/>
+            <a:ext cx="3143250" cy="590550"/>
+          </a:xfrm>
+          <a:prstGeom xmlns:a="http://schemas.openxmlformats.org/drawingml/2006/main" prst="rect">
+            <a:avLst/>
+          </a:prstGeom>
+          <a:solidFill xmlns:a="http://schemas.openxmlformats.org/drawingml/2006/main">
+            <a:srgbClr val="DDF8EA"/>
+          </a:solidFill>
+          <a:ln xmlns:a="http://schemas.openxmlformats.org/drawingml/2006/main" w="9525">
+            <a:solidFill>
+              <a:srgbClr val="B7F16A"/>
+            </a:solidFill>
+            <a:prstDash val="solid"/>
+          </a:ln>
+        </p:spPr>
+      </p:sp>
+      <p:sp>
+        <p:nvSpPr>
+          <p:cNvPr id="44" name="">
+            <a:extLst xmlns:a="http://schemas.openxmlformats.org/drawingml/2006/main">
+              <a:ext uri="{FF2B5EF4-FFF2-40B4-BE49-F238E27FC236}">
+                <a16:creationId xmlns:a16="http://schemas.microsoft.com/office/drawing/2014/main" id="{9129F025-58FA-4C52-BACA-8F5974B0B143}"/>
+              </a:ext>
+            </a:extLst>
+          </p:cNvPr>
+          <p:cNvSpPr>
+            <a:spLocks xmlns:a="http://schemas.openxmlformats.org/drawingml/2006/main" noGrp="1"/>
+          </p:cNvSpPr>
+          <p:nvPr/>
+        </p:nvSpPr>
+        <p:spPr>
+          <a:xfrm xmlns:a="http://schemas.openxmlformats.org/drawingml/2006/main">
+            <a:off x="7991475" y="4457700"/>
+            <a:ext cx="2914650" cy="323850"/>
+          </a:xfrm>
+          <a:prstGeom xmlns:a="http://schemas.openxmlformats.org/drawingml/2006/main" prst="rect">
+            <a:avLst/>
+          </a:prstGeom>
+          <a:solidFill xmlns:a="http://schemas.openxmlformats.org/drawingml/2006/main">
+            <a:srgbClr val="000000">
+              <a:alpha val="0"/>
+            </a:srgbClr>
+          </a:solidFill>
+          <a:ln xmlns:a="http://schemas.openxmlformats.org/drawingml/2006/main" w="0">
+            <a:solidFill>
+              <a:srgbClr val="000000">
+                <a:alpha val="0"/>
+              </a:srgbClr>
+            </a:solidFill>
+            <a:prstDash val="solid"/>
+          </a:ln>
+        </p:spPr>
+        <p:txBody>
+          <a:bodyPr xmlns:a="http://schemas.openxmlformats.org/drawingml/2006/main" lIns="0" tIns="0" rIns="0" bIns="0" anchor="t"/>
+          <a:lstStyle xmlns:a="http://schemas.openxmlformats.org/drawingml/2006/main"/>
+          <a:p xmlns:a="http://schemas.openxmlformats.org/drawingml/2006/main">
+            <a:pPr algn="l">
+              <a:defRPr sz="975" b="0">
+                <a:solidFill>
+                  <a:srgbClr val="08111F"/>
+                </a:solidFill>
+                <a:latin typeface="Aptos"/>
+                <a:ea typeface="Aptos"/>
+                <a:cs typeface="Aptos"/>
+              </a:defRPr>
+            </a:pPr>
+            <a:r>
+              <a:rPr sz="975" b="0">
+                <a:solidFill>
+                  <a:srgbClr val="08111F"/>
+                </a:solidFill>
+                <a:latin typeface="Aptos"/>
+                <a:ea typeface="Aptos"/>
+                <a:cs typeface="Aptos"/>
+              </a:rPr>
+              <a:t>guard holds/downshifts when risk is high</a:t>
+            </a:r>
+          </a:p>
+        </p:txBody>
+      </p:sp>
+      <p:sp>
+        <p:nvSpPr>
+          <p:cNvPr id="45" name="">
+            <a:extLst xmlns:a="http://schemas.openxmlformats.org/drawingml/2006/main">
+              <a:ext uri="{FF2B5EF4-FFF2-40B4-BE49-F238E27FC236}">
+                <a16:creationId xmlns:a16="http://schemas.microsoft.com/office/drawing/2014/main" id="{BEDBD9C5-B702-4ED0-B52F-163CDBC4F527}"/>
+              </a:ext>
+            </a:extLst>
+          </p:cNvPr>
+          <p:cNvSpPr>
+            <a:spLocks xmlns:a="http://schemas.openxmlformats.org/drawingml/2006/main" noGrp="1"/>
+          </p:cNvSpPr>
+          <p:nvPr/>
+        </p:nvSpPr>
+        <p:spPr>
+          <a:xfrm xmlns:a="http://schemas.openxmlformats.org/drawingml/2006/main">
+            <a:off x="895350" y="5010150"/>
+            <a:ext cx="9620250" cy="704850"/>
+          </a:xfrm>
+          <a:prstGeom xmlns:a="http://schemas.openxmlformats.org/drawingml/2006/main" prst="rect">
+            <a:avLst/>
+          </a:prstGeom>
+          <a:solidFill xmlns:a="http://schemas.openxmlformats.org/drawingml/2006/main">
+            <a:srgbClr val="102236"/>
+          </a:solidFill>
+          <a:ln xmlns:a="http://schemas.openxmlformats.org/drawingml/2006/main" w="9525">
+            <a:solidFill>
+              <a:srgbClr val="FF6B5F"/>
+            </a:solidFill>
+            <a:prstDash val="solid"/>
+          </a:ln>
+        </p:spPr>
+      </p:sp>
+      <p:sp>
+        <p:nvSpPr>
+          <p:cNvPr id="46" name="">
+            <a:extLst xmlns:a="http://schemas.openxmlformats.org/drawingml/2006/main">
+              <a:ext uri="{FF2B5EF4-FFF2-40B4-BE49-F238E27FC236}">
+                <a16:creationId xmlns:a16="http://schemas.microsoft.com/office/drawing/2014/main" id="{17D3F425-4444-4F99-95AA-EC128D423088}"/>
+              </a:ext>
+            </a:extLst>
+          </p:cNvPr>
+          <p:cNvSpPr>
+            <a:spLocks xmlns:a="http://schemas.openxmlformats.org/drawingml/2006/main" noGrp="1"/>
+          </p:cNvSpPr>
+          <p:nvPr/>
+        </p:nvSpPr>
+        <p:spPr>
+          <a:xfrm xmlns:a="http://schemas.openxmlformats.org/drawingml/2006/main">
+            <a:off x="1181100" y="5219700"/>
+            <a:ext cx="1714500" cy="228600"/>
+          </a:xfrm>
+          <a:prstGeom xmlns:a="http://schemas.openxmlformats.org/drawingml/2006/main" prst="rect">
+            <a:avLst/>
+          </a:prstGeom>
+          <a:solidFill xmlns:a="http://schemas.openxmlformats.org/drawingml/2006/main">
+            <a:srgbClr val="000000">
+              <a:alpha val="0"/>
+            </a:srgbClr>
+          </a:solidFill>
+          <a:ln xmlns:a="http://schemas.openxmlformats.org/drawingml/2006/main" w="0">
+            <a:solidFill>
+              <a:srgbClr val="000000">
+                <a:alpha val="0"/>
+              </a:srgbClr>
+            </a:solidFill>
+            <a:prstDash val="solid"/>
+          </a:ln>
+        </p:spPr>
+        <p:txBody>
+          <a:bodyPr xmlns:a="http://schemas.openxmlformats.org/drawingml/2006/main" lIns="0" tIns="0" rIns="0" bIns="0" anchor="t"/>
+          <a:lstStyle xmlns:a="http://schemas.openxmlformats.org/drawingml/2006/main"/>
+          <a:p xmlns:a="http://schemas.openxmlformats.org/drawingml/2006/main">
+            <a:pPr algn="l">
+              <a:defRPr sz="1500" b="1">
+                <a:solidFill>
+                  <a:srgbClr val="FF6B5F"/>
+                </a:solidFill>
+                <a:latin typeface="Aptos Display"/>
+                <a:ea typeface="Aptos Display"/>
+                <a:cs typeface="Aptos Display"/>
+              </a:defRPr>
+            </a:pPr>
+            <a:r>
+              <a:rPr sz="1500" b="1">
+                <a:solidFill>
+                  <a:srgbClr val="FF6B5F"/>
+                </a:solidFill>
+                <a:latin typeface="Aptos Display"/>
+                <a:ea typeface="Aptos Display"/>
+                <a:cs typeface="Aptos Display"/>
+              </a:rPr>
+              <a:t>Novel methodology</a:t>
+            </a:r>
+          </a:p>
+        </p:txBody>
+      </p:sp>
+      <p:sp>
+        <p:nvSpPr>
+          <p:cNvPr id="47" name="">
+            <a:extLst xmlns:a="http://schemas.openxmlformats.org/drawingml/2006/main">
+              <a:ext uri="{FF2B5EF4-FFF2-40B4-BE49-F238E27FC236}">
+                <a16:creationId xmlns:a16="http://schemas.microsoft.com/office/drawing/2014/main" id="{058AFFD7-1321-4CE3-926A-FDDAF4C68F99}"/>
+              </a:ext>
+            </a:extLst>
+          </p:cNvPr>
+          <p:cNvSpPr>
+            <a:spLocks xmlns:a="http://schemas.openxmlformats.org/drawingml/2006/main" noGrp="1"/>
+          </p:cNvSpPr>
+          <p:nvPr/>
+        </p:nvSpPr>
+        <p:spPr>
+          <a:xfrm xmlns:a="http://schemas.openxmlformats.org/drawingml/2006/main">
+            <a:off x="3143250" y="5162550"/>
+            <a:ext cx="6858000" cy="361950"/>
+          </a:xfrm>
+          <a:prstGeom xmlns:a="http://schemas.openxmlformats.org/drawingml/2006/main" prst="rect">
+            <a:avLst/>
+          </a:prstGeom>
+          <a:solidFill xmlns:a="http://schemas.openxmlformats.org/drawingml/2006/main">
+            <a:srgbClr val="000000">
+              <a:alpha val="0"/>
+            </a:srgbClr>
+          </a:solidFill>
+          <a:ln xmlns:a="http://schemas.openxmlformats.org/drawingml/2006/main" w="0">
+            <a:solidFill>
+              <a:srgbClr val="000000">
+                <a:alpha val="0"/>
+              </a:srgbClr>
+            </a:solidFill>
+            <a:prstDash val="solid"/>
+          </a:ln>
+        </p:spPr>
+        <p:txBody>
+          <a:bodyPr xmlns:a="http://schemas.openxmlformats.org/drawingml/2006/main" lIns="0" tIns="0" rIns="0" bIns="0" anchor="t"/>
+          <a:lstStyle xmlns:a="http://schemas.openxmlformats.org/drawingml/2006/main"/>
+          <a:p xmlns:a="http://schemas.openxmlformats.org/drawingml/2006/main">
+            <a:pPr algn="l">
+              <a:defRPr sz="1200" b="0">
+                <a:solidFill>
+                  <a:srgbClr val="F6F2EA"/>
+                </a:solidFill>
+                <a:latin typeface="Aptos"/>
+                <a:ea typeface="Aptos"/>
+                <a:cs typeface="Aptos"/>
+              </a:defRPr>
+            </a:pPr>
+            <a:r>
+              <a:rPr sz="1200" b="0">
+                <a:solidFill>
+                  <a:srgbClr val="F6F2EA"/>
+                </a:solidFill>
+                <a:latin typeface="Aptos"/>
+                <a:ea typeface="Aptos"/>
+                <a:cs typeface="Aptos"/>
+              </a:rPr>
+              <a:t>Random Forest predicts quality; QoS-Risk Guard computes a 0-1 risk score from low buffer, throughput drop, high RTT, packet loss, and jitter, then caps unsafe upgrades or triggers downshift.</a:t>
+            </a:r>
+          </a:p>
+        </p:txBody>
+      </p:sp>
+      <p:sp>
+        <p:nvSpPr>
+          <p:cNvPr id="48" name="">
+            <a:extLst xmlns:a="http://schemas.openxmlformats.org/drawingml/2006/main">
+              <a:ext uri="{FF2B5EF4-FFF2-40B4-BE49-F238E27FC236}">
+                <a16:creationId xmlns:a16="http://schemas.microsoft.com/office/drawing/2014/main" id="{796434A4-0498-431B-8BB5-03932534C670}"/>
+              </a:ext>
+            </a:extLst>
+          </p:cNvPr>
+          <p:cNvSpPr>
+            <a:spLocks xmlns:a="http://schemas.openxmlformats.org/drawingml/2006/main" noGrp="1"/>
+          </p:cNvSpPr>
+          <p:nvPr/>
+        </p:nvSpPr>
+        <p:spPr>
+          <a:xfrm xmlns:a="http://schemas.openxmlformats.org/drawingml/2006/main">
+            <a:off x="514350" y="6438900"/>
+            <a:ext cx="7239000" cy="190500"/>
+          </a:xfrm>
+          <a:prstGeom xmlns:a="http://schemas.openxmlformats.org/drawingml/2006/main" prst="rect">
+            <a:avLst/>
+          </a:prstGeom>
+          <a:solidFill xmlns:a="http://schemas.openxmlformats.org/drawingml/2006/main">
+            <a:srgbClr val="000000">
+              <a:alpha val="0"/>
+            </a:srgbClr>
+          </a:solidFill>
+          <a:ln xmlns:a="http://schemas.openxmlformats.org/drawingml/2006/main" w="0">
+            <a:solidFill>
+              <a:srgbClr val="000000">
+                <a:alpha val="0"/>
+              </a:srgbClr>
+            </a:solidFill>
+            <a:prstDash val="solid"/>
+          </a:ln>
+        </p:spPr>
+        <p:txBody>
+          <a:bodyPr xmlns:a="http://schemas.openxmlformats.org/drawingml/2006/main" lIns="0" tIns="0" rIns="0" bIns="0" anchor="t"/>
+          <a:lstStyle xmlns:a="http://schemas.openxmlformats.org/drawingml/2006/main"/>
+          <a:p xmlns:a="http://schemas.openxmlformats.org/drawingml/2006/main">
+            <a:pPr algn="l">
+              <a:defRPr sz="750" b="0">
+                <a:solidFill>
+                  <a:srgbClr val="8EA3B8"/>
+                </a:solidFill>
+                <a:latin typeface="Aptos"/>
+                <a:ea typeface="Aptos"/>
+                <a:cs typeface="Aptos"/>
+              </a:defRPr>
+            </a:pPr>
+            <a:r>
+              <a:rPr sz="750" b="0">
+                <a:solidFill>
+                  <a:srgbClr val="8EA3B8"/>
+                </a:solidFill>
+                <a:latin typeface="Aptos"/>
+                <a:ea typeface="Aptos"/>
+                <a:cs typeface="Aptos"/>
+              </a:rPr>
+              <a:t>Source: updated ai_model.py PredictionResult risk_score and protection_action</a:t>
+            </a:r>
+          </a:p>
+        </p:txBody>
+      </p:sp>
+      <p:sp>
+        <p:nvSpPr>
+          <p:cNvPr id="49" name="">
+            <a:extLst xmlns:a="http://schemas.openxmlformats.org/drawingml/2006/main">
+              <a:ext uri="{FF2B5EF4-FFF2-40B4-BE49-F238E27FC236}">
+                <a16:creationId xmlns:a16="http://schemas.microsoft.com/office/drawing/2014/main" id="{A34C3D90-06DA-4387-ACC0-B46103FA2A5C}"/>
+              </a:ext>
+            </a:extLst>
+          </p:cNvPr>
+          <p:cNvSpPr>
+            <a:spLocks xmlns:a="http://schemas.openxmlformats.org/drawingml/2006/main" noGrp="1"/>
+          </p:cNvSpPr>
+          <p:nvPr/>
+        </p:nvSpPr>
+        <p:spPr>
+          <a:xfrm xmlns:a="http://schemas.openxmlformats.org/drawingml/2006/main">
+            <a:off x="11163300" y="6438900"/>
+            <a:ext cx="514350" cy="190500"/>
+          </a:xfrm>
+          <a:prstGeom xmlns:a="http://schemas.openxmlformats.org/drawingml/2006/main" prst="rect">
+            <a:avLst/>
+          </a:prstGeom>
+          <a:solidFill xmlns:a="http://schemas.openxmlformats.org/drawingml/2006/main">
+            <a:srgbClr val="000000">
+              <a:alpha val="0"/>
+            </a:srgbClr>
+          </a:solidFill>
+          <a:ln xmlns:a="http://schemas.openxmlformats.org/drawingml/2006/main" w="0">
+            <a:solidFill>
+              <a:srgbClr val="000000">
+                <a:alpha val="0"/>
+              </a:srgbClr>
+            </a:solidFill>
+            <a:prstDash val="solid"/>
+          </a:ln>
+        </p:spPr>
+        <p:txBody>
+          <a:bodyPr xmlns:a="http://schemas.openxmlformats.org/drawingml/2006/main" lIns="0" tIns="0" rIns="0" bIns="0" anchor="t"/>
+          <a:lstStyle xmlns:a="http://schemas.openxmlformats.org/drawingml/2006/main"/>
+          <a:p xmlns:a="http://schemas.openxmlformats.org/drawingml/2006/main">
+            <a:pPr algn="r">
+              <a:defRPr sz="825" b="0">
+                <a:solidFill>
+                  <a:srgbClr val="8EA3B8"/>
+                </a:solidFill>
+                <a:latin typeface="Aptos Mono"/>
+                <a:ea typeface="Aptos Mono"/>
+                <a:cs typeface="Aptos Mono"/>
+              </a:defRPr>
+            </a:pPr>
+            <a:r>
+              <a:rPr sz="825" b="0">
+                <a:solidFill>
+                  <a:srgbClr val="8EA3B8"/>
+                </a:solidFill>
+                <a:latin typeface="Aptos Mono"/>
+                <a:ea typeface="Aptos Mono"/>
+                <a:cs typeface="Aptos Mono"/>
+              </a:rPr>
+              <a:t>10</a:t>
+            </a:r>
+          </a:p>
+        </p:txBody>
+      </p:sp>
+    </p:spTree>
+    <p:extLst>
+      <p:ext uri="{BB962C8B-B14F-4D97-AF65-F5344CB8AC3E}">
+        <p14:creationId xmlns:p14="http://schemas.microsoft.com/office/powerpoint/2010/main" val="1600260367"/>
       </p:ext>
     </p:extLst>
   </p:cSld>
@@ -2867,7 +5383,7 @@
           <p:cNvPr id="1" name="">
             <a:extLst xmlns:a="http://schemas.openxmlformats.org/drawingml/2006/main">
               <a:ext uri="{FF2B5EF4-FFF2-40B4-BE49-F238E27FC236}">
-                <a16:creationId xmlns:a16="http://schemas.microsoft.com/office/drawing/2014/main" id="{69350F48-D09A-4062-844A-436D62E31ADD}"/>
+                <a16:creationId xmlns:a16="http://schemas.microsoft.com/office/drawing/2014/main" id="{FCF6FA3B-0C1B-4FA9-B8E8-571E726532D6}"/>
               </a:ext>
             </a:extLst>
           </p:cNvPr>
@@ -2902,7 +5418,7 @@
           <p:cNvPr id="2" name="kicker-marker">
             <a:extLst xmlns:a="http://schemas.openxmlformats.org/drawingml/2006/main">
               <a:ext uri="{FF2B5EF4-FFF2-40B4-BE49-F238E27FC236}">
-                <a16:creationId xmlns:a16="http://schemas.microsoft.com/office/drawing/2014/main" id="{36C5A0A7-178A-44F6-ABAC-A12D555C089E}"/>
+                <a16:creationId xmlns:a16="http://schemas.microsoft.com/office/drawing/2014/main" id="{7F276DF3-C067-481E-BAC6-911285B1157A}"/>
               </a:ext>
             </a:extLst>
           </p:cNvPr>
@@ -2937,7 +5453,7 @@
           <p:cNvPr id="3" name="kicker-label">
             <a:extLst xmlns:a="http://schemas.openxmlformats.org/drawingml/2006/main">
               <a:ext uri="{FF2B5EF4-FFF2-40B4-BE49-F238E27FC236}">
-                <a16:creationId xmlns:a16="http://schemas.microsoft.com/office/drawing/2014/main" id="{A9E335D0-5143-4DF4-B1EA-F50B05A57ABF}"/>
+                <a16:creationId xmlns:a16="http://schemas.microsoft.com/office/drawing/2014/main" id="{0BBB830E-0D8F-4832-AFA2-AFC9EC01A60F}"/>
               </a:ext>
             </a:extLst>
           </p:cNvPr>
@@ -3001,7 +5517,7 @@
           <p:cNvPr id="4" name="">
             <a:extLst xmlns:a="http://schemas.openxmlformats.org/drawingml/2006/main">
               <a:ext uri="{FF2B5EF4-FFF2-40B4-BE49-F238E27FC236}">
-                <a16:creationId xmlns:a16="http://schemas.microsoft.com/office/drawing/2014/main" id="{5AA28B0F-018E-4F74-BC9D-81CCE1D28385}"/>
+                <a16:creationId xmlns:a16="http://schemas.microsoft.com/office/drawing/2014/main" id="{44647467-073E-4496-8D5F-F394E3EEE1EB}"/>
               </a:ext>
             </a:extLst>
           </p:cNvPr>
@@ -3065,7 +5581,7 @@
           <p:cNvPr id="5" name="">
             <a:extLst xmlns:a="http://schemas.openxmlformats.org/drawingml/2006/main">
               <a:ext uri="{FF2B5EF4-FFF2-40B4-BE49-F238E27FC236}">
-                <a16:creationId xmlns:a16="http://schemas.microsoft.com/office/drawing/2014/main" id="{3BD93DAA-9FFA-490E-913A-2EAAB1A84254}"/>
+                <a16:creationId xmlns:a16="http://schemas.microsoft.com/office/drawing/2014/main" id="{581CCF0C-5C48-46D0-96D0-2C104663AF45}"/>
               </a:ext>
             </a:extLst>
           </p:cNvPr>
@@ -3129,7 +5645,7 @@
           <p:cNvPr id="6" name="">
             <a:extLst xmlns:a="http://schemas.openxmlformats.org/drawingml/2006/main">
               <a:ext uri="{FF2B5EF4-FFF2-40B4-BE49-F238E27FC236}">
-                <a16:creationId xmlns:a16="http://schemas.microsoft.com/office/drawing/2014/main" id="{F875AF7B-D12D-412B-BB2B-027095A7389F}"/>
+                <a16:creationId xmlns:a16="http://schemas.microsoft.com/office/drawing/2014/main" id="{6DEAB386-E420-4FD5-AED8-7B219CCEA237}"/>
               </a:ext>
             </a:extLst>
           </p:cNvPr>
@@ -3162,7 +5678,7 @@
           <p:cNvPr id="7" name="">
             <a:extLst xmlns:a="http://schemas.openxmlformats.org/drawingml/2006/main">
               <a:ext uri="{FF2B5EF4-FFF2-40B4-BE49-F238E27FC236}">
-                <a16:creationId xmlns:a16="http://schemas.microsoft.com/office/drawing/2014/main" id="{2BC136BD-D2C4-42C9-AB3E-0DED6B818177}"/>
+                <a16:creationId xmlns:a16="http://schemas.microsoft.com/office/drawing/2014/main" id="{FE067481-DA69-4EEA-886A-BF428E23A9FA}"/>
               </a:ext>
             </a:extLst>
           </p:cNvPr>
@@ -3226,7 +5742,7 @@
           <p:cNvPr id="8" name="">
             <a:extLst xmlns:a="http://schemas.openxmlformats.org/drawingml/2006/main">
               <a:ext uri="{FF2B5EF4-FFF2-40B4-BE49-F238E27FC236}">
-                <a16:creationId xmlns:a16="http://schemas.microsoft.com/office/drawing/2014/main" id="{6598E859-618F-4DA9-BC2D-62A8953CDF2D}"/>
+                <a16:creationId xmlns:a16="http://schemas.microsoft.com/office/drawing/2014/main" id="{AAFB3641-F964-439E-A476-3B6E7316C5F6}"/>
               </a:ext>
             </a:extLst>
           </p:cNvPr>
@@ -3290,7 +5806,7 @@
           <p:cNvPr id="9" name="">
             <a:extLst xmlns:a="http://schemas.openxmlformats.org/drawingml/2006/main">
               <a:ext uri="{FF2B5EF4-FFF2-40B4-BE49-F238E27FC236}">
-                <a16:creationId xmlns:a16="http://schemas.microsoft.com/office/drawing/2014/main" id="{D0D24BFC-A47B-4C5F-8EC1-5474A952136C}"/>
+                <a16:creationId xmlns:a16="http://schemas.microsoft.com/office/drawing/2014/main" id="{D9A7090E-E3A7-488B-ADED-15B580912559}"/>
               </a:ext>
             </a:extLst>
           </p:cNvPr>
@@ -3323,7 +5839,7 @@
           <p:cNvPr id="10" name="">
             <a:extLst xmlns:a="http://schemas.openxmlformats.org/drawingml/2006/main">
               <a:ext uri="{FF2B5EF4-FFF2-40B4-BE49-F238E27FC236}">
-                <a16:creationId xmlns:a16="http://schemas.microsoft.com/office/drawing/2014/main" id="{962A353E-1ED7-4C43-A425-7B9A3E8A7F58}"/>
+                <a16:creationId xmlns:a16="http://schemas.microsoft.com/office/drawing/2014/main" id="{9E3EF047-1CE1-4295-9666-37720D1EDC02}"/>
               </a:ext>
             </a:extLst>
           </p:cNvPr>
@@ -3387,7 +5903,7 @@
           <p:cNvPr id="11" name="">
             <a:extLst xmlns:a="http://schemas.openxmlformats.org/drawingml/2006/main">
               <a:ext uri="{FF2B5EF4-FFF2-40B4-BE49-F238E27FC236}">
-                <a16:creationId xmlns:a16="http://schemas.microsoft.com/office/drawing/2014/main" id="{FC8FED43-1496-4521-A8BC-342A46907E2E}"/>
+                <a16:creationId xmlns:a16="http://schemas.microsoft.com/office/drawing/2014/main" id="{09C76454-5FFB-40C5-8228-0F37ECFD1FAF}"/>
               </a:ext>
             </a:extLst>
           </p:cNvPr>
@@ -3451,7 +5967,7 @@
           <p:cNvPr id="12" name="">
             <a:extLst xmlns:a="http://schemas.openxmlformats.org/drawingml/2006/main">
               <a:ext uri="{FF2B5EF4-FFF2-40B4-BE49-F238E27FC236}">
-                <a16:creationId xmlns:a16="http://schemas.microsoft.com/office/drawing/2014/main" id="{0CC35015-F1C1-4D6A-B484-0DF58AE87CD8}"/>
+                <a16:creationId xmlns:a16="http://schemas.microsoft.com/office/drawing/2014/main" id="{36BAC941-D37A-49F0-83EF-40B6A6849955}"/>
               </a:ext>
             </a:extLst>
           </p:cNvPr>
@@ -3484,7 +6000,7 @@
           <p:cNvPr id="13" name="">
             <a:extLst xmlns:a="http://schemas.openxmlformats.org/drawingml/2006/main">
               <a:ext uri="{FF2B5EF4-FFF2-40B4-BE49-F238E27FC236}">
-                <a16:creationId xmlns:a16="http://schemas.microsoft.com/office/drawing/2014/main" id="{EAA9E834-DECE-46B7-A460-78A21E7A851E}"/>
+                <a16:creationId xmlns:a16="http://schemas.microsoft.com/office/drawing/2014/main" id="{18082E54-E039-41C0-B298-400EDCB84FC6}"/>
               </a:ext>
             </a:extLst>
           </p:cNvPr>
@@ -3548,7 +6064,7 @@
           <p:cNvPr id="14" name="">
             <a:extLst xmlns:a="http://schemas.openxmlformats.org/drawingml/2006/main">
               <a:ext uri="{FF2B5EF4-FFF2-40B4-BE49-F238E27FC236}">
-                <a16:creationId xmlns:a16="http://schemas.microsoft.com/office/drawing/2014/main" id="{3AF06F30-C9E3-4FAC-A8CB-3E2885AE22B8}"/>
+                <a16:creationId xmlns:a16="http://schemas.microsoft.com/office/drawing/2014/main" id="{0E082CFE-09FB-477F-89CA-35B29BD123CE}"/>
               </a:ext>
             </a:extLst>
           </p:cNvPr>
@@ -3612,7 +6128,7 @@
           <p:cNvPr id="15" name="">
             <a:extLst xmlns:a="http://schemas.openxmlformats.org/drawingml/2006/main">
               <a:ext uri="{FF2B5EF4-FFF2-40B4-BE49-F238E27FC236}">
-                <a16:creationId xmlns:a16="http://schemas.microsoft.com/office/drawing/2014/main" id="{BEAEFE36-681B-4AE8-88C7-E9B17B18661B}"/>
+                <a16:creationId xmlns:a16="http://schemas.microsoft.com/office/drawing/2014/main" id="{B2A4DAA0-18F3-499F-835D-E975ED014AF2}"/>
               </a:ext>
             </a:extLst>
           </p:cNvPr>
@@ -3645,7 +6161,7 @@
           <p:cNvPr id="16" name="">
             <a:extLst xmlns:a="http://schemas.openxmlformats.org/drawingml/2006/main">
               <a:ext uri="{FF2B5EF4-FFF2-40B4-BE49-F238E27FC236}">
-                <a16:creationId xmlns:a16="http://schemas.microsoft.com/office/drawing/2014/main" id="{118D9B47-A959-48B4-B726-51BE0F251667}"/>
+                <a16:creationId xmlns:a16="http://schemas.microsoft.com/office/drawing/2014/main" id="{4B493898-C1F3-4C92-ADEC-BE69297D358D}"/>
               </a:ext>
             </a:extLst>
           </p:cNvPr>
@@ -3709,7 +6225,7 @@
           <p:cNvPr id="17" name="">
             <a:extLst xmlns:a="http://schemas.openxmlformats.org/drawingml/2006/main">
               <a:ext uri="{FF2B5EF4-FFF2-40B4-BE49-F238E27FC236}">
-                <a16:creationId xmlns:a16="http://schemas.microsoft.com/office/drawing/2014/main" id="{3DD20D0E-489E-4FBD-A5E3-E6729F31D6D5}"/>
+                <a16:creationId xmlns:a16="http://schemas.microsoft.com/office/drawing/2014/main" id="{FB51F20C-14AC-4E81-8EF2-C86BB777FDFC}"/>
               </a:ext>
             </a:extLst>
           </p:cNvPr>
@@ -3773,7 +6289,7 @@
           <p:cNvPr id="18" name="">
             <a:extLst xmlns:a="http://schemas.openxmlformats.org/drawingml/2006/main">
               <a:ext uri="{FF2B5EF4-FFF2-40B4-BE49-F238E27FC236}">
-                <a16:creationId xmlns:a16="http://schemas.microsoft.com/office/drawing/2014/main" id="{1710F792-BF1C-4C60-91A4-E1B5F9E0033C}"/>
+                <a16:creationId xmlns:a16="http://schemas.microsoft.com/office/drawing/2014/main" id="{EB24EF39-2422-40A4-9C72-BD95FDA8B934}"/>
               </a:ext>
             </a:extLst>
           </p:cNvPr>
@@ -3806,7 +6322,7 @@
           <p:cNvPr id="19" name="">
             <a:extLst xmlns:a="http://schemas.openxmlformats.org/drawingml/2006/main">
               <a:ext uri="{FF2B5EF4-FFF2-40B4-BE49-F238E27FC236}">
-                <a16:creationId xmlns:a16="http://schemas.microsoft.com/office/drawing/2014/main" id="{822FE53B-CD9A-45C5-B148-0E7C07A9156C}"/>
+                <a16:creationId xmlns:a16="http://schemas.microsoft.com/office/drawing/2014/main" id="{B32E582C-0C14-4369-8EF3-798D79AD7072}"/>
               </a:ext>
             </a:extLst>
           </p:cNvPr>
@@ -3870,7 +6386,7 @@
           <p:cNvPr id="20" name="">
             <a:extLst xmlns:a="http://schemas.openxmlformats.org/drawingml/2006/main">
               <a:ext uri="{FF2B5EF4-FFF2-40B4-BE49-F238E27FC236}">
-                <a16:creationId xmlns:a16="http://schemas.microsoft.com/office/drawing/2014/main" id="{CACEA466-D631-4249-903D-6CFB06891674}"/>
+                <a16:creationId xmlns:a16="http://schemas.microsoft.com/office/drawing/2014/main" id="{F406474C-D29F-4927-A6E8-95E16F6E3451}"/>
               </a:ext>
             </a:extLst>
           </p:cNvPr>
@@ -3934,7 +6450,7 @@
           <p:cNvPr id="21" name="">
             <a:extLst xmlns:a="http://schemas.openxmlformats.org/drawingml/2006/main">
               <a:ext uri="{FF2B5EF4-FFF2-40B4-BE49-F238E27FC236}">
-                <a16:creationId xmlns:a16="http://schemas.microsoft.com/office/drawing/2014/main" id="{F6C40FBD-2553-45B2-8428-264C37CA7D81}"/>
+                <a16:creationId xmlns:a16="http://schemas.microsoft.com/office/drawing/2014/main" id="{DB13CE60-B5A9-4046-ACC8-1E70F209D4E3}"/>
               </a:ext>
             </a:extLst>
           </p:cNvPr>
@@ -3996,7 +6512,7 @@
     </p:spTree>
     <p:extLst>
       <p:ext uri="{BB962C8B-B14F-4D97-AF65-F5344CB8AC3E}">
-        <p14:creationId xmlns:p14="http://schemas.microsoft.com/office/powerpoint/2010/main" val="2143196637"/>
+        <p14:creationId xmlns:p14="http://schemas.microsoft.com/office/powerpoint/2010/main" val="1114571572"/>
       </p:ext>
     </p:extLst>
   </p:cSld>
@@ -4020,7 +6536,7 @@
           <p:cNvPr id="1" name="">
             <a:extLst xmlns:a="http://schemas.openxmlformats.org/drawingml/2006/main">
               <a:ext uri="{FF2B5EF4-FFF2-40B4-BE49-F238E27FC236}">
-                <a16:creationId xmlns:a16="http://schemas.microsoft.com/office/drawing/2014/main" id="{E6DB0ED8-F44C-4251-A076-A088E7251C94}"/>
+                <a16:creationId xmlns:a16="http://schemas.microsoft.com/office/drawing/2014/main" id="{0303B470-66B5-40F5-B6A4-7EF81F00D5C3}"/>
               </a:ext>
             </a:extLst>
           </p:cNvPr>
@@ -4055,7 +6571,7 @@
           <p:cNvPr id="2" name="kicker-marker">
             <a:extLst xmlns:a="http://schemas.openxmlformats.org/drawingml/2006/main">
               <a:ext uri="{FF2B5EF4-FFF2-40B4-BE49-F238E27FC236}">
-                <a16:creationId xmlns:a16="http://schemas.microsoft.com/office/drawing/2014/main" id="{8FF61D61-8538-4EA8-AF11-4F19C7C7C915}"/>
+                <a16:creationId xmlns:a16="http://schemas.microsoft.com/office/drawing/2014/main" id="{FF7AEC47-3BCC-4434-ADBE-6E534125C6F7}"/>
               </a:ext>
             </a:extLst>
           </p:cNvPr>
@@ -4090,7 +6606,7 @@
           <p:cNvPr id="3" name="kicker-label">
             <a:extLst xmlns:a="http://schemas.openxmlformats.org/drawingml/2006/main">
               <a:ext uri="{FF2B5EF4-FFF2-40B4-BE49-F238E27FC236}">
-                <a16:creationId xmlns:a16="http://schemas.microsoft.com/office/drawing/2014/main" id="{8B2F324F-EB79-45BC-BB27-A714E4216F74}"/>
+                <a16:creationId xmlns:a16="http://schemas.microsoft.com/office/drawing/2014/main" id="{9C4F4BEB-9CB9-4FEC-8033-BD925C8F8829}"/>
               </a:ext>
             </a:extLst>
           </p:cNvPr>
@@ -4154,7 +6670,7 @@
           <p:cNvPr id="4" name="">
             <a:extLst xmlns:a="http://schemas.openxmlformats.org/drawingml/2006/main">
               <a:ext uri="{FF2B5EF4-FFF2-40B4-BE49-F238E27FC236}">
-                <a16:creationId xmlns:a16="http://schemas.microsoft.com/office/drawing/2014/main" id="{F40CB270-89BA-4B30-9EDE-A35C24B1B877}"/>
+                <a16:creationId xmlns:a16="http://schemas.microsoft.com/office/drawing/2014/main" id="{08F51933-99BF-4FE3-8E6E-6615ABAEAB3C}"/>
               </a:ext>
             </a:extLst>
           </p:cNvPr>
@@ -4218,7 +6734,7 @@
           <p:cNvPr id="5" name="">
             <a:extLst xmlns:a="http://schemas.openxmlformats.org/drawingml/2006/main">
               <a:ext uri="{FF2B5EF4-FFF2-40B4-BE49-F238E27FC236}">
-                <a16:creationId xmlns:a16="http://schemas.microsoft.com/office/drawing/2014/main" id="{A498CABC-7477-4E4B-AFEA-ED0944B7CE5A}"/>
+                <a16:creationId xmlns:a16="http://schemas.microsoft.com/office/drawing/2014/main" id="{BD8E8F7D-A1F8-4E5D-AD0B-B75C5937C07F}"/>
               </a:ext>
             </a:extLst>
           </p:cNvPr>
@@ -4251,7 +6767,7 @@
           <p:cNvPr id="6" name="">
             <a:extLst xmlns:a="http://schemas.openxmlformats.org/drawingml/2006/main">
               <a:ext uri="{FF2B5EF4-FFF2-40B4-BE49-F238E27FC236}">
-                <a16:creationId xmlns:a16="http://schemas.microsoft.com/office/drawing/2014/main" id="{BFDFD30D-A7A8-46BD-8A36-FC475D1D7D1B}"/>
+                <a16:creationId xmlns:a16="http://schemas.microsoft.com/office/drawing/2014/main" id="{90B75E72-2A5B-4E4B-BB1A-BE7ED699F7FC}"/>
               </a:ext>
             </a:extLst>
           </p:cNvPr>
@@ -4315,7 +6831,7 @@
           <p:cNvPr id="7" name="">
             <a:extLst xmlns:a="http://schemas.openxmlformats.org/drawingml/2006/main">
               <a:ext uri="{FF2B5EF4-FFF2-40B4-BE49-F238E27FC236}">
-                <a16:creationId xmlns:a16="http://schemas.microsoft.com/office/drawing/2014/main" id="{9D3F8D39-62E6-48AA-B355-9896A15BCF45}"/>
+                <a16:creationId xmlns:a16="http://schemas.microsoft.com/office/drawing/2014/main" id="{36CB7FB8-8809-4DC1-8A9F-2CAB8282D37D}"/>
               </a:ext>
             </a:extLst>
           </p:cNvPr>
@@ -4379,7 +6895,7 @@
           <p:cNvPr id="8" name="">
             <a:extLst xmlns:a="http://schemas.openxmlformats.org/drawingml/2006/main">
               <a:ext uri="{FF2B5EF4-FFF2-40B4-BE49-F238E27FC236}">
-                <a16:creationId xmlns:a16="http://schemas.microsoft.com/office/drawing/2014/main" id="{DDFC2571-A0ED-4302-A97C-CDD2C90B5389}"/>
+                <a16:creationId xmlns:a16="http://schemas.microsoft.com/office/drawing/2014/main" id="{B4E01685-B8FC-469B-8C2E-7C5B4F726A81}"/>
               </a:ext>
             </a:extLst>
           </p:cNvPr>
@@ -4412,7 +6928,7 @@
           <p:cNvPr id="9" name="">
             <a:extLst xmlns:a="http://schemas.openxmlformats.org/drawingml/2006/main">
               <a:ext uri="{FF2B5EF4-FFF2-40B4-BE49-F238E27FC236}">
-                <a16:creationId xmlns:a16="http://schemas.microsoft.com/office/drawing/2014/main" id="{3D10E366-3890-4FBF-96D6-479720F18BE6}"/>
+                <a16:creationId xmlns:a16="http://schemas.microsoft.com/office/drawing/2014/main" id="{E38186D2-164C-4A5C-9891-128A7783A274}"/>
               </a:ext>
             </a:extLst>
           </p:cNvPr>
@@ -4476,7 +6992,7 @@
           <p:cNvPr id="10" name="">
             <a:extLst xmlns:a="http://schemas.openxmlformats.org/drawingml/2006/main">
               <a:ext uri="{FF2B5EF4-FFF2-40B4-BE49-F238E27FC236}">
-                <a16:creationId xmlns:a16="http://schemas.microsoft.com/office/drawing/2014/main" id="{F3B93ABD-996B-43AE-A82E-6CFB3F19BBFB}"/>
+                <a16:creationId xmlns:a16="http://schemas.microsoft.com/office/drawing/2014/main" id="{5DBDC46B-7EA4-4862-945E-1FA39C724272}"/>
               </a:ext>
             </a:extLst>
           </p:cNvPr>
@@ -4540,7 +7056,7 @@
           <p:cNvPr id="11" name="">
             <a:extLst xmlns:a="http://schemas.openxmlformats.org/drawingml/2006/main">
               <a:ext uri="{FF2B5EF4-FFF2-40B4-BE49-F238E27FC236}">
-                <a16:creationId xmlns:a16="http://schemas.microsoft.com/office/drawing/2014/main" id="{E25BB2B7-12A3-4832-8A75-E16E4317B01C}"/>
+                <a16:creationId xmlns:a16="http://schemas.microsoft.com/office/drawing/2014/main" id="{4A05A9F3-A8F9-4986-9F6A-BE6DC0D5A942}"/>
               </a:ext>
             </a:extLst>
           </p:cNvPr>
@@ -4573,7 +7089,7 @@
           <p:cNvPr id="12" name="">
             <a:extLst xmlns:a="http://schemas.openxmlformats.org/drawingml/2006/main">
               <a:ext uri="{FF2B5EF4-FFF2-40B4-BE49-F238E27FC236}">
-                <a16:creationId xmlns:a16="http://schemas.microsoft.com/office/drawing/2014/main" id="{84C099AD-D765-4C1D-A67C-FFD30759EAA6}"/>
+                <a16:creationId xmlns:a16="http://schemas.microsoft.com/office/drawing/2014/main" id="{4B1992A6-8CB3-43B6-9D78-7B2A0D4655F7}"/>
               </a:ext>
             </a:extLst>
           </p:cNvPr>
@@ -4637,7 +7153,7 @@
           <p:cNvPr id="13" name="">
             <a:extLst xmlns:a="http://schemas.openxmlformats.org/drawingml/2006/main">
               <a:ext uri="{FF2B5EF4-FFF2-40B4-BE49-F238E27FC236}">
-                <a16:creationId xmlns:a16="http://schemas.microsoft.com/office/drawing/2014/main" id="{6A55A6F3-3A24-4A43-A260-97EE0AD370A9}"/>
+                <a16:creationId xmlns:a16="http://schemas.microsoft.com/office/drawing/2014/main" id="{608802D0-D89A-42EB-A0C5-D6016B5DFD24}"/>
               </a:ext>
             </a:extLst>
           </p:cNvPr>
@@ -4701,7 +7217,7 @@
           <p:cNvPr id="14" name="">
             <a:extLst xmlns:a="http://schemas.openxmlformats.org/drawingml/2006/main">
               <a:ext uri="{FF2B5EF4-FFF2-40B4-BE49-F238E27FC236}">
-                <a16:creationId xmlns:a16="http://schemas.microsoft.com/office/drawing/2014/main" id="{09A29A72-0919-4C9F-94EA-5126BBDE9C08}"/>
+                <a16:creationId xmlns:a16="http://schemas.microsoft.com/office/drawing/2014/main" id="{CD5A76D9-51E9-4474-8830-DA65C582BD4D}"/>
               </a:ext>
             </a:extLst>
           </p:cNvPr>
@@ -4734,7 +7250,7 @@
           <p:cNvPr id="15" name="">
             <a:extLst xmlns:a="http://schemas.openxmlformats.org/drawingml/2006/main">
               <a:ext uri="{FF2B5EF4-FFF2-40B4-BE49-F238E27FC236}">
-                <a16:creationId xmlns:a16="http://schemas.microsoft.com/office/drawing/2014/main" id="{30BA3025-1D3F-47C7-A1F2-2C5164D7DCE6}"/>
+                <a16:creationId xmlns:a16="http://schemas.microsoft.com/office/drawing/2014/main" id="{923F9DC9-4A3D-4349-A2DE-D7CEF645900E}"/>
               </a:ext>
             </a:extLst>
           </p:cNvPr>
@@ -4798,7 +7314,7 @@
           <p:cNvPr id="16" name="">
             <a:extLst xmlns:a="http://schemas.openxmlformats.org/drawingml/2006/main">
               <a:ext uri="{FF2B5EF4-FFF2-40B4-BE49-F238E27FC236}">
-                <a16:creationId xmlns:a16="http://schemas.microsoft.com/office/drawing/2014/main" id="{613BCD54-3793-492F-AA4E-5ABCB7DE65E8}"/>
+                <a16:creationId xmlns:a16="http://schemas.microsoft.com/office/drawing/2014/main" id="{C2CD6F24-2C52-49C8-B7BC-50DECC9B64C8}"/>
               </a:ext>
             </a:extLst>
           </p:cNvPr>
@@ -4862,7 +7378,7 @@
           <p:cNvPr id="17" name="">
             <a:extLst xmlns:a="http://schemas.openxmlformats.org/drawingml/2006/main">
               <a:ext uri="{FF2B5EF4-FFF2-40B4-BE49-F238E27FC236}">
-                <a16:creationId xmlns:a16="http://schemas.microsoft.com/office/drawing/2014/main" id="{1322818F-ABE1-43A1-8F63-CF6D652F5CE2}"/>
+                <a16:creationId xmlns:a16="http://schemas.microsoft.com/office/drawing/2014/main" id="{05721199-3CF5-45F5-8D15-2FFAF971C5B8}"/>
               </a:ext>
             </a:extLst>
           </p:cNvPr>
@@ -4895,7 +7411,7 @@
           <p:cNvPr id="18" name="">
             <a:extLst xmlns:a="http://schemas.openxmlformats.org/drawingml/2006/main">
               <a:ext uri="{FF2B5EF4-FFF2-40B4-BE49-F238E27FC236}">
-                <a16:creationId xmlns:a16="http://schemas.microsoft.com/office/drawing/2014/main" id="{C9407799-DC57-4D5C-9318-BFE7602D5268}"/>
+                <a16:creationId xmlns:a16="http://schemas.microsoft.com/office/drawing/2014/main" id="{7B0E4388-8013-4860-9388-D7A2CDA2B80E}"/>
               </a:ext>
             </a:extLst>
           </p:cNvPr>
@@ -4959,7 +7475,7 @@
           <p:cNvPr id="19" name="">
             <a:extLst xmlns:a="http://schemas.openxmlformats.org/drawingml/2006/main">
               <a:ext uri="{FF2B5EF4-FFF2-40B4-BE49-F238E27FC236}">
-                <a16:creationId xmlns:a16="http://schemas.microsoft.com/office/drawing/2014/main" id="{98804967-CA31-4FD9-A847-6F066AC760BE}"/>
+                <a16:creationId xmlns:a16="http://schemas.microsoft.com/office/drawing/2014/main" id="{4CBF0E86-1FDD-497C-AD88-C80AD9EE5C8C}"/>
               </a:ext>
             </a:extLst>
           </p:cNvPr>
@@ -5023,7 +7539,7 @@
           <p:cNvPr id="20" name="">
             <a:extLst xmlns:a="http://schemas.openxmlformats.org/drawingml/2006/main">
               <a:ext uri="{FF2B5EF4-FFF2-40B4-BE49-F238E27FC236}">
-                <a16:creationId xmlns:a16="http://schemas.microsoft.com/office/drawing/2014/main" id="{28827747-E437-4B06-B14B-698A169C14CF}"/>
+                <a16:creationId xmlns:a16="http://schemas.microsoft.com/office/drawing/2014/main" id="{7F6A3E14-F86D-4F0F-B7CF-2BFAFD686EA7}"/>
               </a:ext>
             </a:extLst>
           </p:cNvPr>
@@ -5058,7 +7574,7 @@
           <p:cNvPr id="21" name="">
             <a:extLst xmlns:a="http://schemas.openxmlformats.org/drawingml/2006/main">
               <a:ext uri="{FF2B5EF4-FFF2-40B4-BE49-F238E27FC236}">
-                <a16:creationId xmlns:a16="http://schemas.microsoft.com/office/drawing/2014/main" id="{983F4AAB-A961-4724-A695-94545D838266}"/>
+                <a16:creationId xmlns:a16="http://schemas.microsoft.com/office/drawing/2014/main" id="{7934833C-6785-424C-A2D0-C8D6B4CEB0FA}"/>
               </a:ext>
             </a:extLst>
           </p:cNvPr>
@@ -5093,7 +7609,7 @@
           <p:cNvPr id="22" name="">
             <a:extLst xmlns:a="http://schemas.openxmlformats.org/drawingml/2006/main">
               <a:ext uri="{FF2B5EF4-FFF2-40B4-BE49-F238E27FC236}">
-                <a16:creationId xmlns:a16="http://schemas.microsoft.com/office/drawing/2014/main" id="{13248644-AEEF-47D4-AB72-E984E24EE91F}"/>
+                <a16:creationId xmlns:a16="http://schemas.microsoft.com/office/drawing/2014/main" id="{605B105E-DF41-46AD-8360-AB5BEE0E31D3}"/>
               </a:ext>
             </a:extLst>
           </p:cNvPr>
@@ -5128,7 +7644,7 @@
           <p:cNvPr id="23" name="">
             <a:extLst xmlns:a="http://schemas.openxmlformats.org/drawingml/2006/main">
               <a:ext uri="{FF2B5EF4-FFF2-40B4-BE49-F238E27FC236}">
-                <a16:creationId xmlns:a16="http://schemas.microsoft.com/office/drawing/2014/main" id="{3A4D2E14-64B3-428B-AE41-B70E96804C79}"/>
+                <a16:creationId xmlns:a16="http://schemas.microsoft.com/office/drawing/2014/main" id="{041E440E-91A6-429F-AD39-315B849D81D4}"/>
               </a:ext>
             </a:extLst>
           </p:cNvPr>
@@ -5163,7 +7679,7 @@
           <p:cNvPr id="24" name="">
             <a:extLst xmlns:a="http://schemas.openxmlformats.org/drawingml/2006/main">
               <a:ext uri="{FF2B5EF4-FFF2-40B4-BE49-F238E27FC236}">
-                <a16:creationId xmlns:a16="http://schemas.microsoft.com/office/drawing/2014/main" id="{6948A1C3-A110-4E6A-96C1-2B86BC4424FF}"/>
+                <a16:creationId xmlns:a16="http://schemas.microsoft.com/office/drawing/2014/main" id="{54A86512-A701-471D-B16D-31A244782CE2}"/>
               </a:ext>
             </a:extLst>
           </p:cNvPr>
@@ -5198,7 +7714,7 @@
           <p:cNvPr id="25" name="">
             <a:extLst xmlns:a="http://schemas.openxmlformats.org/drawingml/2006/main">
               <a:ext uri="{FF2B5EF4-FFF2-40B4-BE49-F238E27FC236}">
-                <a16:creationId xmlns:a16="http://schemas.microsoft.com/office/drawing/2014/main" id="{496C221D-97C2-4C8A-885C-B833490BA86B}"/>
+                <a16:creationId xmlns:a16="http://schemas.microsoft.com/office/drawing/2014/main" id="{D0ED11B0-C278-4280-8A57-F2664DA25C00}"/>
               </a:ext>
             </a:extLst>
           </p:cNvPr>
@@ -5233,7 +7749,7 @@
           <p:cNvPr id="26" name="">
             <a:extLst xmlns:a="http://schemas.openxmlformats.org/drawingml/2006/main">
               <a:ext uri="{FF2B5EF4-FFF2-40B4-BE49-F238E27FC236}">
-                <a16:creationId xmlns:a16="http://schemas.microsoft.com/office/drawing/2014/main" id="{75382EA7-E011-49E0-BACE-1F11733D20E3}"/>
+                <a16:creationId xmlns:a16="http://schemas.microsoft.com/office/drawing/2014/main" id="{70551F26-A232-40A6-AF9B-DC404FAFD135}"/>
               </a:ext>
             </a:extLst>
           </p:cNvPr>
@@ -5268,7 +7784,7 @@
           <p:cNvPr id="27" name="">
             <a:extLst xmlns:a="http://schemas.openxmlformats.org/drawingml/2006/main">
               <a:ext uri="{FF2B5EF4-FFF2-40B4-BE49-F238E27FC236}">
-                <a16:creationId xmlns:a16="http://schemas.microsoft.com/office/drawing/2014/main" id="{23981BDB-22FA-44FD-BA87-0B85A9AB5F1D}"/>
+                <a16:creationId xmlns:a16="http://schemas.microsoft.com/office/drawing/2014/main" id="{B0854D94-A5DB-45B3-8172-AB043DED7935}"/>
               </a:ext>
             </a:extLst>
           </p:cNvPr>
@@ -5303,7 +7819,7 @@
           <p:cNvPr id="28" name="">
             <a:extLst xmlns:a="http://schemas.openxmlformats.org/drawingml/2006/main">
               <a:ext uri="{FF2B5EF4-FFF2-40B4-BE49-F238E27FC236}">
-                <a16:creationId xmlns:a16="http://schemas.microsoft.com/office/drawing/2014/main" id="{4E022347-4D11-4A95-9CDC-9931087FB17B}"/>
+                <a16:creationId xmlns:a16="http://schemas.microsoft.com/office/drawing/2014/main" id="{94BD442C-1397-45EB-99FC-86A20EA19F0B}"/>
               </a:ext>
             </a:extLst>
           </p:cNvPr>
@@ -5336,7 +7852,7 @@
           <p:cNvPr id="29" name="">
             <a:extLst xmlns:a="http://schemas.openxmlformats.org/drawingml/2006/main">
               <a:ext uri="{FF2B5EF4-FFF2-40B4-BE49-F238E27FC236}">
-                <a16:creationId xmlns:a16="http://schemas.microsoft.com/office/drawing/2014/main" id="{7B4301AE-C421-45E3-8921-BD10A3319494}"/>
+                <a16:creationId xmlns:a16="http://schemas.microsoft.com/office/drawing/2014/main" id="{0D5D1976-D06B-4209-882D-5E57C68E0A70}"/>
               </a:ext>
             </a:extLst>
           </p:cNvPr>
@@ -5400,7 +7916,7 @@
           <p:cNvPr id="30" name="">
             <a:extLst xmlns:a="http://schemas.openxmlformats.org/drawingml/2006/main">
               <a:ext uri="{FF2B5EF4-FFF2-40B4-BE49-F238E27FC236}">
-                <a16:creationId xmlns:a16="http://schemas.microsoft.com/office/drawing/2014/main" id="{F689F583-5CDB-40E3-8151-AFD4ABD771C6}"/>
+                <a16:creationId xmlns:a16="http://schemas.microsoft.com/office/drawing/2014/main" id="{A7DB490A-D0F6-4043-8F30-5D8474A77350}"/>
               </a:ext>
             </a:extLst>
           </p:cNvPr>
@@ -5464,7 +7980,7 @@
           <p:cNvPr id="31" name="">
             <a:extLst xmlns:a="http://schemas.openxmlformats.org/drawingml/2006/main">
               <a:ext uri="{FF2B5EF4-FFF2-40B4-BE49-F238E27FC236}">
-                <a16:creationId xmlns:a16="http://schemas.microsoft.com/office/drawing/2014/main" id="{FEED0CC5-703F-461D-8205-11744E9B6B51}"/>
+                <a16:creationId xmlns:a16="http://schemas.microsoft.com/office/drawing/2014/main" id="{DB78311B-CCE5-46E7-9E3B-862F83873F7E}"/>
               </a:ext>
             </a:extLst>
           </p:cNvPr>
@@ -5499,7 +8015,7 @@
           <p:cNvPr id="32" name="">
             <a:extLst xmlns:a="http://schemas.openxmlformats.org/drawingml/2006/main">
               <a:ext uri="{FF2B5EF4-FFF2-40B4-BE49-F238E27FC236}">
-                <a16:creationId xmlns:a16="http://schemas.microsoft.com/office/drawing/2014/main" id="{AD4CC7DB-5B22-4754-8532-DEA707B246E2}"/>
+                <a16:creationId xmlns:a16="http://schemas.microsoft.com/office/drawing/2014/main" id="{F681BBAC-DC38-419B-AB50-322333BA6A0C}"/>
               </a:ext>
             </a:extLst>
           </p:cNvPr>
@@ -5534,7 +8050,7 @@
           <p:cNvPr id="33" name="">
             <a:extLst xmlns:a="http://schemas.openxmlformats.org/drawingml/2006/main">
               <a:ext uri="{FF2B5EF4-FFF2-40B4-BE49-F238E27FC236}">
-                <a16:creationId xmlns:a16="http://schemas.microsoft.com/office/drawing/2014/main" id="{76300949-4E8B-4F21-919D-BABB2769863F}"/>
+                <a16:creationId xmlns:a16="http://schemas.microsoft.com/office/drawing/2014/main" id="{1232B17D-69BF-47FE-852F-336CE15A7AF5}"/>
               </a:ext>
             </a:extLst>
           </p:cNvPr>
@@ -5598,7 +8114,7 @@
           <p:cNvPr id="34" name="">
             <a:extLst xmlns:a="http://schemas.openxmlformats.org/drawingml/2006/main">
               <a:ext uri="{FF2B5EF4-FFF2-40B4-BE49-F238E27FC236}">
-                <a16:creationId xmlns:a16="http://schemas.microsoft.com/office/drawing/2014/main" id="{31983D94-B502-4676-BBB6-06A059EB7D07}"/>
+                <a16:creationId xmlns:a16="http://schemas.microsoft.com/office/drawing/2014/main" id="{7CA68C9A-FCF7-49F6-9B74-543A7FE96056}"/>
               </a:ext>
             </a:extLst>
           </p:cNvPr>
@@ -5660,7 +8176,7 @@
     </p:spTree>
     <p:extLst>
       <p:ext uri="{BB962C8B-B14F-4D97-AF65-F5344CB8AC3E}">
-        <p14:creationId xmlns:p14="http://schemas.microsoft.com/office/powerpoint/2010/main" val="1013748436"/>
+        <p14:creationId xmlns:p14="http://schemas.microsoft.com/office/powerpoint/2010/main" val="1590457674"/>
       </p:ext>
     </p:extLst>
   </p:cSld>
@@ -5684,7 +8200,7 @@
           <p:cNvPr id="1" name="">
             <a:extLst xmlns:a="http://schemas.openxmlformats.org/drawingml/2006/main">
               <a:ext uri="{FF2B5EF4-FFF2-40B4-BE49-F238E27FC236}">
-                <a16:creationId xmlns:a16="http://schemas.microsoft.com/office/drawing/2014/main" id="{EAF71A7F-50A3-4D3D-A04E-C68B44922105}"/>
+                <a16:creationId xmlns:a16="http://schemas.microsoft.com/office/drawing/2014/main" id="{B21266E7-6B78-4958-9B05-BA3AD9C73372}"/>
               </a:ext>
             </a:extLst>
           </p:cNvPr>
@@ -5719,7 +8235,7 @@
           <p:cNvPr id="2" name="kicker-marker">
             <a:extLst xmlns:a="http://schemas.openxmlformats.org/drawingml/2006/main">
               <a:ext uri="{FF2B5EF4-FFF2-40B4-BE49-F238E27FC236}">
-                <a16:creationId xmlns:a16="http://schemas.microsoft.com/office/drawing/2014/main" id="{0682475A-3AC7-4043-BF1A-34A98DAE2621}"/>
+                <a16:creationId xmlns:a16="http://schemas.microsoft.com/office/drawing/2014/main" id="{0FFAB392-145F-4A6B-99DF-80584FE432DD}"/>
               </a:ext>
             </a:extLst>
           </p:cNvPr>
@@ -5754,7 +8270,7 @@
           <p:cNvPr id="3" name="kicker-label">
             <a:extLst xmlns:a="http://schemas.openxmlformats.org/drawingml/2006/main">
               <a:ext uri="{FF2B5EF4-FFF2-40B4-BE49-F238E27FC236}">
-                <a16:creationId xmlns:a16="http://schemas.microsoft.com/office/drawing/2014/main" id="{A9A91C1B-117E-4D2B-A1BA-4C875024477B}"/>
+                <a16:creationId xmlns:a16="http://schemas.microsoft.com/office/drawing/2014/main" id="{193C9D76-2360-4507-AEDD-A770735F5CCA}"/>
               </a:ext>
             </a:extLst>
           </p:cNvPr>
@@ -5818,7 +8334,7 @@
           <p:cNvPr id="4" name="">
             <a:extLst xmlns:a="http://schemas.openxmlformats.org/drawingml/2006/main">
               <a:ext uri="{FF2B5EF4-FFF2-40B4-BE49-F238E27FC236}">
-                <a16:creationId xmlns:a16="http://schemas.microsoft.com/office/drawing/2014/main" id="{237AE6A2-10A7-4D0A-A0A0-DAA1974B7A1E}"/>
+                <a16:creationId xmlns:a16="http://schemas.microsoft.com/office/drawing/2014/main" id="{4DD13781-0A0D-470B-9937-D5962331E86D}"/>
               </a:ext>
             </a:extLst>
           </p:cNvPr>
@@ -5882,7 +8398,7 @@
           <p:cNvPr id="5" name="">
             <a:extLst xmlns:a="http://schemas.openxmlformats.org/drawingml/2006/main">
               <a:ext uri="{FF2B5EF4-FFF2-40B4-BE49-F238E27FC236}">
-                <a16:creationId xmlns:a16="http://schemas.microsoft.com/office/drawing/2014/main" id="{1846AE25-FD02-45B4-BB06-7002724556F6}"/>
+                <a16:creationId xmlns:a16="http://schemas.microsoft.com/office/drawing/2014/main" id="{E4B47B8E-316B-416A-B940-699AEC60C1B5}"/>
               </a:ext>
             </a:extLst>
           </p:cNvPr>
@@ -5946,7 +8462,7 @@
           <p:cNvPr id="6" name="">
             <a:extLst xmlns:a="http://schemas.openxmlformats.org/drawingml/2006/main">
               <a:ext uri="{FF2B5EF4-FFF2-40B4-BE49-F238E27FC236}">
-                <a16:creationId xmlns:a16="http://schemas.microsoft.com/office/drawing/2014/main" id="{0F0FA721-3673-498E-8FF5-DC0CA6E39D34}"/>
+                <a16:creationId xmlns:a16="http://schemas.microsoft.com/office/drawing/2014/main" id="{0B4A5C44-A27D-4D04-8F9A-6D6E64FB1979}"/>
               </a:ext>
             </a:extLst>
           </p:cNvPr>
@@ -5979,7 +8495,7 @@
           <p:cNvPr id="7" name="">
             <a:extLst xmlns:a="http://schemas.openxmlformats.org/drawingml/2006/main">
               <a:ext uri="{FF2B5EF4-FFF2-40B4-BE49-F238E27FC236}">
-                <a16:creationId xmlns:a16="http://schemas.microsoft.com/office/drawing/2014/main" id="{BE6CFEB1-C1DF-4B0B-B63B-FAD6EAC385C1}"/>
+                <a16:creationId xmlns:a16="http://schemas.microsoft.com/office/drawing/2014/main" id="{A328B139-0511-42E8-84A2-F8AFE767BB4F}"/>
               </a:ext>
             </a:extLst>
           </p:cNvPr>
@@ -6043,7 +8559,7 @@
           <p:cNvPr id="8" name="">
             <a:extLst xmlns:a="http://schemas.openxmlformats.org/drawingml/2006/main">
               <a:ext uri="{FF2B5EF4-FFF2-40B4-BE49-F238E27FC236}">
-                <a16:creationId xmlns:a16="http://schemas.microsoft.com/office/drawing/2014/main" id="{63131FC9-EE39-466B-A23C-D78B78051004}"/>
+                <a16:creationId xmlns:a16="http://schemas.microsoft.com/office/drawing/2014/main" id="{67E3E8ED-67AA-41EA-8DFD-D6CACC579FE4}"/>
               </a:ext>
             </a:extLst>
           </p:cNvPr>
@@ -6107,7 +8623,7 @@
           <p:cNvPr id="9" name="">
             <a:extLst xmlns:a="http://schemas.openxmlformats.org/drawingml/2006/main">
               <a:ext uri="{FF2B5EF4-FFF2-40B4-BE49-F238E27FC236}">
-                <a16:creationId xmlns:a16="http://schemas.microsoft.com/office/drawing/2014/main" id="{FA5ACE3C-EA3C-49F3-B163-CD14BFA3A197}"/>
+                <a16:creationId xmlns:a16="http://schemas.microsoft.com/office/drawing/2014/main" id="{5E190A94-61BF-41E1-A756-93761A2C7E08}"/>
               </a:ext>
             </a:extLst>
           </p:cNvPr>
@@ -6140,7 +8656,7 @@
           <p:cNvPr id="10" name="">
             <a:extLst xmlns:a="http://schemas.openxmlformats.org/drawingml/2006/main">
               <a:ext uri="{FF2B5EF4-FFF2-40B4-BE49-F238E27FC236}">
-                <a16:creationId xmlns:a16="http://schemas.microsoft.com/office/drawing/2014/main" id="{E9801548-3EF5-42D7-91A1-868246B08CDB}"/>
+                <a16:creationId xmlns:a16="http://schemas.microsoft.com/office/drawing/2014/main" id="{72BB58D6-AE55-4C60-87C9-2BFAAB362387}"/>
               </a:ext>
             </a:extLst>
           </p:cNvPr>
@@ -6204,7 +8720,7 @@
           <p:cNvPr id="11" name="">
             <a:extLst xmlns:a="http://schemas.openxmlformats.org/drawingml/2006/main">
               <a:ext uri="{FF2B5EF4-FFF2-40B4-BE49-F238E27FC236}">
-                <a16:creationId xmlns:a16="http://schemas.microsoft.com/office/drawing/2014/main" id="{C3FA5897-C315-4B32-A392-34385C8CA599}"/>
+                <a16:creationId xmlns:a16="http://schemas.microsoft.com/office/drawing/2014/main" id="{AD7CADC3-4945-4A7C-AD31-0E3CE56025C3}"/>
               </a:ext>
             </a:extLst>
           </p:cNvPr>
@@ -6268,7 +8784,7 @@
           <p:cNvPr id="12" name="">
             <a:extLst xmlns:a="http://schemas.openxmlformats.org/drawingml/2006/main">
               <a:ext uri="{FF2B5EF4-FFF2-40B4-BE49-F238E27FC236}">
-                <a16:creationId xmlns:a16="http://schemas.microsoft.com/office/drawing/2014/main" id="{265F70B3-5838-4414-AA74-06445ACF4349}"/>
+                <a16:creationId xmlns:a16="http://schemas.microsoft.com/office/drawing/2014/main" id="{11427862-D25D-47D9-88CF-310D5E666859}"/>
               </a:ext>
             </a:extLst>
           </p:cNvPr>
@@ -6301,7 +8817,7 @@
           <p:cNvPr id="13" name="">
             <a:extLst xmlns:a="http://schemas.openxmlformats.org/drawingml/2006/main">
               <a:ext uri="{FF2B5EF4-FFF2-40B4-BE49-F238E27FC236}">
-                <a16:creationId xmlns:a16="http://schemas.microsoft.com/office/drawing/2014/main" id="{6CD0BD72-E35B-4741-94C7-2B10A380CA60}"/>
+                <a16:creationId xmlns:a16="http://schemas.microsoft.com/office/drawing/2014/main" id="{DC3872A9-D0D4-4C50-BC94-C21FBED4B94E}"/>
               </a:ext>
             </a:extLst>
           </p:cNvPr>
@@ -6365,7 +8881,7 @@
           <p:cNvPr id="14" name="">
             <a:extLst xmlns:a="http://schemas.openxmlformats.org/drawingml/2006/main">
               <a:ext uri="{FF2B5EF4-FFF2-40B4-BE49-F238E27FC236}">
-                <a16:creationId xmlns:a16="http://schemas.microsoft.com/office/drawing/2014/main" id="{9E1066D4-73CD-4ED5-A31C-DDA351CAAB1B}"/>
+                <a16:creationId xmlns:a16="http://schemas.microsoft.com/office/drawing/2014/main" id="{738AED05-4B9A-44CF-9402-C3449AF29159}"/>
               </a:ext>
             </a:extLst>
           </p:cNvPr>
@@ -6429,7 +8945,7 @@
           <p:cNvPr id="15" name="">
             <a:extLst xmlns:a="http://schemas.openxmlformats.org/drawingml/2006/main">
               <a:ext uri="{FF2B5EF4-FFF2-40B4-BE49-F238E27FC236}">
-                <a16:creationId xmlns:a16="http://schemas.microsoft.com/office/drawing/2014/main" id="{9FC3FC81-3FB8-4E77-AD1E-FF578EF4E40A}"/>
+                <a16:creationId xmlns:a16="http://schemas.microsoft.com/office/drawing/2014/main" id="{27D5F3BE-C235-434C-B4B9-DE3BE26A8CD9}"/>
               </a:ext>
             </a:extLst>
           </p:cNvPr>
@@ -6462,7 +8978,7 @@
           <p:cNvPr id="16" name="">
             <a:extLst xmlns:a="http://schemas.openxmlformats.org/drawingml/2006/main">
               <a:ext uri="{FF2B5EF4-FFF2-40B4-BE49-F238E27FC236}">
-                <a16:creationId xmlns:a16="http://schemas.microsoft.com/office/drawing/2014/main" id="{2F7370BA-0245-4892-B65A-603F0DFF70AA}"/>
+                <a16:creationId xmlns:a16="http://schemas.microsoft.com/office/drawing/2014/main" id="{5575F530-DCDA-48A5-BCDA-E8B3E860FBC6}"/>
               </a:ext>
             </a:extLst>
           </p:cNvPr>
@@ -6526,7 +9042,7 @@
           <p:cNvPr id="17" name="">
             <a:extLst xmlns:a="http://schemas.openxmlformats.org/drawingml/2006/main">
               <a:ext uri="{FF2B5EF4-FFF2-40B4-BE49-F238E27FC236}">
-                <a16:creationId xmlns:a16="http://schemas.microsoft.com/office/drawing/2014/main" id="{DA93DE5A-8512-446E-9281-AA8F2C491303}"/>
+                <a16:creationId xmlns:a16="http://schemas.microsoft.com/office/drawing/2014/main" id="{9E64EEC7-A8CC-4893-9F82-CB54F65B8F8F}"/>
               </a:ext>
             </a:extLst>
           </p:cNvPr>
@@ -6590,7 +9106,7 @@
           <p:cNvPr id="18" name="">
             <a:extLst xmlns:a="http://schemas.openxmlformats.org/drawingml/2006/main">
               <a:ext uri="{FF2B5EF4-FFF2-40B4-BE49-F238E27FC236}">
-                <a16:creationId xmlns:a16="http://schemas.microsoft.com/office/drawing/2014/main" id="{82F55B52-563B-415F-B5CE-0A5C68B98029}"/>
+                <a16:creationId xmlns:a16="http://schemas.microsoft.com/office/drawing/2014/main" id="{B2231261-F603-45C3-BB2F-85805234AE75}"/>
               </a:ext>
             </a:extLst>
           </p:cNvPr>
@@ -6623,7 +9139,7 @@
           <p:cNvPr id="19" name="">
             <a:extLst xmlns:a="http://schemas.openxmlformats.org/drawingml/2006/main">
               <a:ext uri="{FF2B5EF4-FFF2-40B4-BE49-F238E27FC236}">
-                <a16:creationId xmlns:a16="http://schemas.microsoft.com/office/drawing/2014/main" id="{4EC13A99-6DA2-4723-AF34-33719C774A41}"/>
+                <a16:creationId xmlns:a16="http://schemas.microsoft.com/office/drawing/2014/main" id="{B29FB346-4283-4E6A-8FE6-04F45007D443}"/>
               </a:ext>
             </a:extLst>
           </p:cNvPr>
@@ -6687,7 +9203,7 @@
           <p:cNvPr id="20" name="">
             <a:extLst xmlns:a="http://schemas.openxmlformats.org/drawingml/2006/main">
               <a:ext uri="{FF2B5EF4-FFF2-40B4-BE49-F238E27FC236}">
-                <a16:creationId xmlns:a16="http://schemas.microsoft.com/office/drawing/2014/main" id="{0D57AD8B-E5FF-43B0-BCCE-3F126686A86D}"/>
+                <a16:creationId xmlns:a16="http://schemas.microsoft.com/office/drawing/2014/main" id="{DEADB747-797E-4186-A1D1-8482CC8D5778}"/>
               </a:ext>
             </a:extLst>
           </p:cNvPr>
@@ -6751,7 +9267,7 @@
           <p:cNvPr id="21" name="">
             <a:extLst xmlns:a="http://schemas.openxmlformats.org/drawingml/2006/main">
               <a:ext uri="{FF2B5EF4-FFF2-40B4-BE49-F238E27FC236}">
-                <a16:creationId xmlns:a16="http://schemas.microsoft.com/office/drawing/2014/main" id="{CFA626B5-E37A-46C3-BCB4-6BFE0C035D16}"/>
+                <a16:creationId xmlns:a16="http://schemas.microsoft.com/office/drawing/2014/main" id="{7450D917-72B9-4B09-A7C0-662DB62D35B0}"/>
               </a:ext>
             </a:extLst>
           </p:cNvPr>
@@ -6784,7 +9300,7 @@
           <p:cNvPr id="22" name="">
             <a:extLst xmlns:a="http://schemas.openxmlformats.org/drawingml/2006/main">
               <a:ext uri="{FF2B5EF4-FFF2-40B4-BE49-F238E27FC236}">
-                <a16:creationId xmlns:a16="http://schemas.microsoft.com/office/drawing/2014/main" id="{84FF8795-3835-409B-9A6D-200BF2634896}"/>
+                <a16:creationId xmlns:a16="http://schemas.microsoft.com/office/drawing/2014/main" id="{167E76B8-E0D2-4352-A9FD-96B5B607394C}"/>
               </a:ext>
             </a:extLst>
           </p:cNvPr>
@@ -6848,7 +9364,7 @@
           <p:cNvPr id="23" name="">
             <a:extLst xmlns:a="http://schemas.openxmlformats.org/drawingml/2006/main">
               <a:ext uri="{FF2B5EF4-FFF2-40B4-BE49-F238E27FC236}">
-                <a16:creationId xmlns:a16="http://schemas.microsoft.com/office/drawing/2014/main" id="{2CEF6AFF-C05A-4319-B626-C61593E88B3F}"/>
+                <a16:creationId xmlns:a16="http://schemas.microsoft.com/office/drawing/2014/main" id="{B45A3F2E-6E85-4B2F-89EF-C95D877EBDAE}"/>
               </a:ext>
             </a:extLst>
           </p:cNvPr>
@@ -6912,7 +9428,7 @@
           <p:cNvPr id="24" name="">
             <a:extLst xmlns:a="http://schemas.openxmlformats.org/drawingml/2006/main">
               <a:ext uri="{FF2B5EF4-FFF2-40B4-BE49-F238E27FC236}">
-                <a16:creationId xmlns:a16="http://schemas.microsoft.com/office/drawing/2014/main" id="{F75B5139-F36C-49E0-9E2B-1B603055FB44}"/>
+                <a16:creationId xmlns:a16="http://schemas.microsoft.com/office/drawing/2014/main" id="{33C33FFB-AB92-4AE4-BE2A-C13F30B30363}"/>
               </a:ext>
             </a:extLst>
           </p:cNvPr>
@@ -6976,7 +9492,7 @@
           <p:cNvPr id="25" name="">
             <a:extLst xmlns:a="http://schemas.openxmlformats.org/drawingml/2006/main">
               <a:ext uri="{FF2B5EF4-FFF2-40B4-BE49-F238E27FC236}">
-                <a16:creationId xmlns:a16="http://schemas.microsoft.com/office/drawing/2014/main" id="{24F5FF66-0110-4D35-AE80-24B26FE91981}"/>
+                <a16:creationId xmlns:a16="http://schemas.microsoft.com/office/drawing/2014/main" id="{1012EE2A-96D8-4EBC-B622-BB38E84A21D5}"/>
               </a:ext>
             </a:extLst>
           </p:cNvPr>
@@ -7038,7 +9554,7 @@
     </p:spTree>
     <p:extLst>
       <p:ext uri="{BB962C8B-B14F-4D97-AF65-F5344CB8AC3E}">
-        <p14:creationId xmlns:p14="http://schemas.microsoft.com/office/powerpoint/2010/main" val="1360636964"/>
+        <p14:creationId xmlns:p14="http://schemas.microsoft.com/office/powerpoint/2010/main" val="1620306167"/>
       </p:ext>
     </p:extLst>
   </p:cSld>
@@ -7062,7 +9578,7 @@
           <p:cNvPr id="1" name="">
             <a:extLst xmlns:a="http://schemas.openxmlformats.org/drawingml/2006/main">
               <a:ext uri="{FF2B5EF4-FFF2-40B4-BE49-F238E27FC236}">
-                <a16:creationId xmlns:a16="http://schemas.microsoft.com/office/drawing/2014/main" id="{11FE45CB-3F56-4771-913B-9A53B2EA9474}"/>
+                <a16:creationId xmlns:a16="http://schemas.microsoft.com/office/drawing/2014/main" id="{95ED5D45-79A3-4B69-82E0-D22C6C9721CA}"/>
               </a:ext>
             </a:extLst>
           </p:cNvPr>
@@ -7097,7 +9613,7 @@
           <p:cNvPr id="2" name="kicker-marker">
             <a:extLst xmlns:a="http://schemas.openxmlformats.org/drawingml/2006/main">
               <a:ext uri="{FF2B5EF4-FFF2-40B4-BE49-F238E27FC236}">
-                <a16:creationId xmlns:a16="http://schemas.microsoft.com/office/drawing/2014/main" id="{CB1207E3-248B-4BD8-BD20-48BC1612F009}"/>
+                <a16:creationId xmlns:a16="http://schemas.microsoft.com/office/drawing/2014/main" id="{B363EDCF-6DC6-43AA-AB4B-783F0AB40A63}"/>
               </a:ext>
             </a:extLst>
           </p:cNvPr>
@@ -7132,7 +9648,7 @@
           <p:cNvPr id="3" name="kicker-label">
             <a:extLst xmlns:a="http://schemas.openxmlformats.org/drawingml/2006/main">
               <a:ext uri="{FF2B5EF4-FFF2-40B4-BE49-F238E27FC236}">
-                <a16:creationId xmlns:a16="http://schemas.microsoft.com/office/drawing/2014/main" id="{D7F5C948-6E4B-4E17-A826-571B68645440}"/>
+                <a16:creationId xmlns:a16="http://schemas.microsoft.com/office/drawing/2014/main" id="{27CDE031-275D-41EE-B9B0-048744859E4F}"/>
               </a:ext>
             </a:extLst>
           </p:cNvPr>
@@ -7196,7 +9712,7 @@
           <p:cNvPr id="4" name="">
             <a:extLst xmlns:a="http://schemas.openxmlformats.org/drawingml/2006/main">
               <a:ext uri="{FF2B5EF4-FFF2-40B4-BE49-F238E27FC236}">
-                <a16:creationId xmlns:a16="http://schemas.microsoft.com/office/drawing/2014/main" id="{6BD25638-5E66-4835-9B8C-562A54F3F085}"/>
+                <a16:creationId xmlns:a16="http://schemas.microsoft.com/office/drawing/2014/main" id="{48B093C4-1DE1-43C2-965B-21651D5318CF}"/>
               </a:ext>
             </a:extLst>
           </p:cNvPr>
@@ -7260,7 +9776,7 @@
           <p:cNvPr id="5" name="">
             <a:extLst xmlns:a="http://schemas.openxmlformats.org/drawingml/2006/main">
               <a:ext uri="{FF2B5EF4-FFF2-40B4-BE49-F238E27FC236}">
-                <a16:creationId xmlns:a16="http://schemas.microsoft.com/office/drawing/2014/main" id="{86FD9002-7B2D-4FFF-BCFC-6C68085B1524}"/>
+                <a16:creationId xmlns:a16="http://schemas.microsoft.com/office/drawing/2014/main" id="{C3BC4A3D-8853-468D-B97D-26E0E65353C0}"/>
               </a:ext>
             </a:extLst>
           </p:cNvPr>
@@ -7293,7 +9809,7 @@
           <p:cNvPr id="6" name="">
             <a:extLst xmlns:a="http://schemas.openxmlformats.org/drawingml/2006/main">
               <a:ext uri="{FF2B5EF4-FFF2-40B4-BE49-F238E27FC236}">
-                <a16:creationId xmlns:a16="http://schemas.microsoft.com/office/drawing/2014/main" id="{2769E578-C47F-4565-A559-590575C6B6FE}"/>
+                <a16:creationId xmlns:a16="http://schemas.microsoft.com/office/drawing/2014/main" id="{0760A809-CDE3-4E46-AB86-7B9B1C4B2722}"/>
               </a:ext>
             </a:extLst>
           </p:cNvPr>
@@ -7357,7 +9873,7 @@
           <p:cNvPr id="7" name="">
             <a:extLst xmlns:a="http://schemas.openxmlformats.org/drawingml/2006/main">
               <a:ext uri="{FF2B5EF4-FFF2-40B4-BE49-F238E27FC236}">
-                <a16:creationId xmlns:a16="http://schemas.microsoft.com/office/drawing/2014/main" id="{72837B27-94AA-478A-BD69-43E9BDAA1058}"/>
+                <a16:creationId xmlns:a16="http://schemas.microsoft.com/office/drawing/2014/main" id="{0FEC5587-0E07-4A80-8381-A648C8E3135D}"/>
               </a:ext>
             </a:extLst>
           </p:cNvPr>
@@ -7390,7 +9906,7 @@
           <p:cNvPr id="8" name="">
             <a:extLst xmlns:a="http://schemas.openxmlformats.org/drawingml/2006/main">
               <a:ext uri="{FF2B5EF4-FFF2-40B4-BE49-F238E27FC236}">
-                <a16:creationId xmlns:a16="http://schemas.microsoft.com/office/drawing/2014/main" id="{7FE977D2-4A13-49FB-9D84-D764D2E8EB8C}"/>
+                <a16:creationId xmlns:a16="http://schemas.microsoft.com/office/drawing/2014/main" id="{CC90F479-088A-4140-B1D0-5E8F12C64C32}"/>
               </a:ext>
             </a:extLst>
           </p:cNvPr>
@@ -7454,7 +9970,7 @@
           <p:cNvPr id="9" name="">
             <a:extLst xmlns:a="http://schemas.openxmlformats.org/drawingml/2006/main">
               <a:ext uri="{FF2B5EF4-FFF2-40B4-BE49-F238E27FC236}">
-                <a16:creationId xmlns:a16="http://schemas.microsoft.com/office/drawing/2014/main" id="{19411D9B-5D03-4FA0-9508-44F917F838D4}"/>
+                <a16:creationId xmlns:a16="http://schemas.microsoft.com/office/drawing/2014/main" id="{C401DF2D-C97E-4BF4-A82E-C617BB2CD0FA}"/>
               </a:ext>
             </a:extLst>
           </p:cNvPr>
@@ -7487,7 +10003,7 @@
           <p:cNvPr id="10" name="">
             <a:extLst xmlns:a="http://schemas.openxmlformats.org/drawingml/2006/main">
               <a:ext uri="{FF2B5EF4-FFF2-40B4-BE49-F238E27FC236}">
-                <a16:creationId xmlns:a16="http://schemas.microsoft.com/office/drawing/2014/main" id="{4BEB2DAF-8464-4761-B53F-0E9EB90EB64C}"/>
+                <a16:creationId xmlns:a16="http://schemas.microsoft.com/office/drawing/2014/main" id="{374F1470-F504-484C-9435-153EBD4095EC}"/>
               </a:ext>
             </a:extLst>
           </p:cNvPr>
@@ -7551,7 +10067,7 @@
           <p:cNvPr id="11" name="">
             <a:extLst xmlns:a="http://schemas.openxmlformats.org/drawingml/2006/main">
               <a:ext uri="{FF2B5EF4-FFF2-40B4-BE49-F238E27FC236}">
-                <a16:creationId xmlns:a16="http://schemas.microsoft.com/office/drawing/2014/main" id="{8D9A188D-771B-4AB8-A9FB-E2D3D5FB6C2E}"/>
+                <a16:creationId xmlns:a16="http://schemas.microsoft.com/office/drawing/2014/main" id="{C26A2C08-3428-4DEF-8985-F823AA8FAE2E}"/>
               </a:ext>
             </a:extLst>
           </p:cNvPr>
@@ -7584,7 +10100,7 @@
           <p:cNvPr id="12" name="">
             <a:extLst xmlns:a="http://schemas.openxmlformats.org/drawingml/2006/main">
               <a:ext uri="{FF2B5EF4-FFF2-40B4-BE49-F238E27FC236}">
-                <a16:creationId xmlns:a16="http://schemas.microsoft.com/office/drawing/2014/main" id="{BA2F086A-6E7C-4649-8687-49ABEC4C8E3B}"/>
+                <a16:creationId xmlns:a16="http://schemas.microsoft.com/office/drawing/2014/main" id="{DC7526F9-A0EB-43CB-B607-EEC898E1566F}"/>
               </a:ext>
             </a:extLst>
           </p:cNvPr>
@@ -7648,7 +10164,7 @@
           <p:cNvPr id="13" name="">
             <a:extLst xmlns:a="http://schemas.openxmlformats.org/drawingml/2006/main">
               <a:ext uri="{FF2B5EF4-FFF2-40B4-BE49-F238E27FC236}">
-                <a16:creationId xmlns:a16="http://schemas.microsoft.com/office/drawing/2014/main" id="{C8738726-FEF9-4D54-966A-EB6E37117C17}"/>
+                <a16:creationId xmlns:a16="http://schemas.microsoft.com/office/drawing/2014/main" id="{484DC561-B01F-4DB2-BD40-5B8182B967A2}"/>
               </a:ext>
             </a:extLst>
           </p:cNvPr>
@@ -7681,7 +10197,7 @@
           <p:cNvPr id="14" name="">
             <a:extLst xmlns:a="http://schemas.openxmlformats.org/drawingml/2006/main">
               <a:ext uri="{FF2B5EF4-FFF2-40B4-BE49-F238E27FC236}">
-                <a16:creationId xmlns:a16="http://schemas.microsoft.com/office/drawing/2014/main" id="{F38EEA12-3EFE-4F02-998A-3806CB8B8F2A}"/>
+                <a16:creationId xmlns:a16="http://schemas.microsoft.com/office/drawing/2014/main" id="{439366AB-3EEE-4F21-8063-873ED99C3908}"/>
               </a:ext>
             </a:extLst>
           </p:cNvPr>
@@ -7745,7 +10261,7 @@
           <p:cNvPr id="15" name="">
             <a:extLst xmlns:a="http://schemas.openxmlformats.org/drawingml/2006/main">
               <a:ext uri="{FF2B5EF4-FFF2-40B4-BE49-F238E27FC236}">
-                <a16:creationId xmlns:a16="http://schemas.microsoft.com/office/drawing/2014/main" id="{D6A627DE-6284-4205-A6B3-C1B93F1D31FB}"/>
+                <a16:creationId xmlns:a16="http://schemas.microsoft.com/office/drawing/2014/main" id="{B85FDD26-852E-4A60-B787-A17CE87DD039}"/>
               </a:ext>
             </a:extLst>
           </p:cNvPr>
@@ -7778,7 +10294,7 @@
           <p:cNvPr id="16" name="">
             <a:extLst xmlns:a="http://schemas.openxmlformats.org/drawingml/2006/main">
               <a:ext uri="{FF2B5EF4-FFF2-40B4-BE49-F238E27FC236}">
-                <a16:creationId xmlns:a16="http://schemas.microsoft.com/office/drawing/2014/main" id="{EA9EEB2E-4531-4F26-9C5C-29C617E6192B}"/>
+                <a16:creationId xmlns:a16="http://schemas.microsoft.com/office/drawing/2014/main" id="{638E2CE8-30D1-40E8-A62C-97DC326F89A0}"/>
               </a:ext>
             </a:extLst>
           </p:cNvPr>
@@ -7842,7 +10358,7 @@
           <p:cNvPr id="17" name="">
             <a:extLst xmlns:a="http://schemas.openxmlformats.org/drawingml/2006/main">
               <a:ext uri="{FF2B5EF4-FFF2-40B4-BE49-F238E27FC236}">
-                <a16:creationId xmlns:a16="http://schemas.microsoft.com/office/drawing/2014/main" id="{DF81C12E-B971-4BF1-898F-0A6AAD0595B0}"/>
+                <a16:creationId xmlns:a16="http://schemas.microsoft.com/office/drawing/2014/main" id="{F473E298-F8B0-4C74-982E-8FD43C4D9EAA}"/>
               </a:ext>
             </a:extLst>
           </p:cNvPr>
@@ -7875,7 +10391,7 @@
           <p:cNvPr id="18" name="">
             <a:extLst xmlns:a="http://schemas.openxmlformats.org/drawingml/2006/main">
               <a:ext uri="{FF2B5EF4-FFF2-40B4-BE49-F238E27FC236}">
-                <a16:creationId xmlns:a16="http://schemas.microsoft.com/office/drawing/2014/main" id="{8C3CD70E-50F9-428C-89A4-755D7827A4CB}"/>
+                <a16:creationId xmlns:a16="http://schemas.microsoft.com/office/drawing/2014/main" id="{910EBEC6-3569-475B-97B5-8050E8627ADF}"/>
               </a:ext>
             </a:extLst>
           </p:cNvPr>
@@ -7939,7 +10455,7 @@
           <p:cNvPr id="19" name="">
             <a:extLst xmlns:a="http://schemas.openxmlformats.org/drawingml/2006/main">
               <a:ext uri="{FF2B5EF4-FFF2-40B4-BE49-F238E27FC236}">
-                <a16:creationId xmlns:a16="http://schemas.microsoft.com/office/drawing/2014/main" id="{909FA47F-D1F9-4A54-AD8F-95A57B3D9923}"/>
+                <a16:creationId xmlns:a16="http://schemas.microsoft.com/office/drawing/2014/main" id="{2A8397CC-5DA1-4664-A576-5B58EAD32CF6}"/>
               </a:ext>
             </a:extLst>
           </p:cNvPr>
@@ -7972,7 +10488,7 @@
           <p:cNvPr id="20" name="">
             <a:extLst xmlns:a="http://schemas.openxmlformats.org/drawingml/2006/main">
               <a:ext uri="{FF2B5EF4-FFF2-40B4-BE49-F238E27FC236}">
-                <a16:creationId xmlns:a16="http://schemas.microsoft.com/office/drawing/2014/main" id="{01CDCB54-3C70-49C0-8CC6-6E0BA360190F}"/>
+                <a16:creationId xmlns:a16="http://schemas.microsoft.com/office/drawing/2014/main" id="{D03B36F2-90F6-43E4-BBA8-6D3895DE9AE5}"/>
               </a:ext>
             </a:extLst>
           </p:cNvPr>
@@ -8036,7 +10552,7 @@
           <p:cNvPr id="21" name="">
             <a:extLst xmlns:a="http://schemas.openxmlformats.org/drawingml/2006/main">
               <a:ext uri="{FF2B5EF4-FFF2-40B4-BE49-F238E27FC236}">
-                <a16:creationId xmlns:a16="http://schemas.microsoft.com/office/drawing/2014/main" id="{0F084815-150A-417B-BB1A-F840CC1C92FA}"/>
+                <a16:creationId xmlns:a16="http://schemas.microsoft.com/office/drawing/2014/main" id="{6EB29B1B-82AF-44B5-9810-C0047CF678FB}"/>
               </a:ext>
             </a:extLst>
           </p:cNvPr>
@@ -8100,7 +10616,7 @@
           <p:cNvPr id="22" name="">
             <a:extLst xmlns:a="http://schemas.openxmlformats.org/drawingml/2006/main">
               <a:ext uri="{FF2B5EF4-FFF2-40B4-BE49-F238E27FC236}">
-                <a16:creationId xmlns:a16="http://schemas.microsoft.com/office/drawing/2014/main" id="{5C0FC2AB-7C6D-4FA7-84FC-A1E1BAAAB91B}"/>
+                <a16:creationId xmlns:a16="http://schemas.microsoft.com/office/drawing/2014/main" id="{553591CD-64E8-4987-AEBC-924EE1EFF5A0}"/>
               </a:ext>
             </a:extLst>
           </p:cNvPr>
@@ -8135,7 +10651,7 @@
           <p:cNvPr id="23" name="">
             <a:extLst xmlns:a="http://schemas.openxmlformats.org/drawingml/2006/main">
               <a:ext uri="{FF2B5EF4-FFF2-40B4-BE49-F238E27FC236}">
-                <a16:creationId xmlns:a16="http://schemas.microsoft.com/office/drawing/2014/main" id="{7246017F-3500-44B2-920C-F52867972925}"/>
+                <a16:creationId xmlns:a16="http://schemas.microsoft.com/office/drawing/2014/main" id="{8CA9F109-3C93-4F55-B21D-F2802CC1A873}"/>
               </a:ext>
             </a:extLst>
           </p:cNvPr>
@@ -8170,7 +10686,7 @@
           <p:cNvPr id="24" name="">
             <a:extLst xmlns:a="http://schemas.openxmlformats.org/drawingml/2006/main">
               <a:ext uri="{FF2B5EF4-FFF2-40B4-BE49-F238E27FC236}">
-                <a16:creationId xmlns:a16="http://schemas.microsoft.com/office/drawing/2014/main" id="{BF600A56-2874-4854-90C8-3176BD20B962}"/>
+                <a16:creationId xmlns:a16="http://schemas.microsoft.com/office/drawing/2014/main" id="{D7D20029-1E1B-4718-B71B-4F37C6AB3B31}"/>
               </a:ext>
             </a:extLst>
           </p:cNvPr>
@@ -8205,7 +10721,7 @@
           <p:cNvPr id="25" name="">
             <a:extLst xmlns:a="http://schemas.openxmlformats.org/drawingml/2006/main">
               <a:ext uri="{FF2B5EF4-FFF2-40B4-BE49-F238E27FC236}">
-                <a16:creationId xmlns:a16="http://schemas.microsoft.com/office/drawing/2014/main" id="{274B3573-D68B-4BB7-A13A-4E074D710F1E}"/>
+                <a16:creationId xmlns:a16="http://schemas.microsoft.com/office/drawing/2014/main" id="{8421A28A-67CA-4FA9-9F2D-0069398C6824}"/>
               </a:ext>
             </a:extLst>
           </p:cNvPr>
@@ -8240,7 +10756,7 @@
           <p:cNvPr id="26" name="">
             <a:extLst xmlns:a="http://schemas.openxmlformats.org/drawingml/2006/main">
               <a:ext uri="{FF2B5EF4-FFF2-40B4-BE49-F238E27FC236}">
-                <a16:creationId xmlns:a16="http://schemas.microsoft.com/office/drawing/2014/main" id="{7A92D171-1E7D-427E-8856-311B1364CEC7}"/>
+                <a16:creationId xmlns:a16="http://schemas.microsoft.com/office/drawing/2014/main" id="{A36CCFC8-50B4-4804-A8D2-01F6C6A14ADE}"/>
               </a:ext>
             </a:extLst>
           </p:cNvPr>
@@ -8273,7 +10789,7 @@
           <p:cNvPr id="27" name="">
             <a:extLst xmlns:a="http://schemas.openxmlformats.org/drawingml/2006/main">
               <a:ext uri="{FF2B5EF4-FFF2-40B4-BE49-F238E27FC236}">
-                <a16:creationId xmlns:a16="http://schemas.microsoft.com/office/drawing/2014/main" id="{762C3965-A690-429B-8197-8CDB53F94241}"/>
+                <a16:creationId xmlns:a16="http://schemas.microsoft.com/office/drawing/2014/main" id="{F49F9B57-B063-42F5-AC39-7FBFEC1C8C3B}"/>
               </a:ext>
             </a:extLst>
           </p:cNvPr>
@@ -8337,7 +10853,7 @@
           <p:cNvPr id="28" name="">
             <a:extLst xmlns:a="http://schemas.openxmlformats.org/drawingml/2006/main">
               <a:ext uri="{FF2B5EF4-FFF2-40B4-BE49-F238E27FC236}">
-                <a16:creationId xmlns:a16="http://schemas.microsoft.com/office/drawing/2014/main" id="{D82EBC9F-0484-4A53-B006-E02398DC5A05}"/>
+                <a16:creationId xmlns:a16="http://schemas.microsoft.com/office/drawing/2014/main" id="{6E258760-756A-48BB-AFB9-8F6F2F8F193C}"/>
               </a:ext>
             </a:extLst>
           </p:cNvPr>
@@ -8401,7 +10917,7 @@
           <p:cNvPr id="29" name="">
             <a:extLst xmlns:a="http://schemas.openxmlformats.org/drawingml/2006/main">
               <a:ext uri="{FF2B5EF4-FFF2-40B4-BE49-F238E27FC236}">
-                <a16:creationId xmlns:a16="http://schemas.microsoft.com/office/drawing/2014/main" id="{41E31F33-C8E6-4C5E-AA74-FEFB7FDC2DD1}"/>
+                <a16:creationId xmlns:a16="http://schemas.microsoft.com/office/drawing/2014/main" id="{AF28F9A3-4FEE-4D7E-8307-D2A3949E48FC}"/>
               </a:ext>
             </a:extLst>
           </p:cNvPr>
@@ -8434,7 +10950,7 @@
           <p:cNvPr id="30" name="">
             <a:extLst xmlns:a="http://schemas.openxmlformats.org/drawingml/2006/main">
               <a:ext uri="{FF2B5EF4-FFF2-40B4-BE49-F238E27FC236}">
-                <a16:creationId xmlns:a16="http://schemas.microsoft.com/office/drawing/2014/main" id="{89CA5680-0FA2-4007-B7C6-7DA45EFB2846}"/>
+                <a16:creationId xmlns:a16="http://schemas.microsoft.com/office/drawing/2014/main" id="{7378C523-A185-4183-9497-B85DE488FF07}"/>
               </a:ext>
             </a:extLst>
           </p:cNvPr>
@@ -8498,7 +11014,7 @@
           <p:cNvPr id="31" name="">
             <a:extLst xmlns:a="http://schemas.openxmlformats.org/drawingml/2006/main">
               <a:ext uri="{FF2B5EF4-FFF2-40B4-BE49-F238E27FC236}">
-                <a16:creationId xmlns:a16="http://schemas.microsoft.com/office/drawing/2014/main" id="{CF9133C3-DEB6-49EA-A6DD-DE1AA35A0AB8}"/>
+                <a16:creationId xmlns:a16="http://schemas.microsoft.com/office/drawing/2014/main" id="{6FC9B1EC-944A-485D-848A-0C928B7336AD}"/>
               </a:ext>
             </a:extLst>
           </p:cNvPr>
@@ -8562,7 +11078,7 @@
           <p:cNvPr id="32" name="">
             <a:extLst xmlns:a="http://schemas.openxmlformats.org/drawingml/2006/main">
               <a:ext uri="{FF2B5EF4-FFF2-40B4-BE49-F238E27FC236}">
-                <a16:creationId xmlns:a16="http://schemas.microsoft.com/office/drawing/2014/main" id="{9DF56A8E-01C2-4C2C-B0F0-892946FF5B91}"/>
+                <a16:creationId xmlns:a16="http://schemas.microsoft.com/office/drawing/2014/main" id="{16E46E50-6371-4744-AECB-29240AD3C8F6}"/>
               </a:ext>
             </a:extLst>
           </p:cNvPr>
@@ -8595,7 +11111,7 @@
           <p:cNvPr id="33" name="">
             <a:extLst xmlns:a="http://schemas.openxmlformats.org/drawingml/2006/main">
               <a:ext uri="{FF2B5EF4-FFF2-40B4-BE49-F238E27FC236}">
-                <a16:creationId xmlns:a16="http://schemas.microsoft.com/office/drawing/2014/main" id="{F8FADD16-1513-4A36-878A-F42440495B25}"/>
+                <a16:creationId xmlns:a16="http://schemas.microsoft.com/office/drawing/2014/main" id="{FA9B2CC1-204F-41C1-9C97-1ACA569A9528}"/>
               </a:ext>
             </a:extLst>
           </p:cNvPr>
@@ -8659,7 +11175,7 @@
           <p:cNvPr id="34" name="">
             <a:extLst xmlns:a="http://schemas.openxmlformats.org/drawingml/2006/main">
               <a:ext uri="{FF2B5EF4-FFF2-40B4-BE49-F238E27FC236}">
-                <a16:creationId xmlns:a16="http://schemas.microsoft.com/office/drawing/2014/main" id="{3EF586AE-BF26-4362-B3A7-679EB57315B3}"/>
+                <a16:creationId xmlns:a16="http://schemas.microsoft.com/office/drawing/2014/main" id="{32620F81-20CF-4FD3-A603-2239D7FFB13D}"/>
               </a:ext>
             </a:extLst>
           </p:cNvPr>
@@ -8723,7 +11239,7 @@
           <p:cNvPr id="35" name="">
             <a:extLst xmlns:a="http://schemas.openxmlformats.org/drawingml/2006/main">
               <a:ext uri="{FF2B5EF4-FFF2-40B4-BE49-F238E27FC236}">
-                <a16:creationId xmlns:a16="http://schemas.microsoft.com/office/drawing/2014/main" id="{1980F333-1111-4644-8606-E4282680793F}"/>
+                <a16:creationId xmlns:a16="http://schemas.microsoft.com/office/drawing/2014/main" id="{337C4E38-32A4-434A-9141-175B3E06B0DD}"/>
               </a:ext>
             </a:extLst>
           </p:cNvPr>
@@ -8756,7 +11272,7 @@
           <p:cNvPr id="36" name="">
             <a:extLst xmlns:a="http://schemas.openxmlformats.org/drawingml/2006/main">
               <a:ext uri="{FF2B5EF4-FFF2-40B4-BE49-F238E27FC236}">
-                <a16:creationId xmlns:a16="http://schemas.microsoft.com/office/drawing/2014/main" id="{1B7E5E7B-C463-4467-B4A1-259EC57A18F4}"/>
+                <a16:creationId xmlns:a16="http://schemas.microsoft.com/office/drawing/2014/main" id="{2AD950F3-26F3-4A72-A021-2405040E8FF0}"/>
               </a:ext>
             </a:extLst>
           </p:cNvPr>
@@ -8820,7 +11336,7 @@
           <p:cNvPr id="37" name="">
             <a:extLst xmlns:a="http://schemas.openxmlformats.org/drawingml/2006/main">
               <a:ext uri="{FF2B5EF4-FFF2-40B4-BE49-F238E27FC236}">
-                <a16:creationId xmlns:a16="http://schemas.microsoft.com/office/drawing/2014/main" id="{A71D7B30-C560-4AAB-864D-03E96B4102B4}"/>
+                <a16:creationId xmlns:a16="http://schemas.microsoft.com/office/drawing/2014/main" id="{8013E452-BE84-49CF-8EF6-F7C90871DB0B}"/>
               </a:ext>
             </a:extLst>
           </p:cNvPr>
@@ -8884,7 +11400,7 @@
           <p:cNvPr id="38" name="">
             <a:extLst xmlns:a="http://schemas.openxmlformats.org/drawingml/2006/main">
               <a:ext uri="{FF2B5EF4-FFF2-40B4-BE49-F238E27FC236}">
-                <a16:creationId xmlns:a16="http://schemas.microsoft.com/office/drawing/2014/main" id="{36C545E5-347A-4AF9-9C64-005DA9704367}"/>
+                <a16:creationId xmlns:a16="http://schemas.microsoft.com/office/drawing/2014/main" id="{CFE959A6-5ECD-4966-BF40-55ABEEA1D691}"/>
               </a:ext>
             </a:extLst>
           </p:cNvPr>
@@ -8948,7 +11464,7 @@
           <p:cNvPr id="39" name="">
             <a:extLst xmlns:a="http://schemas.openxmlformats.org/drawingml/2006/main">
               <a:ext uri="{FF2B5EF4-FFF2-40B4-BE49-F238E27FC236}">
-                <a16:creationId xmlns:a16="http://schemas.microsoft.com/office/drawing/2014/main" id="{5C8096E9-C5C1-4E2D-98C1-75168321B7DD}"/>
+                <a16:creationId xmlns:a16="http://schemas.microsoft.com/office/drawing/2014/main" id="{2B6E5802-96CC-425E-9048-EF102BD1ADA2}"/>
               </a:ext>
             </a:extLst>
           </p:cNvPr>
@@ -9012,7 +11528,7 @@
           <p:cNvPr id="40" name="">
             <a:extLst xmlns:a="http://schemas.openxmlformats.org/drawingml/2006/main">
               <a:ext uri="{FF2B5EF4-FFF2-40B4-BE49-F238E27FC236}">
-                <a16:creationId xmlns:a16="http://schemas.microsoft.com/office/drawing/2014/main" id="{D2F96508-5737-4FA9-A5EF-6D291541B682}"/>
+                <a16:creationId xmlns:a16="http://schemas.microsoft.com/office/drawing/2014/main" id="{9A599E7B-BEFC-41F2-B903-2694DC5C4B74}"/>
               </a:ext>
             </a:extLst>
           </p:cNvPr>
@@ -9074,7 +11590,7 @@
     </p:spTree>
     <p:extLst>
       <p:ext uri="{BB962C8B-B14F-4D97-AF65-F5344CB8AC3E}">
-        <p14:creationId xmlns:p14="http://schemas.microsoft.com/office/powerpoint/2010/main" val="1402942077"/>
+        <p14:creationId xmlns:p14="http://schemas.microsoft.com/office/powerpoint/2010/main" val="1487862733"/>
       </p:ext>
     </p:extLst>
   </p:cSld>
@@ -9098,7 +11614,7 @@
           <p:cNvPr id="1" name="">
             <a:extLst xmlns:a="http://schemas.openxmlformats.org/drawingml/2006/main">
               <a:ext uri="{FF2B5EF4-FFF2-40B4-BE49-F238E27FC236}">
-                <a16:creationId xmlns:a16="http://schemas.microsoft.com/office/drawing/2014/main" id="{9648377D-F05D-4594-98A4-7EC22D13E91E}"/>
+                <a16:creationId xmlns:a16="http://schemas.microsoft.com/office/drawing/2014/main" id="{2165BFCA-2552-4AE6-8C2D-8F69F40C1034}"/>
               </a:ext>
             </a:extLst>
           </p:cNvPr>
@@ -9133,7 +11649,7 @@
           <p:cNvPr id="2" name="kicker-marker">
             <a:extLst xmlns:a="http://schemas.openxmlformats.org/drawingml/2006/main">
               <a:ext uri="{FF2B5EF4-FFF2-40B4-BE49-F238E27FC236}">
-                <a16:creationId xmlns:a16="http://schemas.microsoft.com/office/drawing/2014/main" id="{02FF5725-0581-41B8-81E3-7497EBB38D97}"/>
+                <a16:creationId xmlns:a16="http://schemas.microsoft.com/office/drawing/2014/main" id="{4A2FB38E-8812-4D70-83D3-1AE69B3F5FCB}"/>
               </a:ext>
             </a:extLst>
           </p:cNvPr>
@@ -9168,7 +11684,7 @@
           <p:cNvPr id="3" name="kicker-label">
             <a:extLst xmlns:a="http://schemas.openxmlformats.org/drawingml/2006/main">
               <a:ext uri="{FF2B5EF4-FFF2-40B4-BE49-F238E27FC236}">
-                <a16:creationId xmlns:a16="http://schemas.microsoft.com/office/drawing/2014/main" id="{ABB395A4-224A-45B9-9E24-0339919921C8}"/>
+                <a16:creationId xmlns:a16="http://schemas.microsoft.com/office/drawing/2014/main" id="{FAF5836B-0A19-486C-A897-AA325F5C652B}"/>
               </a:ext>
             </a:extLst>
           </p:cNvPr>
@@ -9232,7 +11748,7 @@
           <p:cNvPr id="4" name="">
             <a:extLst xmlns:a="http://schemas.openxmlformats.org/drawingml/2006/main">
               <a:ext uri="{FF2B5EF4-FFF2-40B4-BE49-F238E27FC236}">
-                <a16:creationId xmlns:a16="http://schemas.microsoft.com/office/drawing/2014/main" id="{0D81C6D0-7DA0-4D3B-8238-C0C581A877DB}"/>
+                <a16:creationId xmlns:a16="http://schemas.microsoft.com/office/drawing/2014/main" id="{833290D5-8511-4BAE-9EED-EA201BE9E6F0}"/>
               </a:ext>
             </a:extLst>
           </p:cNvPr>
@@ -9296,7 +11812,7 @@
           <p:cNvPr id="5" name="">
             <a:extLst xmlns:a="http://schemas.openxmlformats.org/drawingml/2006/main">
               <a:ext uri="{FF2B5EF4-FFF2-40B4-BE49-F238E27FC236}">
-                <a16:creationId xmlns:a16="http://schemas.microsoft.com/office/drawing/2014/main" id="{EE5B154E-AD2F-40EA-9171-922E70B1EA55}"/>
+                <a16:creationId xmlns:a16="http://schemas.microsoft.com/office/drawing/2014/main" id="{1CDFD466-0000-4ABE-9505-590526DA67CA}"/>
               </a:ext>
             </a:extLst>
           </p:cNvPr>
@@ -9329,7 +11845,7 @@
           <p:cNvPr id="6" name="">
             <a:extLst xmlns:a="http://schemas.openxmlformats.org/drawingml/2006/main">
               <a:ext uri="{FF2B5EF4-FFF2-40B4-BE49-F238E27FC236}">
-                <a16:creationId xmlns:a16="http://schemas.microsoft.com/office/drawing/2014/main" id="{0240274C-C241-4C92-977A-511DC49BA2D2}"/>
+                <a16:creationId xmlns:a16="http://schemas.microsoft.com/office/drawing/2014/main" id="{717AA6CE-A965-4560-B89F-837554561A9A}"/>
               </a:ext>
             </a:extLst>
           </p:cNvPr>
@@ -9364,7 +11880,7 @@
           <p:cNvPr id="7" name="">
             <a:extLst xmlns:a="http://schemas.openxmlformats.org/drawingml/2006/main">
               <a:ext uri="{FF2B5EF4-FFF2-40B4-BE49-F238E27FC236}">
-                <a16:creationId xmlns:a16="http://schemas.microsoft.com/office/drawing/2014/main" id="{89D4647D-8902-43AC-BFD1-3F58CBCE3018}"/>
+                <a16:creationId xmlns:a16="http://schemas.microsoft.com/office/drawing/2014/main" id="{5FABA7AC-E42A-4157-B0A3-E36BB6DA621D}"/>
               </a:ext>
             </a:extLst>
           </p:cNvPr>
@@ -9428,7 +11944,7 @@
           <p:cNvPr id="8" name="">
             <a:extLst xmlns:a="http://schemas.openxmlformats.org/drawingml/2006/main">
               <a:ext uri="{FF2B5EF4-FFF2-40B4-BE49-F238E27FC236}">
-                <a16:creationId xmlns:a16="http://schemas.microsoft.com/office/drawing/2014/main" id="{7B3115B0-9CDE-402E-B8BE-C5F00DFB85A9}"/>
+                <a16:creationId xmlns:a16="http://schemas.microsoft.com/office/drawing/2014/main" id="{BA6438A5-04FB-4D7A-851E-0E5CD06FCCC7}"/>
               </a:ext>
             </a:extLst>
           </p:cNvPr>
@@ -9492,7 +12008,7 @@
           <p:cNvPr id="9" name="">
             <a:extLst xmlns:a="http://schemas.openxmlformats.org/drawingml/2006/main">
               <a:ext uri="{FF2B5EF4-FFF2-40B4-BE49-F238E27FC236}">
-                <a16:creationId xmlns:a16="http://schemas.microsoft.com/office/drawing/2014/main" id="{6DAFDACA-29EA-4A1A-87CD-1D9A0C10CC58}"/>
+                <a16:creationId xmlns:a16="http://schemas.microsoft.com/office/drawing/2014/main" id="{A24FCEC2-5490-42A7-96CA-F9CAFF4BBA8C}"/>
               </a:ext>
             </a:extLst>
           </p:cNvPr>
@@ -9556,7 +12072,7 @@
           <p:cNvPr id="10" name="">
             <a:extLst xmlns:a="http://schemas.openxmlformats.org/drawingml/2006/main">
               <a:ext uri="{FF2B5EF4-FFF2-40B4-BE49-F238E27FC236}">
-                <a16:creationId xmlns:a16="http://schemas.microsoft.com/office/drawing/2014/main" id="{E55C10C1-C262-4C77-BC22-4BA69B110D28}"/>
+                <a16:creationId xmlns:a16="http://schemas.microsoft.com/office/drawing/2014/main" id="{FAA7B687-67ED-404A-BA3B-0C851170002E}"/>
               </a:ext>
             </a:extLst>
           </p:cNvPr>
@@ -9591,7 +12107,7 @@
           <p:cNvPr id="11" name="">
             <a:extLst xmlns:a="http://schemas.openxmlformats.org/drawingml/2006/main">
               <a:ext uri="{FF2B5EF4-FFF2-40B4-BE49-F238E27FC236}">
-                <a16:creationId xmlns:a16="http://schemas.microsoft.com/office/drawing/2014/main" id="{0C445209-8FE1-4814-8821-145BAFB01DDB}"/>
+                <a16:creationId xmlns:a16="http://schemas.microsoft.com/office/drawing/2014/main" id="{1F6BEDAA-2D65-4888-87C4-74C7239C9C78}"/>
               </a:ext>
             </a:extLst>
           </p:cNvPr>
@@ -9626,7 +12142,7 @@
           <p:cNvPr id="12" name="">
             <a:extLst xmlns:a="http://schemas.openxmlformats.org/drawingml/2006/main">
               <a:ext uri="{FF2B5EF4-FFF2-40B4-BE49-F238E27FC236}">
-                <a16:creationId xmlns:a16="http://schemas.microsoft.com/office/drawing/2014/main" id="{B99469A0-51A1-4123-AEB3-49572233B423}"/>
+                <a16:creationId xmlns:a16="http://schemas.microsoft.com/office/drawing/2014/main" id="{7A2193BE-F402-4A25-9C41-8596283E5B1A}"/>
               </a:ext>
             </a:extLst>
           </p:cNvPr>
@@ -9659,7 +12175,7 @@
           <p:cNvPr id="13" name="">
             <a:extLst xmlns:a="http://schemas.openxmlformats.org/drawingml/2006/main">
               <a:ext uri="{FF2B5EF4-FFF2-40B4-BE49-F238E27FC236}">
-                <a16:creationId xmlns:a16="http://schemas.microsoft.com/office/drawing/2014/main" id="{BA450CC6-A253-4887-8997-3D62FB44FC95}"/>
+                <a16:creationId xmlns:a16="http://schemas.microsoft.com/office/drawing/2014/main" id="{EA0B7CD3-56A0-47C9-9A94-4EAA39CEB078}"/>
               </a:ext>
             </a:extLst>
           </p:cNvPr>
@@ -9694,7 +12210,7 @@
           <p:cNvPr id="14" name="">
             <a:extLst xmlns:a="http://schemas.openxmlformats.org/drawingml/2006/main">
               <a:ext uri="{FF2B5EF4-FFF2-40B4-BE49-F238E27FC236}">
-                <a16:creationId xmlns:a16="http://schemas.microsoft.com/office/drawing/2014/main" id="{6A205685-8F1F-4B4D-B248-20A9D73D90B4}"/>
+                <a16:creationId xmlns:a16="http://schemas.microsoft.com/office/drawing/2014/main" id="{F0DA98D9-6B23-43AF-8848-C36522FC20AD}"/>
               </a:ext>
             </a:extLst>
           </p:cNvPr>
@@ -9758,7 +12274,7 @@
           <p:cNvPr id="15" name="">
             <a:extLst xmlns:a="http://schemas.openxmlformats.org/drawingml/2006/main">
               <a:ext uri="{FF2B5EF4-FFF2-40B4-BE49-F238E27FC236}">
-                <a16:creationId xmlns:a16="http://schemas.microsoft.com/office/drawing/2014/main" id="{B8B087BF-022F-44D2-BB56-FF26D4AB36ED}"/>
+                <a16:creationId xmlns:a16="http://schemas.microsoft.com/office/drawing/2014/main" id="{0183C0F1-6734-41E6-8043-4E685B2415B4}"/>
               </a:ext>
             </a:extLst>
           </p:cNvPr>
@@ -9822,7 +12338,7 @@
           <p:cNvPr id="16" name="">
             <a:extLst xmlns:a="http://schemas.openxmlformats.org/drawingml/2006/main">
               <a:ext uri="{FF2B5EF4-FFF2-40B4-BE49-F238E27FC236}">
-                <a16:creationId xmlns:a16="http://schemas.microsoft.com/office/drawing/2014/main" id="{A546F014-E953-4B65-A9D4-5B9B69F61E63}"/>
+                <a16:creationId xmlns:a16="http://schemas.microsoft.com/office/drawing/2014/main" id="{870BE37E-12A2-4356-861A-B1F3E78C3113}"/>
               </a:ext>
             </a:extLst>
           </p:cNvPr>
@@ -9886,7 +12402,7 @@
           <p:cNvPr id="17" name="">
             <a:extLst xmlns:a="http://schemas.openxmlformats.org/drawingml/2006/main">
               <a:ext uri="{FF2B5EF4-FFF2-40B4-BE49-F238E27FC236}">
-                <a16:creationId xmlns:a16="http://schemas.microsoft.com/office/drawing/2014/main" id="{AFC7D380-70D8-4661-AE73-C87737E8E508}"/>
+                <a16:creationId xmlns:a16="http://schemas.microsoft.com/office/drawing/2014/main" id="{77892B3A-E527-403F-AA0D-D230100DEBB9}"/>
               </a:ext>
             </a:extLst>
           </p:cNvPr>
@@ -9921,7 +12437,7 @@
           <p:cNvPr id="18" name="">
             <a:extLst xmlns:a="http://schemas.openxmlformats.org/drawingml/2006/main">
               <a:ext uri="{FF2B5EF4-FFF2-40B4-BE49-F238E27FC236}">
-                <a16:creationId xmlns:a16="http://schemas.microsoft.com/office/drawing/2014/main" id="{5A341BDF-AF67-4764-B0F9-168144B6CBFD}"/>
+                <a16:creationId xmlns:a16="http://schemas.microsoft.com/office/drawing/2014/main" id="{5BD91343-594A-4D88-B89C-7B6BC9BA7B67}"/>
               </a:ext>
             </a:extLst>
           </p:cNvPr>
@@ -9956,7 +12472,7 @@
           <p:cNvPr id="19" name="">
             <a:extLst xmlns:a="http://schemas.openxmlformats.org/drawingml/2006/main">
               <a:ext uri="{FF2B5EF4-FFF2-40B4-BE49-F238E27FC236}">
-                <a16:creationId xmlns:a16="http://schemas.microsoft.com/office/drawing/2014/main" id="{5E5CEE48-064A-4469-83CC-6577683C5586}"/>
+                <a16:creationId xmlns:a16="http://schemas.microsoft.com/office/drawing/2014/main" id="{31BC23E7-8AF5-4DC8-B432-31CFC9EDE4C5}"/>
               </a:ext>
             </a:extLst>
           </p:cNvPr>
@@ -9989,7 +12505,7 @@
           <p:cNvPr id="20" name="">
             <a:extLst xmlns:a="http://schemas.openxmlformats.org/drawingml/2006/main">
               <a:ext uri="{FF2B5EF4-FFF2-40B4-BE49-F238E27FC236}">
-                <a16:creationId xmlns:a16="http://schemas.microsoft.com/office/drawing/2014/main" id="{0AD745BA-9B12-4A38-A62B-9CFEEE5DAA42}"/>
+                <a16:creationId xmlns:a16="http://schemas.microsoft.com/office/drawing/2014/main" id="{87C21C25-19C5-4D6D-BA09-16A7CB80A80F}"/>
               </a:ext>
             </a:extLst>
           </p:cNvPr>
@@ -10024,7 +12540,7 @@
           <p:cNvPr id="21" name="">
             <a:extLst xmlns:a="http://schemas.openxmlformats.org/drawingml/2006/main">
               <a:ext uri="{FF2B5EF4-FFF2-40B4-BE49-F238E27FC236}">
-                <a16:creationId xmlns:a16="http://schemas.microsoft.com/office/drawing/2014/main" id="{1A266B0C-4C36-4FD0-AF06-967F8F157D73}"/>
+                <a16:creationId xmlns:a16="http://schemas.microsoft.com/office/drawing/2014/main" id="{C63CD37E-670C-466C-8F66-B240275571EA}"/>
               </a:ext>
             </a:extLst>
           </p:cNvPr>
@@ -10088,7 +12604,7 @@
           <p:cNvPr id="22" name="">
             <a:extLst xmlns:a="http://schemas.openxmlformats.org/drawingml/2006/main">
               <a:ext uri="{FF2B5EF4-FFF2-40B4-BE49-F238E27FC236}">
-                <a16:creationId xmlns:a16="http://schemas.microsoft.com/office/drawing/2014/main" id="{917D5E9D-CAE6-483C-B572-9206E60ACB5E}"/>
+                <a16:creationId xmlns:a16="http://schemas.microsoft.com/office/drawing/2014/main" id="{ECF5D3D1-D884-4113-BFC9-113E72C15B18}"/>
               </a:ext>
             </a:extLst>
           </p:cNvPr>
@@ -10152,7 +12668,7 @@
           <p:cNvPr id="23" name="">
             <a:extLst xmlns:a="http://schemas.openxmlformats.org/drawingml/2006/main">
               <a:ext uri="{FF2B5EF4-FFF2-40B4-BE49-F238E27FC236}">
-                <a16:creationId xmlns:a16="http://schemas.microsoft.com/office/drawing/2014/main" id="{4D9B139A-A26F-4C92-ACF6-A606FA66FE21}"/>
+                <a16:creationId xmlns:a16="http://schemas.microsoft.com/office/drawing/2014/main" id="{F16E9005-7FE6-4333-9959-0DBE2A45C8C8}"/>
               </a:ext>
             </a:extLst>
           </p:cNvPr>
@@ -10216,7 +12732,7 @@
           <p:cNvPr id="24" name="">
             <a:extLst xmlns:a="http://schemas.openxmlformats.org/drawingml/2006/main">
               <a:ext uri="{FF2B5EF4-FFF2-40B4-BE49-F238E27FC236}">
-                <a16:creationId xmlns:a16="http://schemas.microsoft.com/office/drawing/2014/main" id="{BD459069-6A2A-4B4F-8F12-F7C660F14E50}"/>
+                <a16:creationId xmlns:a16="http://schemas.microsoft.com/office/drawing/2014/main" id="{251809C2-EBA5-46A9-B982-8C38F34BF088}"/>
               </a:ext>
             </a:extLst>
           </p:cNvPr>
@@ -10251,7 +12767,7 @@
           <p:cNvPr id="25" name="">
             <a:extLst xmlns:a="http://schemas.openxmlformats.org/drawingml/2006/main">
               <a:ext uri="{FF2B5EF4-FFF2-40B4-BE49-F238E27FC236}">
-                <a16:creationId xmlns:a16="http://schemas.microsoft.com/office/drawing/2014/main" id="{7DE1D899-53ED-4CE2-BCCF-B6695061FAB5}"/>
+                <a16:creationId xmlns:a16="http://schemas.microsoft.com/office/drawing/2014/main" id="{60B98F1E-EAC3-4E90-9CB0-8E170647526D}"/>
               </a:ext>
             </a:extLst>
           </p:cNvPr>
@@ -10286,7 +12802,7 @@
           <p:cNvPr id="26" name="">
             <a:extLst xmlns:a="http://schemas.openxmlformats.org/drawingml/2006/main">
               <a:ext uri="{FF2B5EF4-FFF2-40B4-BE49-F238E27FC236}">
-                <a16:creationId xmlns:a16="http://schemas.microsoft.com/office/drawing/2014/main" id="{D3036FF1-2023-4EBB-976B-7C6F46FF3734}"/>
+                <a16:creationId xmlns:a16="http://schemas.microsoft.com/office/drawing/2014/main" id="{DE0C2D00-000D-4FD2-A1DE-86CD6DEF77EB}"/>
               </a:ext>
             </a:extLst>
           </p:cNvPr>
@@ -10319,7 +12835,7 @@
           <p:cNvPr id="27" name="">
             <a:extLst xmlns:a="http://schemas.openxmlformats.org/drawingml/2006/main">
               <a:ext uri="{FF2B5EF4-FFF2-40B4-BE49-F238E27FC236}">
-                <a16:creationId xmlns:a16="http://schemas.microsoft.com/office/drawing/2014/main" id="{6DF10FCD-B78C-441F-9855-0E8CB9B0A6F4}"/>
+                <a16:creationId xmlns:a16="http://schemas.microsoft.com/office/drawing/2014/main" id="{846D4781-F529-4701-8AE7-ABA03E78A880}"/>
               </a:ext>
             </a:extLst>
           </p:cNvPr>
@@ -10354,7 +12870,7 @@
           <p:cNvPr id="28" name="">
             <a:extLst xmlns:a="http://schemas.openxmlformats.org/drawingml/2006/main">
               <a:ext uri="{FF2B5EF4-FFF2-40B4-BE49-F238E27FC236}">
-                <a16:creationId xmlns:a16="http://schemas.microsoft.com/office/drawing/2014/main" id="{FB02C3FA-397A-4F70-B683-85901B497110}"/>
+                <a16:creationId xmlns:a16="http://schemas.microsoft.com/office/drawing/2014/main" id="{8067AB56-5081-42A8-ADFE-7C13182C8167}"/>
               </a:ext>
             </a:extLst>
           </p:cNvPr>
@@ -10418,7 +12934,7 @@
           <p:cNvPr id="29" name="">
             <a:extLst xmlns:a="http://schemas.openxmlformats.org/drawingml/2006/main">
               <a:ext uri="{FF2B5EF4-FFF2-40B4-BE49-F238E27FC236}">
-                <a16:creationId xmlns:a16="http://schemas.microsoft.com/office/drawing/2014/main" id="{A5D7B99A-8A04-430F-A1A7-CD06B80B9970}"/>
+                <a16:creationId xmlns:a16="http://schemas.microsoft.com/office/drawing/2014/main" id="{6F2C9268-1C47-4832-B67A-9397F6BC8F15}"/>
               </a:ext>
             </a:extLst>
           </p:cNvPr>
@@ -10482,7 +12998,7 @@
           <p:cNvPr id="30" name="">
             <a:extLst xmlns:a="http://schemas.openxmlformats.org/drawingml/2006/main">
               <a:ext uri="{FF2B5EF4-FFF2-40B4-BE49-F238E27FC236}">
-                <a16:creationId xmlns:a16="http://schemas.microsoft.com/office/drawing/2014/main" id="{156D2D03-1A7E-462D-925F-C03BAD374D8A}"/>
+                <a16:creationId xmlns:a16="http://schemas.microsoft.com/office/drawing/2014/main" id="{4866D5EF-7831-4459-ABF1-16D0949DD256}"/>
               </a:ext>
             </a:extLst>
           </p:cNvPr>
@@ -10546,7 +13062,7 @@
           <p:cNvPr id="31" name="">
             <a:extLst xmlns:a="http://schemas.openxmlformats.org/drawingml/2006/main">
               <a:ext uri="{FF2B5EF4-FFF2-40B4-BE49-F238E27FC236}">
-                <a16:creationId xmlns:a16="http://schemas.microsoft.com/office/drawing/2014/main" id="{3C3B79C1-445B-435F-B925-C4658F865731}"/>
+                <a16:creationId xmlns:a16="http://schemas.microsoft.com/office/drawing/2014/main" id="{A5F73955-B07F-457F-B45B-880BA1DB2657}"/>
               </a:ext>
             </a:extLst>
           </p:cNvPr>
@@ -10579,7 +13095,7 @@
           <p:cNvPr id="32" name="">
             <a:extLst xmlns:a="http://schemas.openxmlformats.org/drawingml/2006/main">
               <a:ext uri="{FF2B5EF4-FFF2-40B4-BE49-F238E27FC236}">
-                <a16:creationId xmlns:a16="http://schemas.microsoft.com/office/drawing/2014/main" id="{BA82584B-BC2F-412C-862E-279CD1F0841E}"/>
+                <a16:creationId xmlns:a16="http://schemas.microsoft.com/office/drawing/2014/main" id="{5116B3CB-5E8C-4D4E-8C96-566B7CAE28C2}"/>
               </a:ext>
             </a:extLst>
           </p:cNvPr>
@@ -10643,7 +13159,7 @@
           <p:cNvPr id="33" name="">
             <a:extLst xmlns:a="http://schemas.openxmlformats.org/drawingml/2006/main">
               <a:ext uri="{FF2B5EF4-FFF2-40B4-BE49-F238E27FC236}">
-                <a16:creationId xmlns:a16="http://schemas.microsoft.com/office/drawing/2014/main" id="{593635F2-FA26-4AF8-BCBF-A693203DF390}"/>
+                <a16:creationId xmlns:a16="http://schemas.microsoft.com/office/drawing/2014/main" id="{B3437BBC-D89F-469A-ADF8-9D65D2C03634}"/>
               </a:ext>
             </a:extLst>
           </p:cNvPr>
@@ -10707,7 +13223,7 @@
           <p:cNvPr id="34" name="">
             <a:extLst xmlns:a="http://schemas.openxmlformats.org/drawingml/2006/main">
               <a:ext uri="{FF2B5EF4-FFF2-40B4-BE49-F238E27FC236}">
-                <a16:creationId xmlns:a16="http://schemas.microsoft.com/office/drawing/2014/main" id="{24CD2E43-3F01-4ED8-987E-C77118842926}"/>
+                <a16:creationId xmlns:a16="http://schemas.microsoft.com/office/drawing/2014/main" id="{84A085C5-B300-45AB-8714-DF0F55DE2041}"/>
               </a:ext>
             </a:extLst>
           </p:cNvPr>
@@ -10771,7 +13287,7 @@
           <p:cNvPr id="35" name="">
             <a:extLst xmlns:a="http://schemas.openxmlformats.org/drawingml/2006/main">
               <a:ext uri="{FF2B5EF4-FFF2-40B4-BE49-F238E27FC236}">
-                <a16:creationId xmlns:a16="http://schemas.microsoft.com/office/drawing/2014/main" id="{5BD4533D-2C87-4B60-A309-9989FBDF8C0A}"/>
+                <a16:creationId xmlns:a16="http://schemas.microsoft.com/office/drawing/2014/main" id="{0131D768-E26D-4CB8-8A2F-4C594B837A79}"/>
               </a:ext>
             </a:extLst>
           </p:cNvPr>
@@ -10833,7 +13349,7 @@
     </p:spTree>
     <p:extLst>
       <p:ext uri="{BB962C8B-B14F-4D97-AF65-F5344CB8AC3E}">
-        <p14:creationId xmlns:p14="http://schemas.microsoft.com/office/powerpoint/2010/main" val="709970513"/>
+        <p14:creationId xmlns:p14="http://schemas.microsoft.com/office/powerpoint/2010/main" val="2066929285"/>
       </p:ext>
     </p:extLst>
   </p:cSld>
@@ -10857,7 +13373,7 @@
           <p:cNvPr id="1" name="">
             <a:extLst xmlns:a="http://schemas.openxmlformats.org/drawingml/2006/main">
               <a:ext uri="{FF2B5EF4-FFF2-40B4-BE49-F238E27FC236}">
-                <a16:creationId xmlns:a16="http://schemas.microsoft.com/office/drawing/2014/main" id="{B618822A-D540-468D-BA52-62749B89FED9}"/>
+                <a16:creationId xmlns:a16="http://schemas.microsoft.com/office/drawing/2014/main" id="{D2037702-E696-47B1-AF4D-15D6F519C8CF}"/>
               </a:ext>
             </a:extLst>
           </p:cNvPr>
@@ -10892,7 +13408,7 @@
           <p:cNvPr id="2" name="kicker-marker">
             <a:extLst xmlns:a="http://schemas.openxmlformats.org/drawingml/2006/main">
               <a:ext uri="{FF2B5EF4-FFF2-40B4-BE49-F238E27FC236}">
-                <a16:creationId xmlns:a16="http://schemas.microsoft.com/office/drawing/2014/main" id="{3A4D7A58-4AE8-4B2D-9B8B-21383465F7EB}"/>
+                <a16:creationId xmlns:a16="http://schemas.microsoft.com/office/drawing/2014/main" id="{48E82592-F9B3-44BE-8533-ECB85DDB71E2}"/>
               </a:ext>
             </a:extLst>
           </p:cNvPr>
@@ -10927,7 +13443,7 @@
           <p:cNvPr id="3" name="kicker-label">
             <a:extLst xmlns:a="http://schemas.openxmlformats.org/drawingml/2006/main">
               <a:ext uri="{FF2B5EF4-FFF2-40B4-BE49-F238E27FC236}">
-                <a16:creationId xmlns:a16="http://schemas.microsoft.com/office/drawing/2014/main" id="{D212F089-39C5-4248-B4D5-5BC7AA0E33E0}"/>
+                <a16:creationId xmlns:a16="http://schemas.microsoft.com/office/drawing/2014/main" id="{277DBF8C-1688-4AC5-B141-F1971F3A39D4}"/>
               </a:ext>
             </a:extLst>
           </p:cNvPr>
@@ -10991,7 +13507,7 @@
           <p:cNvPr id="4" name="">
             <a:extLst xmlns:a="http://schemas.openxmlformats.org/drawingml/2006/main">
               <a:ext uri="{FF2B5EF4-FFF2-40B4-BE49-F238E27FC236}">
-                <a16:creationId xmlns:a16="http://schemas.microsoft.com/office/drawing/2014/main" id="{2DCD1CCC-1429-4858-A37B-7C2F52CBB851}"/>
+                <a16:creationId xmlns:a16="http://schemas.microsoft.com/office/drawing/2014/main" id="{73D48F76-01D3-434E-94F9-1E70E7E74FC1}"/>
               </a:ext>
             </a:extLst>
           </p:cNvPr>
@@ -11055,7 +13571,7 @@
           <p:cNvPr id="5" name="">
             <a:extLst xmlns:a="http://schemas.openxmlformats.org/drawingml/2006/main">
               <a:ext uri="{FF2B5EF4-FFF2-40B4-BE49-F238E27FC236}">
-                <a16:creationId xmlns:a16="http://schemas.microsoft.com/office/drawing/2014/main" id="{93194572-FF88-4C60-ADBE-64846FD03859}"/>
+                <a16:creationId xmlns:a16="http://schemas.microsoft.com/office/drawing/2014/main" id="{B7E026EF-AE6C-4D81-A395-2B36B9305E63}"/>
               </a:ext>
             </a:extLst>
           </p:cNvPr>
@@ -11088,7 +13604,7 @@
           <p:cNvPr id="6" name="">
             <a:extLst xmlns:a="http://schemas.openxmlformats.org/drawingml/2006/main">
               <a:ext uri="{FF2B5EF4-FFF2-40B4-BE49-F238E27FC236}">
-                <a16:creationId xmlns:a16="http://schemas.microsoft.com/office/drawing/2014/main" id="{DF82489B-B2D8-4069-B153-5B83866B3B23}"/>
+                <a16:creationId xmlns:a16="http://schemas.microsoft.com/office/drawing/2014/main" id="{94F05550-D1B4-48A9-8713-ABDFC8618D7D}"/>
               </a:ext>
             </a:extLst>
           </p:cNvPr>
@@ -11152,7 +13668,7 @@
           <p:cNvPr id="7" name="">
             <a:extLst xmlns:a="http://schemas.openxmlformats.org/drawingml/2006/main">
               <a:ext uri="{FF2B5EF4-FFF2-40B4-BE49-F238E27FC236}">
-                <a16:creationId xmlns:a16="http://schemas.microsoft.com/office/drawing/2014/main" id="{B3C0E27C-1B0F-407B-B0CB-F828501C16E8}"/>
+                <a16:creationId xmlns:a16="http://schemas.microsoft.com/office/drawing/2014/main" id="{B97EDB36-0C93-4A30-A069-DD1FFBD4B80E}"/>
               </a:ext>
             </a:extLst>
           </p:cNvPr>
@@ -11216,7 +13732,7 @@
           <p:cNvPr id="8" name="">
             <a:extLst xmlns:a="http://schemas.openxmlformats.org/drawingml/2006/main">
               <a:ext uri="{FF2B5EF4-FFF2-40B4-BE49-F238E27FC236}">
-                <a16:creationId xmlns:a16="http://schemas.microsoft.com/office/drawing/2014/main" id="{71FDE7B4-A258-4DF8-86D9-4097E56B5395}"/>
+                <a16:creationId xmlns:a16="http://schemas.microsoft.com/office/drawing/2014/main" id="{D3E5D7A4-92D9-425D-82CC-F96D718FC264}"/>
               </a:ext>
             </a:extLst>
           </p:cNvPr>
@@ -11249,7 +13765,7 @@
           <p:cNvPr id="9" name="">
             <a:extLst xmlns:a="http://schemas.openxmlformats.org/drawingml/2006/main">
               <a:ext uri="{FF2B5EF4-FFF2-40B4-BE49-F238E27FC236}">
-                <a16:creationId xmlns:a16="http://schemas.microsoft.com/office/drawing/2014/main" id="{62FB9C8C-7524-4D6A-BE0B-CF9851B27FCE}"/>
+                <a16:creationId xmlns:a16="http://schemas.microsoft.com/office/drawing/2014/main" id="{0140B589-483B-469C-8375-7D8341DE929D}"/>
               </a:ext>
             </a:extLst>
           </p:cNvPr>
@@ -11313,7 +13829,7 @@
           <p:cNvPr id="10" name="">
             <a:extLst xmlns:a="http://schemas.openxmlformats.org/drawingml/2006/main">
               <a:ext uri="{FF2B5EF4-FFF2-40B4-BE49-F238E27FC236}">
-                <a16:creationId xmlns:a16="http://schemas.microsoft.com/office/drawing/2014/main" id="{A8E423F2-C3AC-4F72-90FB-44C559638C38}"/>
+                <a16:creationId xmlns:a16="http://schemas.microsoft.com/office/drawing/2014/main" id="{48DCC241-0C22-4C9D-9EEB-E14CEBD4FF5D}"/>
               </a:ext>
             </a:extLst>
           </p:cNvPr>
@@ -11377,7 +13893,7 @@
           <p:cNvPr id="11" name="">
             <a:extLst xmlns:a="http://schemas.openxmlformats.org/drawingml/2006/main">
               <a:ext uri="{FF2B5EF4-FFF2-40B4-BE49-F238E27FC236}">
-                <a16:creationId xmlns:a16="http://schemas.microsoft.com/office/drawing/2014/main" id="{3F47449C-849C-4D18-84A4-D45E679FD1C6}"/>
+                <a16:creationId xmlns:a16="http://schemas.microsoft.com/office/drawing/2014/main" id="{619C4F2B-7F11-496A-9E5E-2677F37F426C}"/>
               </a:ext>
             </a:extLst>
           </p:cNvPr>
@@ -11410,7 +13926,7 @@
           <p:cNvPr id="12" name="">
             <a:extLst xmlns:a="http://schemas.openxmlformats.org/drawingml/2006/main">
               <a:ext uri="{FF2B5EF4-FFF2-40B4-BE49-F238E27FC236}">
-                <a16:creationId xmlns:a16="http://schemas.microsoft.com/office/drawing/2014/main" id="{22790146-DE55-4836-B18E-318111BDC93D}"/>
+                <a16:creationId xmlns:a16="http://schemas.microsoft.com/office/drawing/2014/main" id="{E8F5162D-3CE3-4B0B-BE89-AFF8C6564875}"/>
               </a:ext>
             </a:extLst>
           </p:cNvPr>
@@ -11474,7 +13990,7 @@
           <p:cNvPr id="13" name="">
             <a:extLst xmlns:a="http://schemas.openxmlformats.org/drawingml/2006/main">
               <a:ext uri="{FF2B5EF4-FFF2-40B4-BE49-F238E27FC236}">
-                <a16:creationId xmlns:a16="http://schemas.microsoft.com/office/drawing/2014/main" id="{B904C915-E97A-44A3-B6EA-48F1C7FFB194}"/>
+                <a16:creationId xmlns:a16="http://schemas.microsoft.com/office/drawing/2014/main" id="{3AC37A35-4FC7-4CE0-9A0A-7E01164E4B5F}"/>
               </a:ext>
             </a:extLst>
           </p:cNvPr>
@@ -11538,7 +14054,7 @@
           <p:cNvPr id="14" name="">
             <a:extLst xmlns:a="http://schemas.openxmlformats.org/drawingml/2006/main">
               <a:ext uri="{FF2B5EF4-FFF2-40B4-BE49-F238E27FC236}">
-                <a16:creationId xmlns:a16="http://schemas.microsoft.com/office/drawing/2014/main" id="{993CE73A-ECB5-459F-8E44-7E95DB9985D7}"/>
+                <a16:creationId xmlns:a16="http://schemas.microsoft.com/office/drawing/2014/main" id="{FBF2D0B4-DB3F-40B8-8605-E6028E46FD6E}"/>
               </a:ext>
             </a:extLst>
           </p:cNvPr>
@@ -11571,7 +14087,7 @@
           <p:cNvPr id="15" name="">
             <a:extLst xmlns:a="http://schemas.openxmlformats.org/drawingml/2006/main">
               <a:ext uri="{FF2B5EF4-FFF2-40B4-BE49-F238E27FC236}">
-                <a16:creationId xmlns:a16="http://schemas.microsoft.com/office/drawing/2014/main" id="{792EEE09-0F07-45B6-BB14-99E3E49EE8F3}"/>
+                <a16:creationId xmlns:a16="http://schemas.microsoft.com/office/drawing/2014/main" id="{2F402566-9DEE-41EB-8E55-859A7E882216}"/>
               </a:ext>
             </a:extLst>
           </p:cNvPr>
@@ -11635,7 +14151,7 @@
           <p:cNvPr id="16" name="">
             <a:extLst xmlns:a="http://schemas.openxmlformats.org/drawingml/2006/main">
               <a:ext uri="{FF2B5EF4-FFF2-40B4-BE49-F238E27FC236}">
-                <a16:creationId xmlns:a16="http://schemas.microsoft.com/office/drawing/2014/main" id="{814100CB-EFC6-4506-BC76-E207B0AE4BF3}"/>
+                <a16:creationId xmlns:a16="http://schemas.microsoft.com/office/drawing/2014/main" id="{24378577-80AC-4A67-B11A-211543866266}"/>
               </a:ext>
             </a:extLst>
           </p:cNvPr>
@@ -11699,7 +14215,7 @@
           <p:cNvPr id="17" name="">
             <a:extLst xmlns:a="http://schemas.openxmlformats.org/drawingml/2006/main">
               <a:ext uri="{FF2B5EF4-FFF2-40B4-BE49-F238E27FC236}">
-                <a16:creationId xmlns:a16="http://schemas.microsoft.com/office/drawing/2014/main" id="{07767BF1-A512-491B-ACD9-FC66D6F3AFC0}"/>
+                <a16:creationId xmlns:a16="http://schemas.microsoft.com/office/drawing/2014/main" id="{C7E3089F-058C-487E-A0F8-3D0FABFFBD51}"/>
               </a:ext>
             </a:extLst>
           </p:cNvPr>
@@ -11732,7 +14248,7 @@
           <p:cNvPr id="18" name="">
             <a:extLst xmlns:a="http://schemas.openxmlformats.org/drawingml/2006/main">
               <a:ext uri="{FF2B5EF4-FFF2-40B4-BE49-F238E27FC236}">
-                <a16:creationId xmlns:a16="http://schemas.microsoft.com/office/drawing/2014/main" id="{88912966-CED3-42D2-94BD-51A56EA55A38}"/>
+                <a16:creationId xmlns:a16="http://schemas.microsoft.com/office/drawing/2014/main" id="{3EC1BED8-73A2-4493-8474-A3D203FAD71D}"/>
               </a:ext>
             </a:extLst>
           </p:cNvPr>
@@ -11796,7 +14312,7 @@
           <p:cNvPr id="19" name="">
             <a:extLst xmlns:a="http://schemas.openxmlformats.org/drawingml/2006/main">
               <a:ext uri="{FF2B5EF4-FFF2-40B4-BE49-F238E27FC236}">
-                <a16:creationId xmlns:a16="http://schemas.microsoft.com/office/drawing/2014/main" id="{2F88FFC1-DAE9-4DBF-B218-BC227EF98263}"/>
+                <a16:creationId xmlns:a16="http://schemas.microsoft.com/office/drawing/2014/main" id="{79F811B0-CA10-4F98-BF60-60141E5F18B1}"/>
               </a:ext>
             </a:extLst>
           </p:cNvPr>
@@ -11860,7 +14376,7 @@
           <p:cNvPr id="20" name="">
             <a:extLst xmlns:a="http://schemas.openxmlformats.org/drawingml/2006/main">
               <a:ext uri="{FF2B5EF4-FFF2-40B4-BE49-F238E27FC236}">
-                <a16:creationId xmlns:a16="http://schemas.microsoft.com/office/drawing/2014/main" id="{63D458A5-A929-458F-8EDB-918C597B0EEA}"/>
+                <a16:creationId xmlns:a16="http://schemas.microsoft.com/office/drawing/2014/main" id="{3E3E36C4-71F4-4D7F-B5B9-E93A0DEFD47E}"/>
               </a:ext>
             </a:extLst>
           </p:cNvPr>
@@ -11893,7 +14409,7 @@
           <p:cNvPr id="21" name="">
             <a:extLst xmlns:a="http://schemas.openxmlformats.org/drawingml/2006/main">
               <a:ext uri="{FF2B5EF4-FFF2-40B4-BE49-F238E27FC236}">
-                <a16:creationId xmlns:a16="http://schemas.microsoft.com/office/drawing/2014/main" id="{701E9216-85EE-47D2-96D7-B67DC576A252}"/>
+                <a16:creationId xmlns:a16="http://schemas.microsoft.com/office/drawing/2014/main" id="{FA30739C-E053-48E2-83DC-E18EECA1307D}"/>
               </a:ext>
             </a:extLst>
           </p:cNvPr>
@@ -11957,7 +14473,7 @@
           <p:cNvPr id="22" name="">
             <a:extLst xmlns:a="http://schemas.openxmlformats.org/drawingml/2006/main">
               <a:ext uri="{FF2B5EF4-FFF2-40B4-BE49-F238E27FC236}">
-                <a16:creationId xmlns:a16="http://schemas.microsoft.com/office/drawing/2014/main" id="{ABBC605A-E6DC-439D-9D7A-83E477A6B961}"/>
+                <a16:creationId xmlns:a16="http://schemas.microsoft.com/office/drawing/2014/main" id="{2437E69F-F446-407A-8561-43B31B2E4298}"/>
               </a:ext>
             </a:extLst>
           </p:cNvPr>
@@ -12021,7 +14537,7 @@
           <p:cNvPr id="23" name="">
             <a:extLst xmlns:a="http://schemas.openxmlformats.org/drawingml/2006/main">
               <a:ext uri="{FF2B5EF4-FFF2-40B4-BE49-F238E27FC236}">
-                <a16:creationId xmlns:a16="http://schemas.microsoft.com/office/drawing/2014/main" id="{ADE524BD-157C-4070-BB03-AD5A9E4B0763}"/>
+                <a16:creationId xmlns:a16="http://schemas.microsoft.com/office/drawing/2014/main" id="{3D10418D-EF40-4D4F-A4F6-A814BCF8A618}"/>
               </a:ext>
             </a:extLst>
           </p:cNvPr>
@@ -12085,7 +14601,7 @@
           <p:cNvPr id="24" name="">
             <a:extLst xmlns:a="http://schemas.openxmlformats.org/drawingml/2006/main">
               <a:ext uri="{FF2B5EF4-FFF2-40B4-BE49-F238E27FC236}">
-                <a16:creationId xmlns:a16="http://schemas.microsoft.com/office/drawing/2014/main" id="{0614691A-935F-4F32-AD86-2C642EFE6951}"/>
+                <a16:creationId xmlns:a16="http://schemas.microsoft.com/office/drawing/2014/main" id="{49CE6646-E5B1-4519-9BEF-6FB182E9553F}"/>
               </a:ext>
             </a:extLst>
           </p:cNvPr>
@@ -12149,7 +14665,7 @@
           <p:cNvPr id="25" name="">
             <a:extLst xmlns:a="http://schemas.openxmlformats.org/drawingml/2006/main">
               <a:ext uri="{FF2B5EF4-FFF2-40B4-BE49-F238E27FC236}">
-                <a16:creationId xmlns:a16="http://schemas.microsoft.com/office/drawing/2014/main" id="{98C8894F-DF92-4EE0-BC14-B5AF623A05BD}"/>
+                <a16:creationId xmlns:a16="http://schemas.microsoft.com/office/drawing/2014/main" id="{60217309-8C3D-47B6-A7E2-326C8660301A}"/>
               </a:ext>
             </a:extLst>
           </p:cNvPr>
@@ -12211,7 +14727,7 @@
     </p:spTree>
     <p:extLst>
       <p:ext uri="{BB962C8B-B14F-4D97-AF65-F5344CB8AC3E}">
-        <p14:creationId xmlns:p14="http://schemas.microsoft.com/office/powerpoint/2010/main" val="1000419972"/>
+        <p14:creationId xmlns:p14="http://schemas.microsoft.com/office/powerpoint/2010/main" val="440623219"/>
       </p:ext>
     </p:extLst>
   </p:cSld>
@@ -12235,7 +14751,7 @@
           <p:cNvPr id="1" name="">
             <a:extLst xmlns:a="http://schemas.openxmlformats.org/drawingml/2006/main">
               <a:ext uri="{FF2B5EF4-FFF2-40B4-BE49-F238E27FC236}">
-                <a16:creationId xmlns:a16="http://schemas.microsoft.com/office/drawing/2014/main" id="{88158B6F-117C-4107-8332-50789E642AE3}"/>
+                <a16:creationId xmlns:a16="http://schemas.microsoft.com/office/drawing/2014/main" id="{BE8DA2B7-FBC1-4B0B-82C6-912434620323}"/>
               </a:ext>
             </a:extLst>
           </p:cNvPr>
@@ -12270,7 +14786,7 @@
           <p:cNvPr id="2" name="kicker-marker">
             <a:extLst xmlns:a="http://schemas.openxmlformats.org/drawingml/2006/main">
               <a:ext uri="{FF2B5EF4-FFF2-40B4-BE49-F238E27FC236}">
-                <a16:creationId xmlns:a16="http://schemas.microsoft.com/office/drawing/2014/main" id="{E8B9724F-AC58-4BBC-B9BA-A8E5A8E41572}"/>
+                <a16:creationId xmlns:a16="http://schemas.microsoft.com/office/drawing/2014/main" id="{C57D210E-5782-4FE7-8DF3-CA1CD7B7F06F}"/>
               </a:ext>
             </a:extLst>
           </p:cNvPr>
@@ -12305,7 +14821,7 @@
           <p:cNvPr id="3" name="kicker-label">
             <a:extLst xmlns:a="http://schemas.openxmlformats.org/drawingml/2006/main">
               <a:ext uri="{FF2B5EF4-FFF2-40B4-BE49-F238E27FC236}">
-                <a16:creationId xmlns:a16="http://schemas.microsoft.com/office/drawing/2014/main" id="{421CC91E-A375-474E-AEF1-06823F7C7B84}"/>
+                <a16:creationId xmlns:a16="http://schemas.microsoft.com/office/drawing/2014/main" id="{0F958F85-2405-4F09-8A5A-6E752105210A}"/>
               </a:ext>
             </a:extLst>
           </p:cNvPr>
@@ -12369,7 +14885,7 @@
           <p:cNvPr id="4" name="">
             <a:extLst xmlns:a="http://schemas.openxmlformats.org/drawingml/2006/main">
               <a:ext uri="{FF2B5EF4-FFF2-40B4-BE49-F238E27FC236}">
-                <a16:creationId xmlns:a16="http://schemas.microsoft.com/office/drawing/2014/main" id="{AF98FF12-B4C2-4D5F-86F2-98366BA48457}"/>
+                <a16:creationId xmlns:a16="http://schemas.microsoft.com/office/drawing/2014/main" id="{66441D20-390F-40AD-B7CD-585EC770BE84}"/>
               </a:ext>
             </a:extLst>
           </p:cNvPr>
@@ -12433,7 +14949,7 @@
           <p:cNvPr id="5" name="">
             <a:extLst xmlns:a="http://schemas.openxmlformats.org/drawingml/2006/main">
               <a:ext uri="{FF2B5EF4-FFF2-40B4-BE49-F238E27FC236}">
-                <a16:creationId xmlns:a16="http://schemas.microsoft.com/office/drawing/2014/main" id="{029F91C2-E7A7-458D-B30F-D6905020C4AF}"/>
+                <a16:creationId xmlns:a16="http://schemas.microsoft.com/office/drawing/2014/main" id="{F2ABBA78-F0CB-4183-8922-D475664639E9}"/>
               </a:ext>
             </a:extLst>
           </p:cNvPr>
@@ -12466,7 +14982,7 @@
           <p:cNvPr id="6" name="">
             <a:extLst xmlns:a="http://schemas.openxmlformats.org/drawingml/2006/main">
               <a:ext uri="{FF2B5EF4-FFF2-40B4-BE49-F238E27FC236}">
-                <a16:creationId xmlns:a16="http://schemas.microsoft.com/office/drawing/2014/main" id="{6EC9BDF5-46B6-4594-BA98-704F189532F6}"/>
+                <a16:creationId xmlns:a16="http://schemas.microsoft.com/office/drawing/2014/main" id="{CB8A27A8-C7EA-4B03-9F1A-E44F55FC0301}"/>
               </a:ext>
             </a:extLst>
           </p:cNvPr>
@@ -12530,7 +15046,7 @@
           <p:cNvPr id="7" name="">
             <a:extLst xmlns:a="http://schemas.openxmlformats.org/drawingml/2006/main">
               <a:ext uri="{FF2B5EF4-FFF2-40B4-BE49-F238E27FC236}">
-                <a16:creationId xmlns:a16="http://schemas.microsoft.com/office/drawing/2014/main" id="{7A7670AF-6BCA-464C-B1E1-C153C15858AE}"/>
+                <a16:creationId xmlns:a16="http://schemas.microsoft.com/office/drawing/2014/main" id="{8B9F22D2-BD53-4F49-8239-6E0451315FB9}"/>
               </a:ext>
             </a:extLst>
           </p:cNvPr>
@@ -12594,7 +15110,7 @@
           <p:cNvPr id="8" name="">
             <a:extLst xmlns:a="http://schemas.openxmlformats.org/drawingml/2006/main">
               <a:ext uri="{FF2B5EF4-FFF2-40B4-BE49-F238E27FC236}">
-                <a16:creationId xmlns:a16="http://schemas.microsoft.com/office/drawing/2014/main" id="{34FE1BE4-7658-49E4-98A3-EB90E38A96B8}"/>
+                <a16:creationId xmlns:a16="http://schemas.microsoft.com/office/drawing/2014/main" id="{ED0BE4F7-EB07-4405-BB2D-9FB61291BD74}"/>
               </a:ext>
             </a:extLst>
           </p:cNvPr>
@@ -12627,7 +15143,7 @@
           <p:cNvPr id="9" name="">
             <a:extLst xmlns:a="http://schemas.openxmlformats.org/drawingml/2006/main">
               <a:ext uri="{FF2B5EF4-FFF2-40B4-BE49-F238E27FC236}">
-                <a16:creationId xmlns:a16="http://schemas.microsoft.com/office/drawing/2014/main" id="{946687E3-5C73-491E-BE92-E168B4B85701}"/>
+                <a16:creationId xmlns:a16="http://schemas.microsoft.com/office/drawing/2014/main" id="{739EED13-AAA1-4761-A3D6-6F30FE2472F1}"/>
               </a:ext>
             </a:extLst>
           </p:cNvPr>
@@ -12691,7 +15207,7 @@
           <p:cNvPr id="10" name="">
             <a:extLst xmlns:a="http://schemas.openxmlformats.org/drawingml/2006/main">
               <a:ext uri="{FF2B5EF4-FFF2-40B4-BE49-F238E27FC236}">
-                <a16:creationId xmlns:a16="http://schemas.microsoft.com/office/drawing/2014/main" id="{5D42D3F4-FF4C-4818-929B-36350DB9F5A0}"/>
+                <a16:creationId xmlns:a16="http://schemas.microsoft.com/office/drawing/2014/main" id="{A4DBAD1A-B6EC-46F7-89E8-695F0329B761}"/>
               </a:ext>
             </a:extLst>
           </p:cNvPr>
@@ -12755,7 +15271,7 @@
           <p:cNvPr id="11" name="">
             <a:extLst xmlns:a="http://schemas.openxmlformats.org/drawingml/2006/main">
               <a:ext uri="{FF2B5EF4-FFF2-40B4-BE49-F238E27FC236}">
-                <a16:creationId xmlns:a16="http://schemas.microsoft.com/office/drawing/2014/main" id="{22676C58-0336-4CAB-8F18-9BCE192FEC0C}"/>
+                <a16:creationId xmlns:a16="http://schemas.microsoft.com/office/drawing/2014/main" id="{80D870E0-EFC3-4668-BC97-EFAAA02B35A0}"/>
               </a:ext>
             </a:extLst>
           </p:cNvPr>
@@ -12788,7 +15304,7 @@
           <p:cNvPr id="12" name="">
             <a:extLst xmlns:a="http://schemas.openxmlformats.org/drawingml/2006/main">
               <a:ext uri="{FF2B5EF4-FFF2-40B4-BE49-F238E27FC236}">
-                <a16:creationId xmlns:a16="http://schemas.microsoft.com/office/drawing/2014/main" id="{6578C61E-D38B-4F66-9623-572A3155CA9D}"/>
+                <a16:creationId xmlns:a16="http://schemas.microsoft.com/office/drawing/2014/main" id="{A035F6C9-0DD7-4DA1-BD36-C6F1DF350BD2}"/>
               </a:ext>
             </a:extLst>
           </p:cNvPr>
@@ -12852,7 +15368,7 @@
           <p:cNvPr id="13" name="">
             <a:extLst xmlns:a="http://schemas.openxmlformats.org/drawingml/2006/main">
               <a:ext uri="{FF2B5EF4-FFF2-40B4-BE49-F238E27FC236}">
-                <a16:creationId xmlns:a16="http://schemas.microsoft.com/office/drawing/2014/main" id="{65567108-074F-4F01-A2B5-C48BA5111061}"/>
+                <a16:creationId xmlns:a16="http://schemas.microsoft.com/office/drawing/2014/main" id="{D69F54DC-9F1E-4D8E-929F-7EA8771B9CAD}"/>
               </a:ext>
             </a:extLst>
           </p:cNvPr>
@@ -12916,7 +15432,7 @@
           <p:cNvPr id="14" name="">
             <a:extLst xmlns:a="http://schemas.openxmlformats.org/drawingml/2006/main">
               <a:ext uri="{FF2B5EF4-FFF2-40B4-BE49-F238E27FC236}">
-                <a16:creationId xmlns:a16="http://schemas.microsoft.com/office/drawing/2014/main" id="{05E1DDCD-5665-4882-8407-92542415EC55}"/>
+                <a16:creationId xmlns:a16="http://schemas.microsoft.com/office/drawing/2014/main" id="{2EB47963-23B4-4C8C-95BD-F0927C820921}"/>
               </a:ext>
             </a:extLst>
           </p:cNvPr>
@@ -12949,7 +15465,7 @@
           <p:cNvPr id="15" name="">
             <a:extLst xmlns:a="http://schemas.openxmlformats.org/drawingml/2006/main">
               <a:ext uri="{FF2B5EF4-FFF2-40B4-BE49-F238E27FC236}">
-                <a16:creationId xmlns:a16="http://schemas.microsoft.com/office/drawing/2014/main" id="{FFB78522-325E-47C2-9312-278A01B80113}"/>
+                <a16:creationId xmlns:a16="http://schemas.microsoft.com/office/drawing/2014/main" id="{91B2EE22-78F8-48AA-8ABF-965E82BED6FE}"/>
               </a:ext>
             </a:extLst>
           </p:cNvPr>
@@ -13013,7 +15529,7 @@
           <p:cNvPr id="16" name="">
             <a:extLst xmlns:a="http://schemas.openxmlformats.org/drawingml/2006/main">
               <a:ext uri="{FF2B5EF4-FFF2-40B4-BE49-F238E27FC236}">
-                <a16:creationId xmlns:a16="http://schemas.microsoft.com/office/drawing/2014/main" id="{756CC94A-6D3E-4196-9EAC-26AF49D5F91B}"/>
+                <a16:creationId xmlns:a16="http://schemas.microsoft.com/office/drawing/2014/main" id="{CAC7DCDB-079A-4921-AAE3-47E6DB7706DB}"/>
               </a:ext>
             </a:extLst>
           </p:cNvPr>
@@ -13077,7 +15593,7 @@
           <p:cNvPr id="17" name="">
             <a:extLst xmlns:a="http://schemas.openxmlformats.org/drawingml/2006/main">
               <a:ext uri="{FF2B5EF4-FFF2-40B4-BE49-F238E27FC236}">
-                <a16:creationId xmlns:a16="http://schemas.microsoft.com/office/drawing/2014/main" id="{6F3BFB14-8E78-462F-B636-2D9C74B15BA4}"/>
+                <a16:creationId xmlns:a16="http://schemas.microsoft.com/office/drawing/2014/main" id="{F947B363-DBC5-401C-9688-02189D69F3EB}"/>
               </a:ext>
             </a:extLst>
           </p:cNvPr>
@@ -13110,7 +15626,7 @@
           <p:cNvPr id="18" name="">
             <a:extLst xmlns:a="http://schemas.openxmlformats.org/drawingml/2006/main">
               <a:ext uri="{FF2B5EF4-FFF2-40B4-BE49-F238E27FC236}">
-                <a16:creationId xmlns:a16="http://schemas.microsoft.com/office/drawing/2014/main" id="{F3F77656-6839-4B10-88C6-FA7E731BE8F4}"/>
+                <a16:creationId xmlns:a16="http://schemas.microsoft.com/office/drawing/2014/main" id="{2F52FA23-7ADE-4751-B1B0-36E8564383E7}"/>
               </a:ext>
             </a:extLst>
           </p:cNvPr>
@@ -13174,7 +15690,7 @@
           <p:cNvPr id="19" name="">
             <a:extLst xmlns:a="http://schemas.openxmlformats.org/drawingml/2006/main">
               <a:ext uri="{FF2B5EF4-FFF2-40B4-BE49-F238E27FC236}">
-                <a16:creationId xmlns:a16="http://schemas.microsoft.com/office/drawing/2014/main" id="{0645060F-7460-4889-BD8E-184582FFB3A1}"/>
+                <a16:creationId xmlns:a16="http://schemas.microsoft.com/office/drawing/2014/main" id="{275DD7C9-9210-4ACA-B6B6-FC165A99C9FB}"/>
               </a:ext>
             </a:extLst>
           </p:cNvPr>
@@ -13238,7 +15754,7 @@
           <p:cNvPr id="20" name="">
             <a:extLst xmlns:a="http://schemas.openxmlformats.org/drawingml/2006/main">
               <a:ext uri="{FF2B5EF4-FFF2-40B4-BE49-F238E27FC236}">
-                <a16:creationId xmlns:a16="http://schemas.microsoft.com/office/drawing/2014/main" id="{16AAC7FE-49CA-4D44-9F1F-BB49CBE11A12}"/>
+                <a16:creationId xmlns:a16="http://schemas.microsoft.com/office/drawing/2014/main" id="{CE5C8696-7BD9-4D4B-9324-30B1248C8074}"/>
               </a:ext>
             </a:extLst>
           </p:cNvPr>
@@ -13271,7 +15787,7 @@
           <p:cNvPr id="21" name="">
             <a:extLst xmlns:a="http://schemas.openxmlformats.org/drawingml/2006/main">
               <a:ext uri="{FF2B5EF4-FFF2-40B4-BE49-F238E27FC236}">
-                <a16:creationId xmlns:a16="http://schemas.microsoft.com/office/drawing/2014/main" id="{533F7039-9EDE-47E2-8F7B-A0AF633369FE}"/>
+                <a16:creationId xmlns:a16="http://schemas.microsoft.com/office/drawing/2014/main" id="{0B3FF5AD-2C4F-48FC-A372-41AA664EF723}"/>
               </a:ext>
             </a:extLst>
           </p:cNvPr>
@@ -13335,7 +15851,7 @@
           <p:cNvPr id="22" name="">
             <a:extLst xmlns:a="http://schemas.openxmlformats.org/drawingml/2006/main">
               <a:ext uri="{FF2B5EF4-FFF2-40B4-BE49-F238E27FC236}">
-                <a16:creationId xmlns:a16="http://schemas.microsoft.com/office/drawing/2014/main" id="{87E328A5-310C-4D10-BA3B-34F8FAA35E4A}"/>
+                <a16:creationId xmlns:a16="http://schemas.microsoft.com/office/drawing/2014/main" id="{8BAE7224-1A0E-4C82-95BD-6D759F95C8D8}"/>
               </a:ext>
             </a:extLst>
           </p:cNvPr>
@@ -13403,7 +15919,7 @@
           <p:nvPr/>
         </p:nvPicPr>
         <p:blipFill>
-          <a:blip xmlns:r="http://schemas.openxmlformats.org/officeDocument/2006/relationships" xmlns:a="http://schemas.openxmlformats.org/drawingml/2006/main" r:embed="Rb84a6cd2d0064aae"/>
+          <a:blip xmlns:r="http://schemas.openxmlformats.org/officeDocument/2006/relationships" xmlns:a="http://schemas.openxmlformats.org/drawingml/2006/main" r:embed="Re017a744269a4d3f"/>
           <a:stretch xmlns:a="http://schemas.openxmlformats.org/drawingml/2006/main"/>
         </p:blipFill>
         <p:spPr>
@@ -13425,7 +15941,7 @@
           <p:nvPr/>
         </p:nvPicPr>
         <p:blipFill>
-          <a:blip xmlns:r="http://schemas.openxmlformats.org/officeDocument/2006/relationships" xmlns:a="http://schemas.openxmlformats.org/drawingml/2006/main" r:embed="Rffd8d6335d42403d"/>
+          <a:blip xmlns:r="http://schemas.openxmlformats.org/officeDocument/2006/relationships" xmlns:a="http://schemas.openxmlformats.org/drawingml/2006/main" r:embed="R21041a3f9939479f"/>
           <a:stretch xmlns:a="http://schemas.openxmlformats.org/drawingml/2006/main"/>
         </p:blipFill>
         <p:spPr>
@@ -13443,7 +15959,7 @@
           <p:cNvPr id="25" name="">
             <a:extLst xmlns:a="http://schemas.openxmlformats.org/drawingml/2006/main">
               <a:ext uri="{FF2B5EF4-FFF2-40B4-BE49-F238E27FC236}">
-                <a16:creationId xmlns:a16="http://schemas.microsoft.com/office/drawing/2014/main" id="{920EA413-7C19-485B-9549-F207DE2E3EB1}"/>
+                <a16:creationId xmlns:a16="http://schemas.microsoft.com/office/drawing/2014/main" id="{3ABF5993-102A-4407-9766-FE2CCB53CDA0}"/>
               </a:ext>
             </a:extLst>
           </p:cNvPr>
@@ -13507,7 +16023,7 @@
           <p:cNvPr id="26" name="">
             <a:extLst xmlns:a="http://schemas.openxmlformats.org/drawingml/2006/main">
               <a:ext uri="{FF2B5EF4-FFF2-40B4-BE49-F238E27FC236}">
-                <a16:creationId xmlns:a16="http://schemas.microsoft.com/office/drawing/2014/main" id="{BFC4416B-A0CB-4FC2-AAD3-C5E45E98E393}"/>
+                <a16:creationId xmlns:a16="http://schemas.microsoft.com/office/drawing/2014/main" id="{93ED8FA3-3B1B-4456-B278-5EA77B0BE7DE}"/>
               </a:ext>
             </a:extLst>
           </p:cNvPr>
@@ -13571,7 +16087,7 @@
           <p:cNvPr id="27" name="">
             <a:extLst xmlns:a="http://schemas.openxmlformats.org/drawingml/2006/main">
               <a:ext uri="{FF2B5EF4-FFF2-40B4-BE49-F238E27FC236}">
-                <a16:creationId xmlns:a16="http://schemas.microsoft.com/office/drawing/2014/main" id="{5E6610B9-5CD6-4728-B43F-0A67EE5B4D3A}"/>
+                <a16:creationId xmlns:a16="http://schemas.microsoft.com/office/drawing/2014/main" id="{D643C6AF-A1E2-4DEF-9BF7-AD0C9F5BBC5D}"/>
               </a:ext>
             </a:extLst>
           </p:cNvPr>
@@ -13633,7 +16149,7 @@
     </p:spTree>
     <p:extLst>
       <p:ext uri="{BB962C8B-B14F-4D97-AF65-F5344CB8AC3E}">
-        <p14:creationId xmlns:p14="http://schemas.microsoft.com/office/powerpoint/2010/main" val="1374010751"/>
+        <p14:creationId xmlns:p14="http://schemas.microsoft.com/office/powerpoint/2010/main" val="339566058"/>
       </p:ext>
     </p:extLst>
   </p:cSld>
@@ -13657,7 +16173,7 @@
           <p:cNvPr id="1" name="">
             <a:extLst xmlns:a="http://schemas.openxmlformats.org/drawingml/2006/main">
               <a:ext uri="{FF2B5EF4-FFF2-40B4-BE49-F238E27FC236}">
-                <a16:creationId xmlns:a16="http://schemas.microsoft.com/office/drawing/2014/main" id="{AA80F1E9-42CB-4179-A1BA-2AC5F33F0BC3}"/>
+                <a16:creationId xmlns:a16="http://schemas.microsoft.com/office/drawing/2014/main" id="{510B0BA6-BB4C-45C3-A7C7-049082376522}"/>
               </a:ext>
             </a:extLst>
           </p:cNvPr>
@@ -13692,7 +16208,7 @@
           <p:cNvPr id="2" name="kicker-marker">
             <a:extLst xmlns:a="http://schemas.openxmlformats.org/drawingml/2006/main">
               <a:ext uri="{FF2B5EF4-FFF2-40B4-BE49-F238E27FC236}">
-                <a16:creationId xmlns:a16="http://schemas.microsoft.com/office/drawing/2014/main" id="{3048F0B3-5D4D-485D-91FB-271FD7A4979D}"/>
+                <a16:creationId xmlns:a16="http://schemas.microsoft.com/office/drawing/2014/main" id="{E8EB051F-4511-4860-9BDF-551B0461CBA5}"/>
               </a:ext>
             </a:extLst>
           </p:cNvPr>
@@ -13727,7 +16243,7 @@
           <p:cNvPr id="3" name="kicker-label">
             <a:extLst xmlns:a="http://schemas.openxmlformats.org/drawingml/2006/main">
               <a:ext uri="{FF2B5EF4-FFF2-40B4-BE49-F238E27FC236}">
-                <a16:creationId xmlns:a16="http://schemas.microsoft.com/office/drawing/2014/main" id="{2ED087F0-3FCB-488B-866F-9202A71D92A7}"/>
+                <a16:creationId xmlns:a16="http://schemas.microsoft.com/office/drawing/2014/main" id="{79E64EF3-04BD-4CF5-AA71-BE83A00B0250}"/>
               </a:ext>
             </a:extLst>
           </p:cNvPr>
@@ -13791,7 +16307,7 @@
           <p:cNvPr id="4" name="">
             <a:extLst xmlns:a="http://schemas.openxmlformats.org/drawingml/2006/main">
               <a:ext uri="{FF2B5EF4-FFF2-40B4-BE49-F238E27FC236}">
-                <a16:creationId xmlns:a16="http://schemas.microsoft.com/office/drawing/2014/main" id="{94229F36-E043-44C5-BD35-41C2FB65A724}"/>
+                <a16:creationId xmlns:a16="http://schemas.microsoft.com/office/drawing/2014/main" id="{127CB14E-9D28-4D35-B370-402A79C83CA4}"/>
               </a:ext>
             </a:extLst>
           </p:cNvPr>
@@ -13855,7 +16371,7 @@
           <p:cNvPr id="5" name="">
             <a:extLst xmlns:a="http://schemas.openxmlformats.org/drawingml/2006/main">
               <a:ext uri="{FF2B5EF4-FFF2-40B4-BE49-F238E27FC236}">
-                <a16:creationId xmlns:a16="http://schemas.microsoft.com/office/drawing/2014/main" id="{EEED8DC2-2C3B-48E0-AE57-255F1CC7B1A9}"/>
+                <a16:creationId xmlns:a16="http://schemas.microsoft.com/office/drawing/2014/main" id="{A0EAF7C2-5041-4002-B225-2B1ECB8983B1}"/>
               </a:ext>
             </a:extLst>
           </p:cNvPr>
@@ -13890,7 +16406,7 @@
           <p:cNvPr id="6" name="">
             <a:extLst xmlns:a="http://schemas.openxmlformats.org/drawingml/2006/main">
               <a:ext uri="{FF2B5EF4-FFF2-40B4-BE49-F238E27FC236}">
-                <a16:creationId xmlns:a16="http://schemas.microsoft.com/office/drawing/2014/main" id="{E3D5C73D-8FC0-43A7-9840-7602CBB13623}"/>
+                <a16:creationId xmlns:a16="http://schemas.microsoft.com/office/drawing/2014/main" id="{BFE1F3F7-6664-4740-BAB0-C3FB47DDBCB8}"/>
               </a:ext>
             </a:extLst>
           </p:cNvPr>
@@ -13954,7 +16470,7 @@
           <p:cNvPr id="7" name="">
             <a:extLst xmlns:a="http://schemas.openxmlformats.org/drawingml/2006/main">
               <a:ext uri="{FF2B5EF4-FFF2-40B4-BE49-F238E27FC236}">
-                <a16:creationId xmlns:a16="http://schemas.microsoft.com/office/drawing/2014/main" id="{38D40070-BA22-4DF0-9B0F-9E5CFFC23A94}"/>
+                <a16:creationId xmlns:a16="http://schemas.microsoft.com/office/drawing/2014/main" id="{4986762B-EA6F-4F81-AFA1-37A7E32CFAC4}"/>
               </a:ext>
             </a:extLst>
           </p:cNvPr>
@@ -14018,7 +16534,7 @@
           <p:cNvPr id="8" name="">
             <a:extLst xmlns:a="http://schemas.openxmlformats.org/drawingml/2006/main">
               <a:ext uri="{FF2B5EF4-FFF2-40B4-BE49-F238E27FC236}">
-                <a16:creationId xmlns:a16="http://schemas.microsoft.com/office/drawing/2014/main" id="{78ABFA58-D6C8-43B8-9AAD-AB05B7F008D7}"/>
+                <a16:creationId xmlns:a16="http://schemas.microsoft.com/office/drawing/2014/main" id="{BA925DD3-1967-47BB-98D4-6FD9ED7C0237}"/>
               </a:ext>
             </a:extLst>
           </p:cNvPr>
@@ -14053,7 +16569,7 @@
           <p:cNvPr id="9" name="">
             <a:extLst xmlns:a="http://schemas.openxmlformats.org/drawingml/2006/main">
               <a:ext uri="{FF2B5EF4-FFF2-40B4-BE49-F238E27FC236}">
-                <a16:creationId xmlns:a16="http://schemas.microsoft.com/office/drawing/2014/main" id="{87EF5880-BFCF-4ACB-B43B-4D44D5DADAB7}"/>
+                <a16:creationId xmlns:a16="http://schemas.microsoft.com/office/drawing/2014/main" id="{4547AA9B-5884-4DFF-9DBB-AC0BEFA6935D}"/>
               </a:ext>
             </a:extLst>
           </p:cNvPr>
@@ -14117,7 +16633,7 @@
           <p:cNvPr id="10" name="">
             <a:extLst xmlns:a="http://schemas.openxmlformats.org/drawingml/2006/main">
               <a:ext uri="{FF2B5EF4-FFF2-40B4-BE49-F238E27FC236}">
-                <a16:creationId xmlns:a16="http://schemas.microsoft.com/office/drawing/2014/main" id="{C44754AE-22EF-4354-983A-CD042CF02A06}"/>
+                <a16:creationId xmlns:a16="http://schemas.microsoft.com/office/drawing/2014/main" id="{7989B709-794C-41E8-BB8F-E2E21CA1C200}"/>
               </a:ext>
             </a:extLst>
           </p:cNvPr>
@@ -14181,7 +16697,7 @@
           <p:cNvPr id="11" name="">
             <a:extLst xmlns:a="http://schemas.openxmlformats.org/drawingml/2006/main">
               <a:ext uri="{FF2B5EF4-FFF2-40B4-BE49-F238E27FC236}">
-                <a16:creationId xmlns:a16="http://schemas.microsoft.com/office/drawing/2014/main" id="{DF78EFA1-75CD-4DB7-A443-61012CB3A2F6}"/>
+                <a16:creationId xmlns:a16="http://schemas.microsoft.com/office/drawing/2014/main" id="{3AA9F74D-8813-4E4A-A777-C4E174EF5284}"/>
               </a:ext>
             </a:extLst>
           </p:cNvPr>
@@ -14216,7 +16732,7 @@
           <p:cNvPr id="12" name="">
             <a:extLst xmlns:a="http://schemas.openxmlformats.org/drawingml/2006/main">
               <a:ext uri="{FF2B5EF4-FFF2-40B4-BE49-F238E27FC236}">
-                <a16:creationId xmlns:a16="http://schemas.microsoft.com/office/drawing/2014/main" id="{A8A4476C-ECF3-46B1-BE7B-D345EE467EE2}"/>
+                <a16:creationId xmlns:a16="http://schemas.microsoft.com/office/drawing/2014/main" id="{A0953D2D-6920-4731-9362-1F5A667C8A96}"/>
               </a:ext>
             </a:extLst>
           </p:cNvPr>
@@ -14280,7 +16796,7 @@
           <p:cNvPr id="13" name="">
             <a:extLst xmlns:a="http://schemas.openxmlformats.org/drawingml/2006/main">
               <a:ext uri="{FF2B5EF4-FFF2-40B4-BE49-F238E27FC236}">
-                <a16:creationId xmlns:a16="http://schemas.microsoft.com/office/drawing/2014/main" id="{B7A2E3CC-1733-45DC-9FA7-B40585C36FD5}"/>
+                <a16:creationId xmlns:a16="http://schemas.microsoft.com/office/drawing/2014/main" id="{947AE224-2901-4546-85AF-1CF9B8FCB7CF}"/>
               </a:ext>
             </a:extLst>
           </p:cNvPr>
@@ -14344,7 +16860,7 @@
           <p:cNvPr id="14" name="">
             <a:extLst xmlns:a="http://schemas.openxmlformats.org/drawingml/2006/main">
               <a:ext uri="{FF2B5EF4-FFF2-40B4-BE49-F238E27FC236}">
-                <a16:creationId xmlns:a16="http://schemas.microsoft.com/office/drawing/2014/main" id="{CFDA529A-41E2-4807-BCC0-F24C8536159C}"/>
+                <a16:creationId xmlns:a16="http://schemas.microsoft.com/office/drawing/2014/main" id="{56B6D4D1-5268-43F1-A7F1-BD5AED76F7A5}"/>
               </a:ext>
             </a:extLst>
           </p:cNvPr>
@@ -14379,7 +16895,7 @@
           <p:cNvPr id="15" name="">
             <a:extLst xmlns:a="http://schemas.openxmlformats.org/drawingml/2006/main">
               <a:ext uri="{FF2B5EF4-FFF2-40B4-BE49-F238E27FC236}">
-                <a16:creationId xmlns:a16="http://schemas.microsoft.com/office/drawing/2014/main" id="{CB915E13-CD86-4945-A2C2-93F259AF6E06}"/>
+                <a16:creationId xmlns:a16="http://schemas.microsoft.com/office/drawing/2014/main" id="{C3060506-EBB3-4A2A-9912-7A3A59EEC595}"/>
               </a:ext>
             </a:extLst>
           </p:cNvPr>
@@ -14443,7 +16959,7 @@
           <p:cNvPr id="16" name="">
             <a:extLst xmlns:a="http://schemas.openxmlformats.org/drawingml/2006/main">
               <a:ext uri="{FF2B5EF4-FFF2-40B4-BE49-F238E27FC236}">
-                <a16:creationId xmlns:a16="http://schemas.microsoft.com/office/drawing/2014/main" id="{95A9EFDB-CDA6-4FCB-B960-96B47DAE9701}"/>
+                <a16:creationId xmlns:a16="http://schemas.microsoft.com/office/drawing/2014/main" id="{F1FC5470-FA7C-48B3-9509-7299BE7F2606}"/>
               </a:ext>
             </a:extLst>
           </p:cNvPr>
@@ -14507,7 +17023,7 @@
           <p:cNvPr id="17" name="">
             <a:extLst xmlns:a="http://schemas.openxmlformats.org/drawingml/2006/main">
               <a:ext uri="{FF2B5EF4-FFF2-40B4-BE49-F238E27FC236}">
-                <a16:creationId xmlns:a16="http://schemas.microsoft.com/office/drawing/2014/main" id="{8A8E8FA6-E46A-4794-8B71-D7E81A8C8CA1}"/>
+                <a16:creationId xmlns:a16="http://schemas.microsoft.com/office/drawing/2014/main" id="{117B5277-EB4C-46AC-837A-80CBEFABF04C}"/>
               </a:ext>
             </a:extLst>
           </p:cNvPr>
@@ -14542,7 +17058,7 @@
           <p:cNvPr id="18" name="">
             <a:extLst xmlns:a="http://schemas.openxmlformats.org/drawingml/2006/main">
               <a:ext uri="{FF2B5EF4-FFF2-40B4-BE49-F238E27FC236}">
-                <a16:creationId xmlns:a16="http://schemas.microsoft.com/office/drawing/2014/main" id="{0D08C6B4-D6F9-40AA-AC34-D9FDBD81FCA7}"/>
+                <a16:creationId xmlns:a16="http://schemas.microsoft.com/office/drawing/2014/main" id="{1D66A07B-108C-4885-925F-DAAAD784CFD6}"/>
               </a:ext>
             </a:extLst>
           </p:cNvPr>
@@ -14606,7 +17122,7 @@
           <p:cNvPr id="19" name="">
             <a:extLst xmlns:a="http://schemas.openxmlformats.org/drawingml/2006/main">
               <a:ext uri="{FF2B5EF4-FFF2-40B4-BE49-F238E27FC236}">
-                <a16:creationId xmlns:a16="http://schemas.microsoft.com/office/drawing/2014/main" id="{A361389C-2A95-4F51-9D30-03F3F625E24F}"/>
+                <a16:creationId xmlns:a16="http://schemas.microsoft.com/office/drawing/2014/main" id="{6E9F077C-573C-413F-BF6B-39884020EDCF}"/>
               </a:ext>
             </a:extLst>
           </p:cNvPr>
@@ -14670,7 +17186,7 @@
           <p:cNvPr id="20" name="">
             <a:extLst xmlns:a="http://schemas.openxmlformats.org/drawingml/2006/main">
               <a:ext uri="{FF2B5EF4-FFF2-40B4-BE49-F238E27FC236}">
-                <a16:creationId xmlns:a16="http://schemas.microsoft.com/office/drawing/2014/main" id="{47060E05-06B4-47FF-A10A-999C2CDADA62}"/>
+                <a16:creationId xmlns:a16="http://schemas.microsoft.com/office/drawing/2014/main" id="{6D85A195-14BA-45C6-B5E2-39A840685C6C}"/>
               </a:ext>
             </a:extLst>
           </p:cNvPr>
@@ -14705,7 +17221,7 @@
           <p:cNvPr id="21" name="">
             <a:extLst xmlns:a="http://schemas.openxmlformats.org/drawingml/2006/main">
               <a:ext uri="{FF2B5EF4-FFF2-40B4-BE49-F238E27FC236}">
-                <a16:creationId xmlns:a16="http://schemas.microsoft.com/office/drawing/2014/main" id="{DE1B9C52-A285-4766-9A82-EEEA97E9D25D}"/>
+                <a16:creationId xmlns:a16="http://schemas.microsoft.com/office/drawing/2014/main" id="{4FC05DC7-EBEB-440D-AA75-675F4BB3832D}"/>
               </a:ext>
             </a:extLst>
           </p:cNvPr>
@@ -14769,7 +17285,7 @@
           <p:cNvPr id="22" name="">
             <a:extLst xmlns:a="http://schemas.openxmlformats.org/drawingml/2006/main">
               <a:ext uri="{FF2B5EF4-FFF2-40B4-BE49-F238E27FC236}">
-                <a16:creationId xmlns:a16="http://schemas.microsoft.com/office/drawing/2014/main" id="{A2D374B3-B31D-4AE6-A3C9-83B82D197F6D}"/>
+                <a16:creationId xmlns:a16="http://schemas.microsoft.com/office/drawing/2014/main" id="{BA28F33A-830E-4544-BE2F-AA9B14BF8A11}"/>
               </a:ext>
             </a:extLst>
           </p:cNvPr>
@@ -14833,7 +17349,7 @@
           <p:cNvPr id="23" name="">
             <a:extLst xmlns:a="http://schemas.openxmlformats.org/drawingml/2006/main">
               <a:ext uri="{FF2B5EF4-FFF2-40B4-BE49-F238E27FC236}">
-                <a16:creationId xmlns:a16="http://schemas.microsoft.com/office/drawing/2014/main" id="{10C673D3-15BB-4B9C-8BA9-27F727A4BF91}"/>
+                <a16:creationId xmlns:a16="http://schemas.microsoft.com/office/drawing/2014/main" id="{BD348EB2-8EE2-45F3-8E00-61F5ACE18CCC}"/>
               </a:ext>
             </a:extLst>
           </p:cNvPr>
@@ -14866,7 +17382,7 @@
           <p:cNvPr id="24" name="">
             <a:extLst xmlns:a="http://schemas.openxmlformats.org/drawingml/2006/main">
               <a:ext uri="{FF2B5EF4-FFF2-40B4-BE49-F238E27FC236}">
-                <a16:creationId xmlns:a16="http://schemas.microsoft.com/office/drawing/2014/main" id="{3DCDF382-E799-400B-8E8F-A8504C449DD5}"/>
+                <a16:creationId xmlns:a16="http://schemas.microsoft.com/office/drawing/2014/main" id="{7F8A79BB-A3A5-4DE9-ADF6-CFF1E7674E96}"/>
               </a:ext>
             </a:extLst>
           </p:cNvPr>
@@ -14930,7 +17446,7 @@
           <p:cNvPr id="25" name="">
             <a:extLst xmlns:a="http://schemas.openxmlformats.org/drawingml/2006/main">
               <a:ext uri="{FF2B5EF4-FFF2-40B4-BE49-F238E27FC236}">
-                <a16:creationId xmlns:a16="http://schemas.microsoft.com/office/drawing/2014/main" id="{E8198CD3-54E4-472D-9EFB-354A9E9B0E19}"/>
+                <a16:creationId xmlns:a16="http://schemas.microsoft.com/office/drawing/2014/main" id="{EBC189CC-8733-4609-ACE7-406A5203E627}"/>
               </a:ext>
             </a:extLst>
           </p:cNvPr>
@@ -15086,7 +17602,7 @@
           <p:cNvPr id="26" name="">
             <a:extLst xmlns:a="http://schemas.openxmlformats.org/drawingml/2006/main">
               <a:ext uri="{FF2B5EF4-FFF2-40B4-BE49-F238E27FC236}">
-                <a16:creationId xmlns:a16="http://schemas.microsoft.com/office/drawing/2014/main" id="{D5B08EB8-3B18-40CE-9ACC-9EF71F13F35C}"/>
+                <a16:creationId xmlns:a16="http://schemas.microsoft.com/office/drawing/2014/main" id="{F167723E-E259-4512-ADA0-EA31238918E9}"/>
               </a:ext>
             </a:extLst>
           </p:cNvPr>
@@ -15150,7 +17666,7 @@
           <p:cNvPr id="27" name="">
             <a:extLst xmlns:a="http://schemas.openxmlformats.org/drawingml/2006/main">
               <a:ext uri="{FF2B5EF4-FFF2-40B4-BE49-F238E27FC236}">
-                <a16:creationId xmlns:a16="http://schemas.microsoft.com/office/drawing/2014/main" id="{A9525ACD-B441-452F-A6AD-DE7B75312D05}"/>
+                <a16:creationId xmlns:a16="http://schemas.microsoft.com/office/drawing/2014/main" id="{751B9039-4292-4550-B8A4-3390318630C2}"/>
               </a:ext>
             </a:extLst>
           </p:cNvPr>
@@ -15214,7 +17730,7 @@
           <p:cNvPr id="28" name="">
             <a:extLst xmlns:a="http://schemas.openxmlformats.org/drawingml/2006/main">
               <a:ext uri="{FF2B5EF4-FFF2-40B4-BE49-F238E27FC236}">
-                <a16:creationId xmlns:a16="http://schemas.microsoft.com/office/drawing/2014/main" id="{33109A3C-7385-422A-A942-BF1D79FF6869}"/>
+                <a16:creationId xmlns:a16="http://schemas.microsoft.com/office/drawing/2014/main" id="{ED86F1AA-7A28-414D-9B7C-ED7312B68A29}"/>
               </a:ext>
             </a:extLst>
           </p:cNvPr>
@@ -15276,7 +17792,7 @@
     </p:spTree>
     <p:extLst>
       <p:ext uri="{BB962C8B-B14F-4D97-AF65-F5344CB8AC3E}">
-        <p14:creationId xmlns:p14="http://schemas.microsoft.com/office/powerpoint/2010/main" val="37911248"/>
+        <p14:creationId xmlns:p14="http://schemas.microsoft.com/office/powerpoint/2010/main" val="1125195418"/>
       </p:ext>
     </p:extLst>
   </p:cSld>
